--- a/coaching-intelligence-pro/Coaching_Plan_Omar_Mansour.pptx
+++ b/coaching-intelligence-pro/Coaching_Plan_Omar_Mansour.pptx
@@ -110,22 +110,22 @@
   <p:extLst>
     <p:ext uri="{521415D9-36F7-43E2-AB2F-B90AF26B5E84}">
       <p14:sectionLst xmlns:p14="http://schemas.microsoft.com/office/powerpoint/2010/main">
-        <p14:section name="Open" id="{7b14fddd-0031-fa09-f705-59faa5393577}">
+        <p14:section name="Open" id="{6baed792-7f17-e298-87de-9dd2577ac54b}">
           <p14:sldIdLst>
             <p14:sldId id="256"/>
           </p14:sldIdLst>
         </p14:section>
-        <p14:section name="The three agents" id="{4de14309-1a35-4a08-196d-972799cc9f3d}">
+        <p14:section name="Where Ammar is now" id="{7e3ed688-e353-9a76-61b4-a4910e600cc8}">
           <p14:sldIdLst>
             <p14:sldId id="257"/>
           </p14:sldIdLst>
         </p14:section>
-        <p14:section name="How I coach" id="{4b118aa2-570d-83d8-eb94-92593cd89659}">
+        <p14:section name="How I coach" id="{2e1d0093-1980-cf9a-ef61-98aaebde2447}">
           <p14:sldIdLst>
             <p14:sldId id="258"/>
           </p14:sldIdLst>
         </p14:section>
-        <p14:section name="Next 30 days" id="{6055536f-f6ba-782f-09f4-1a70a403008f}">
+        <p14:section name="Next 30 days" id="{9b232887-17db-a1a1-e864-a887efab0d60}">
           <p14:sldIdLst>
             <p14:sldId id="259"/>
           </p14:sldIdLst>
@@ -534,7 +534,7 @@
           <a:p>
             <a:r>
               <a:rPr lang="en-US" dirty="0"/>
-              <a:t>This is my coaching plan for the three agents I am working on first: Mohammed Ammar, Mohamed Mahmoud and Ahmed Elbanna. All three are new hires. The numbers are October month to date, September 22 to October 14, from the TSX dashboard. I will go through three things: the three agents and what they need, how I prepare and coach, and my plan for the next 30 days.</a:t>
+              <a:t>This is my coaching plan for Mohammed Ammar. He is a new hire, and he has improved over the last week. I will go through three things: where he is now, how I prepare and coach him, and my plan for the next 30 days.</a:t>
             </a:r>
             <a:endParaRPr lang="en-US" dirty="0"/>
           </a:p>
@@ -622,7 +622,7 @@
           <a:p>
             <a:r>
               <a:rPr lang="en-US" dirty="0"/>
-              <a:t>These are the three agents I am coaching first: Ammar, Mohamed Mahmoud and Ahmed Elbanna. All three need the same six things: assurance, empathy, acknowledgement, rapport, tone of voice, and no unexplained mute or silence on the call. I do not coach six things at once, so I take them two at a time. Week 1 is acknowledgement and empathy, week 2 is assurance and rapport, and week 3 is tone of voice and explaining every pause or using hold instead of going silent. Ammar has been improving over the last period, so I keep the same plan going and sit with him on 2 calls a week. Mohamed Mahmoud and Ahmed Elbanna start at step 1 this week. I model the line, we role play it, and I listen to 2 to 4 of their calls before each weekly session.</a:t>
+              <a:t>Ammar has improved. The week before last he had 1 promoter and 5 detractors, so his tNPS was minus 66.7. Last week he had 4 promoters and 2 detractors, which is 33.3 and right on the 33 target. That is a 100 point swing in one week. He has gone from getting mostly detractors to getting promoters. We are not done. He still needs to lock in assurance, empathy, acknowledgement, rapport, tone of voice, and no unexplained mute or silence. We keep taking them two at a time, and I keep listening to 2 of his calls a week, side by side.</a:t>
             </a:r>
             <a:endParaRPr lang="en-US" dirty="0"/>
           </a:p>
@@ -710,7 +710,7 @@
           <a:p>
             <a:r>
               <a:rPr lang="en-US" dirty="0"/>
-              <a:t>This is how I prepare and coach, following the five focus areas from the calibration email. Before every session I check Tableau, Power BI and i3, I pick one KPI gap, and I listen to 2 to 4 calls. In the session I ask what was going through their mind at that moment, so I get to the cause and not only the symptom. With these three agents the causes are the same: assurance, empathy, acknowledgement, rapport, tone of voice, and unexplained mute or silence. The agent says the gap in their own words, I model it, and we role play. Every plan has one or two behaviors, a KPI target with the surveys behind it, and a follow-up date. Then I follow up on calls every week. The dark row is Ammar, so you can see the five steps on one real agent.</a:t>
+              <a:t>This is how I prepare and coach, following the five focus areas from the calibration email. Before every session I check Tableau, Power BI and i3, I pick one KPI gap, and I listen to 2 to 4 calls. In the session I ask what was going through their mind at that moment, so I get to the cause and not only the symptom. With Ammar the causes were assurance, empathy, acknowledgement, rapport, tone of voice, and unexplained mute or silence. The agent says the gap in their own words, I model it, and we role play. Every plan has one or two behaviors, a KPI target with the surveys behind it, and a follow-up date. Then I follow up on calls every week. The dark row is Ammar, so you can see the five steps on one real agent.</a:t>
             </a:r>
             <a:endParaRPr lang="en-US" dirty="0"/>
           </a:p>
@@ -798,7 +798,7 @@
           <a:p>
             <a:r>
               <a:rPr lang="en-US" dirty="0"/>
-              <a:t>These three agents are negative on 44 of the team’s 172 surveys. If they only get to zero, team tNPS goes from 11 to about 17, before a single new promoter. So the goal for each of them is 0 or better in 30 days, and each step showing on 3 of 3 calls I review. The cadence is the same every week: a session with each of them, 2 calls a week side by side with Ammar, and 2 to 4 calls before each session for Mohamed Mahmoud and Ahmed Elbanna. In week 4 we review everything and decide if the plan is complete, extended or adjusted. Two things would help me. Detractor comments every week, so I can coach the exact moment on the call. And protected time off the phones for side-by-side coaching while they are in nesting.</a:t>
+              <a:t>Last week Ammar had 4 promoters and 2 detractors, up from 1 and 5 the week before. His tNPS went from minus 66.7 to 33.3, so he is at the 33 target. The goal now is to keep him there every week, with 1 detractor or fewer a week, and to bring aiCR from 61.3 up to 62. The cadence stays the same: a session every week, 2 calls a week side by side, and his survey results reviewed with him the same week. In week 4 we review everything and decide if the plan is complete, extended or adjusted. Two things would help me. Detractor comments every week, so I can coach the exact moment on the call. And protected time off the phones for side-by-side coaching.</a:t>
             </a:r>
             <a:endParaRPr lang="en-US" dirty="0"/>
           </a:p>
@@ -1473,7 +1473,7 @@
                   <a:srgbClr val="FFFFFF"/>
                 </a:solidFill>
               </a:rPr>
-              <a:t>Coaching plan: three agents</a:t>
+              <a:t>Coaching plan: Mohammed Ammar</a:t>
             </a:r>
             <a:endParaRPr lang="en-US" sz="5400" dirty="0"/>
           </a:p>
@@ -1509,7 +1509,7 @@
                   <a:srgbClr val="D9DDE6"/>
                 </a:solidFill>
               </a:rPr>
-              <a:t>Who I am coaching first, what they need, and how I prepare and follow up.</a:t>
+              <a:t>Where he is now, how I coach him, and the plan for the next 30 days.</a:t>
             </a:r>
             <a:endParaRPr lang="en-US" sz="1900" dirty="0"/>
           </a:p>
@@ -1523,12 +1523,12 @@
         </p:nvSpPr>
         <p:spPr>
           <a:xfrm>
-            <a:off x="7818120" y="1371600"/>
-            <a:ext cx="3824935" cy="3291840"/>
+            <a:off x="7818120" y="1600200"/>
+            <a:ext cx="3824935" cy="2514600"/>
           </a:xfrm>
           <a:prstGeom prst="roundRect">
             <a:avLst>
-              <a:gd name="adj" fmla="val 5556"/>
+              <a:gd name="adj" fmla="val 7273"/>
             </a:avLst>
           </a:prstGeom>
           <a:solidFill>
@@ -1545,7 +1545,7 @@
         </p:nvSpPr>
         <p:spPr>
           <a:xfrm>
-            <a:off x="8119872" y="1645920"/>
+            <a:off x="8119872" y="1874520"/>
             <a:ext cx="493776" cy="493776"/>
           </a:xfrm>
           <a:prstGeom prst="ellipse">
@@ -1573,7 +1573,7 @@
         </p:blipFill>
         <p:spPr>
           <a:xfrm>
-            <a:off x="8238378" y="1764426"/>
+            <a:off x="8238378" y="1993026"/>
             <a:ext cx="256764" cy="256764"/>
           </a:xfrm>
           <a:prstGeom prst="rect">
@@ -1589,7 +1589,7 @@
         </p:nvSpPr>
         <p:spPr>
           <a:xfrm>
-            <a:off x="8778240" y="1691640"/>
+            <a:off x="8778240" y="1920240"/>
             <a:ext cx="2636215" cy="402336"/>
           </a:xfrm>
           <a:prstGeom prst="rect">
@@ -1622,7 +1622,7 @@
                   <a:srgbClr val="FFFFFF"/>
                 </a:solidFill>
               </a:rPr>
-              <a:t>The three agents</a:t>
+              <a:t>Where Ammar is now</a:t>
             </a:r>
             <a:endParaRPr lang="en-US" sz="1700" dirty="0"/>
           </a:p>
@@ -1636,7 +1636,7 @@
         </p:nvSpPr>
         <p:spPr>
           <a:xfrm>
-            <a:off x="8119872" y="2350008"/>
+            <a:off x="8119872" y="2578608"/>
             <a:ext cx="493776" cy="493776"/>
           </a:xfrm>
           <a:prstGeom prst="ellipse">
@@ -1664,7 +1664,7 @@
         </p:blipFill>
         <p:spPr>
           <a:xfrm>
-            <a:off x="8238378" y="2468514"/>
+            <a:off x="8238378" y="2697114"/>
             <a:ext cx="256764" cy="256764"/>
           </a:xfrm>
           <a:prstGeom prst="rect">
@@ -1680,7 +1680,7 @@
         </p:nvSpPr>
         <p:spPr>
           <a:xfrm>
-            <a:off x="8778240" y="2395728"/>
+            <a:off x="8778240" y="2624328"/>
             <a:ext cx="2636215" cy="402336"/>
           </a:xfrm>
           <a:prstGeom prst="rect">
@@ -1727,7 +1727,7 @@
         </p:nvSpPr>
         <p:spPr>
           <a:xfrm>
-            <a:off x="8119872" y="3054096"/>
+            <a:off x="8119872" y="3282696"/>
             <a:ext cx="493776" cy="493776"/>
           </a:xfrm>
           <a:prstGeom prst="ellipse">
@@ -1755,7 +1755,7 @@
         </p:blipFill>
         <p:spPr>
           <a:xfrm>
-            <a:off x="8238378" y="3172602"/>
+            <a:off x="8238378" y="3401202"/>
             <a:ext cx="256764" cy="256764"/>
           </a:xfrm>
           <a:prstGeom prst="rect">
@@ -1771,7 +1771,7 @@
         </p:nvSpPr>
         <p:spPr>
           <a:xfrm>
-            <a:off x="8778240" y="3099816"/>
+            <a:off x="8778240" y="3328416"/>
             <a:ext cx="2636215" cy="402336"/>
           </a:xfrm>
           <a:prstGeom prst="rect">
@@ -1948,7 +1948,7 @@
                   <a:srgbClr val="FFFFFF"/>
                 </a:solidFill>
               </a:rPr>
-              <a:t>Three agents, coached weekly</a:t>
+              <a:t>Mohammed Ammar, coached weekly</a:t>
             </a:r>
             <a:endParaRPr lang="en-US" sz="1700" dirty="0"/>
           </a:p>
@@ -3186,7 +3186,7 @@
                   <a:srgbClr val="C94A10"/>
                 </a:solidFill>
               </a:rPr>
-              <a:t>THE AGENTS I AM COACHING FIRST</a:t>
+              <a:t>MOHAMMED AMMAR · WEEK OVER WEEK</a:t>
             </a:r>
             <a:endParaRPr lang="en-US" sz="1200" dirty="0"/>
           </a:p>
@@ -3227,7 +3227,7 @@
                 <a:ea typeface="Calibri" pitchFamily="34" charset="-122"/>
                 <a:cs typeface="Calibri" pitchFamily="34" charset="-120"/>
               </a:rPr>
-              <a:t>Three agents, the same six behaviors</a:t>
+              <a:t>From detractors to promoters in one week</a:t>
             </a:r>
             <a:endParaRPr lang="en-US" sz="3200" dirty="0"/>
           </a:p>
@@ -3235,373 +3235,18 @@
       </p:sp>
       <p:sp>
         <p:nvSpPr>
-          <p:cNvPr id="4" name="Behaviors band"/>
+          <p:cNvPr id="4" name="Weeks card"/>
           <p:cNvSpPr/>
           <p:nvPr/>
         </p:nvSpPr>
         <p:spPr>
           <a:xfrm>
             <a:off x="548640" y="1691640"/>
-            <a:ext cx="11094415" cy="1325880"/>
+            <a:ext cx="6675120" cy="4434840"/>
           </a:xfrm>
           <a:prstGeom prst="roundRect">
             <a:avLst>
-              <a:gd name="adj" fmla="val 10345"/>
-            </a:avLst>
-          </a:prstGeom>
-          <a:solidFill>
-            <a:srgbClr val="F6F3EE"/>
-          </a:solidFill>
-          <a:ln/>
-        </p:spPr>
-      </p:sp>
-      <p:sp>
-        <p:nvSpPr>
-          <p:cNvPr id="5" name="Label"/>
-          <p:cNvSpPr txBox="1"/>
-          <p:nvPr/>
-        </p:nvSpPr>
-        <p:spPr>
-          <a:xfrm>
-            <a:off x="822960" y="1856232"/>
-            <a:ext cx="10545775" cy="237744"/>
-          </a:xfrm>
-          <a:prstGeom prst="rect">
-            <a:avLst/>
-          </a:prstGeom>
-          <a:noFill/>
-          <a:ln/>
-        </p:spPr>
-        <p:txBody>
-          <a:bodyPr wrap="square" lIns="0" tIns="0" rIns="0" bIns="0" rtlCol="0" anchor="ctr"/>
-          <a:lstStyle/>
-          <a:p>
-            <a:pPr indent="0" marL="0">
-              <a:buNone/>
-            </a:pPr>
-            <a:r>
-              <a:rPr lang="en-US" sz="1050" b="1" spc="200" kern="0" dirty="0">
-                <a:solidFill>
-                  <a:srgbClr val="6B7280"/>
-                </a:solidFill>
-              </a:rPr>
-              <a:t>WHAT ALL THREE NEED, COACHED TWO AT A TIME</a:t>
-            </a:r>
-            <a:endParaRPr lang="en-US" sz="1050" dirty="0"/>
-          </a:p>
-        </p:txBody>
-      </p:sp>
-      <p:sp>
-        <p:nvSpPr>
-          <p:cNvPr id="6" name="Step box"/>
-          <p:cNvSpPr/>
-          <p:nvPr/>
-        </p:nvSpPr>
-        <p:spPr>
-          <a:xfrm>
-            <a:off x="822960" y="2148840"/>
-            <a:ext cx="3393338" cy="713232"/>
-          </a:xfrm>
-          <a:prstGeom prst="roundRect">
-            <a:avLst>
-              <a:gd name="adj" fmla="val 12821"/>
-            </a:avLst>
-          </a:prstGeom>
-          <a:solidFill>
-            <a:srgbClr val="FFFFFF"/>
-          </a:solidFill>
-          <a:ln w="9525">
-            <a:solidFill>
-              <a:srgbClr val="E3DED7"/>
-            </a:solidFill>
-            <a:prstDash val="solid"/>
-          </a:ln>
-        </p:spPr>
-      </p:sp>
-      <p:sp>
-        <p:nvSpPr>
-          <p:cNvPr id="7" name="Step label"/>
-          <p:cNvSpPr txBox="1"/>
-          <p:nvPr/>
-        </p:nvSpPr>
-        <p:spPr>
-          <a:xfrm>
-            <a:off x="987552" y="2212848"/>
-            <a:ext cx="3064154" cy="182880"/>
-          </a:xfrm>
-          <a:prstGeom prst="rect">
-            <a:avLst/>
-          </a:prstGeom>
-          <a:noFill/>
-          <a:ln/>
-        </p:spPr>
-        <p:txBody>
-          <a:bodyPr wrap="square" lIns="0" tIns="0" rIns="0" bIns="0" rtlCol="0" anchor="ctr"/>
-          <a:lstStyle/>
-          <a:p>
-            <a:pPr indent="0" marL="0">
-              <a:buNone/>
-            </a:pPr>
-            <a:r>
-              <a:rPr lang="en-US" sz="950" b="1" spc="200" kern="0" dirty="0">
-                <a:solidFill>
-                  <a:srgbClr val="C94A10"/>
-                </a:solidFill>
-              </a:rPr>
-              <a:t>STEP 1 · WEEK 1</a:t>
-            </a:r>
-            <a:endParaRPr lang="en-US" sz="950" dirty="0"/>
-          </a:p>
-        </p:txBody>
-      </p:sp>
-      <p:sp>
-        <p:nvSpPr>
-          <p:cNvPr id="8" name="Step behaviors"/>
-          <p:cNvSpPr txBox="1"/>
-          <p:nvPr/>
-        </p:nvSpPr>
-        <p:spPr>
-          <a:xfrm>
-            <a:off x="987552" y="2404872"/>
-            <a:ext cx="3064154" cy="402336"/>
-          </a:xfrm>
-          <a:prstGeom prst="rect">
-            <a:avLst/>
-          </a:prstGeom>
-          <a:noFill/>
-          <a:ln/>
-        </p:spPr>
-        <p:txBody>
-          <a:bodyPr wrap="square" lIns="0" tIns="0" rIns="0" bIns="0" rtlCol="0" anchor="t"/>
-          <a:lstStyle/>
-          <a:p>
-            <a:pPr indent="0" marL="0">
-              <a:buNone/>
-            </a:pPr>
-            <a:r>
-              <a:rPr lang="en-US" sz="1250" b="1" dirty="0">
-                <a:solidFill>
-                  <a:srgbClr val="121826"/>
-                </a:solidFill>
-              </a:rPr>
-              <a:t>Acknowledgement and empathy</a:t>
-            </a:r>
-            <a:endParaRPr lang="en-US" sz="1250" dirty="0"/>
-          </a:p>
-        </p:txBody>
-      </p:sp>
-      <p:sp>
-        <p:nvSpPr>
-          <p:cNvPr id="9" name="Step box"/>
-          <p:cNvSpPr/>
-          <p:nvPr/>
-        </p:nvSpPr>
-        <p:spPr>
-          <a:xfrm>
-            <a:off x="4399178" y="2148840"/>
-            <a:ext cx="3393338" cy="713232"/>
-          </a:xfrm>
-          <a:prstGeom prst="roundRect">
-            <a:avLst>
-              <a:gd name="adj" fmla="val 12821"/>
-            </a:avLst>
-          </a:prstGeom>
-          <a:solidFill>
-            <a:srgbClr val="FFFFFF"/>
-          </a:solidFill>
-          <a:ln w="9525">
-            <a:solidFill>
-              <a:srgbClr val="E3DED7"/>
-            </a:solidFill>
-            <a:prstDash val="solid"/>
-          </a:ln>
-        </p:spPr>
-      </p:sp>
-      <p:sp>
-        <p:nvSpPr>
-          <p:cNvPr id="10" name="Step label"/>
-          <p:cNvSpPr txBox="1"/>
-          <p:nvPr/>
-        </p:nvSpPr>
-        <p:spPr>
-          <a:xfrm>
-            <a:off x="4563770" y="2212848"/>
-            <a:ext cx="3064154" cy="182880"/>
-          </a:xfrm>
-          <a:prstGeom prst="rect">
-            <a:avLst/>
-          </a:prstGeom>
-          <a:noFill/>
-          <a:ln/>
-        </p:spPr>
-        <p:txBody>
-          <a:bodyPr wrap="square" lIns="0" tIns="0" rIns="0" bIns="0" rtlCol="0" anchor="ctr"/>
-          <a:lstStyle/>
-          <a:p>
-            <a:pPr indent="0" marL="0">
-              <a:buNone/>
-            </a:pPr>
-            <a:r>
-              <a:rPr lang="en-US" sz="950" b="1" spc="200" kern="0" dirty="0">
-                <a:solidFill>
-                  <a:srgbClr val="C94A10"/>
-                </a:solidFill>
-              </a:rPr>
-              <a:t>STEP 2 · WEEK 2</a:t>
-            </a:r>
-            <a:endParaRPr lang="en-US" sz="950" dirty="0"/>
-          </a:p>
-        </p:txBody>
-      </p:sp>
-      <p:sp>
-        <p:nvSpPr>
-          <p:cNvPr id="11" name="Step behaviors"/>
-          <p:cNvSpPr txBox="1"/>
-          <p:nvPr/>
-        </p:nvSpPr>
-        <p:spPr>
-          <a:xfrm>
-            <a:off x="4563770" y="2404872"/>
-            <a:ext cx="3064154" cy="402336"/>
-          </a:xfrm>
-          <a:prstGeom prst="rect">
-            <a:avLst/>
-          </a:prstGeom>
-          <a:noFill/>
-          <a:ln/>
-        </p:spPr>
-        <p:txBody>
-          <a:bodyPr wrap="square" lIns="0" tIns="0" rIns="0" bIns="0" rtlCol="0" anchor="t"/>
-          <a:lstStyle/>
-          <a:p>
-            <a:pPr indent="0" marL="0">
-              <a:buNone/>
-            </a:pPr>
-            <a:r>
-              <a:rPr lang="en-US" sz="1250" b="1" dirty="0">
-                <a:solidFill>
-                  <a:srgbClr val="121826"/>
-                </a:solidFill>
-              </a:rPr>
-              <a:t>Assurance and rapport</a:t>
-            </a:r>
-            <a:endParaRPr lang="en-US" sz="1250" dirty="0"/>
-          </a:p>
-        </p:txBody>
-      </p:sp>
-      <p:sp>
-        <p:nvSpPr>
-          <p:cNvPr id="12" name="Step box"/>
-          <p:cNvSpPr/>
-          <p:nvPr/>
-        </p:nvSpPr>
-        <p:spPr>
-          <a:xfrm>
-            <a:off x="7975397" y="2148840"/>
-            <a:ext cx="3393338" cy="713232"/>
-          </a:xfrm>
-          <a:prstGeom prst="roundRect">
-            <a:avLst>
-              <a:gd name="adj" fmla="val 12821"/>
-            </a:avLst>
-          </a:prstGeom>
-          <a:solidFill>
-            <a:srgbClr val="FFFFFF"/>
-          </a:solidFill>
-          <a:ln w="9525">
-            <a:solidFill>
-              <a:srgbClr val="E3DED7"/>
-            </a:solidFill>
-            <a:prstDash val="solid"/>
-          </a:ln>
-        </p:spPr>
-      </p:sp>
-      <p:sp>
-        <p:nvSpPr>
-          <p:cNvPr id="13" name="Step label"/>
-          <p:cNvSpPr txBox="1"/>
-          <p:nvPr/>
-        </p:nvSpPr>
-        <p:spPr>
-          <a:xfrm>
-            <a:off x="8139989" y="2212848"/>
-            <a:ext cx="3064154" cy="182880"/>
-          </a:xfrm>
-          <a:prstGeom prst="rect">
-            <a:avLst/>
-          </a:prstGeom>
-          <a:noFill/>
-          <a:ln/>
-        </p:spPr>
-        <p:txBody>
-          <a:bodyPr wrap="square" lIns="0" tIns="0" rIns="0" bIns="0" rtlCol="0" anchor="ctr"/>
-          <a:lstStyle/>
-          <a:p>
-            <a:pPr indent="0" marL="0">
-              <a:buNone/>
-            </a:pPr>
-            <a:r>
-              <a:rPr lang="en-US" sz="950" b="1" spc="200" kern="0" dirty="0">
-                <a:solidFill>
-                  <a:srgbClr val="C94A10"/>
-                </a:solidFill>
-              </a:rPr>
-              <a:t>STEP 3 · WEEK 3</a:t>
-            </a:r>
-            <a:endParaRPr lang="en-US" sz="950" dirty="0"/>
-          </a:p>
-        </p:txBody>
-      </p:sp>
-      <p:sp>
-        <p:nvSpPr>
-          <p:cNvPr id="14" name="Step behaviors"/>
-          <p:cNvSpPr txBox="1"/>
-          <p:nvPr/>
-        </p:nvSpPr>
-        <p:spPr>
-          <a:xfrm>
-            <a:off x="8139989" y="2404872"/>
-            <a:ext cx="3064154" cy="402336"/>
-          </a:xfrm>
-          <a:prstGeom prst="rect">
-            <a:avLst/>
-          </a:prstGeom>
-          <a:noFill/>
-          <a:ln/>
-        </p:spPr>
-        <p:txBody>
-          <a:bodyPr wrap="square" lIns="0" tIns="0" rIns="0" bIns="0" rtlCol="0" anchor="t"/>
-          <a:lstStyle/>
-          <a:p>
-            <a:pPr indent="0" marL="0">
-              <a:buNone/>
-            </a:pPr>
-            <a:r>
-              <a:rPr lang="en-US" sz="1250" b="1" dirty="0">
-                <a:solidFill>
-                  <a:srgbClr val="121826"/>
-                </a:solidFill>
-              </a:rPr>
-              <a:t>Tone of voice, and no unexplained mute or silence</a:t>
-            </a:r>
-            <a:endParaRPr lang="en-US" sz="1250" dirty="0"/>
-          </a:p>
-        </p:txBody>
-      </p:sp>
-      <p:sp>
-        <p:nvSpPr>
-          <p:cNvPr id="15" name="Agent card"/>
-          <p:cNvSpPr/>
-          <p:nvPr/>
-        </p:nvSpPr>
-        <p:spPr>
-          <a:xfrm>
-            <a:off x="548640" y="3200400"/>
-            <a:ext cx="3515258" cy="2926080"/>
-          </a:xfrm>
-          <a:prstGeom prst="roundRect">
-            <a:avLst>
-              <a:gd name="adj" fmla="val 4688"/>
+              <a:gd name="adj" fmla="val 3093"/>
             </a:avLst>
           </a:prstGeom>
           <a:solidFill>
@@ -3624,14 +3269,14 @@
       </p:sp>
       <p:sp>
         <p:nvSpPr>
-          <p:cNvPr id="16" name="Agent name"/>
+          <p:cNvPr id="5" name="Weeks heading"/>
           <p:cNvSpPr txBox="1"/>
           <p:nvPr/>
         </p:nvSpPr>
         <p:spPr>
           <a:xfrm>
-            <a:off x="804672" y="3364992"/>
-            <a:ext cx="3003194" cy="329184"/>
+            <a:off x="868680" y="1920240"/>
+            <a:ext cx="3657600" cy="310896"/>
           </a:xfrm>
           <a:prstGeom prst="rect">
             <a:avLst/>
@@ -3647,49 +3292,27 @@
               <a:buNone/>
             </a:pPr>
             <a:r>
-              <a:rPr lang="en-US" sz="1700" b="1" dirty="0">
+              <a:rPr lang="en-US" sz="1600" b="1" dirty="0">
                 <a:solidFill>
                   <a:srgbClr val="121826"/>
                 </a:solidFill>
               </a:rPr>
-              <a:t>Mohammed Ammar</a:t>
+              <a:t>tNPS, week over week</a:t>
             </a:r>
-            <a:endParaRPr lang="en-US" sz="1700" dirty="0"/>
+            <a:endParaRPr lang="en-US" sz="1600" dirty="0"/>
           </a:p>
         </p:txBody>
       </p:sp>
       <p:sp>
         <p:nvSpPr>
-          <p:cNvPr id="17" name="Tag"/>
-          <p:cNvSpPr/>
-          <p:nvPr/>
-        </p:nvSpPr>
-        <p:spPr>
-          <a:xfrm>
-            <a:off x="2664866" y="3392424"/>
-            <a:ext cx="1143000" cy="274320"/>
-          </a:xfrm>
-          <a:prstGeom prst="roundRect">
-            <a:avLst>
-              <a:gd name="adj" fmla="val 26667"/>
-            </a:avLst>
-          </a:prstGeom>
-          <a:solidFill>
-            <a:srgbClr val="E3F2EC"/>
-          </a:solidFill>
-          <a:ln/>
-        </p:spPr>
-      </p:sp>
-      <p:sp>
-        <p:nvSpPr>
-          <p:cNvPr id="18" name="Tag text"/>
+          <p:cNvPr id="6" name="Legend"/>
           <p:cNvSpPr txBox="1"/>
           <p:nvPr/>
         </p:nvSpPr>
         <p:spPr>
           <a:xfrm>
-            <a:off x="2664866" y="3392424"/>
-            <a:ext cx="1143000" cy="274320"/>
+            <a:off x="4480560" y="1938528"/>
+            <a:ext cx="2423160" cy="274320"/>
           </a:xfrm>
           <a:prstGeom prst="rect">
             <a:avLst/>
@@ -3701,31 +3324,64 @@
           <a:bodyPr wrap="square" lIns="0" tIns="0" rIns="0" bIns="0" rtlCol="0" anchor="ctr"/>
           <a:lstStyle/>
           <a:p>
-            <a:pPr algn="ctr" indent="0" marL="0">
+            <a:pPr algn="r" indent="0" marL="0">
               <a:buNone/>
             </a:pPr>
             <a:r>
-              <a:rPr lang="en-US" sz="950" b="1" spc="200" kern="0" dirty="0">
+              <a:rPr lang="en-US" sz="1200" dirty="0">
                 <a:solidFill>
                   <a:srgbClr val="1E7F5C"/>
                 </a:solidFill>
               </a:rPr>
-              <a:t>IMPROVING</a:t>
+              <a:t>●  </a:t>
             </a:r>
-            <a:endParaRPr lang="en-US" sz="950" dirty="0"/>
+            <a:pPr algn="r" indent="0" marL="0">
+              <a:buNone/>
+            </a:pPr>
+            <a:r>
+              <a:rPr lang="en-US" sz="1200" dirty="0">
+                <a:solidFill>
+                  <a:srgbClr val="3D4453"/>
+                </a:solidFill>
+              </a:rPr>
+              <a:t>Promoter     </a:t>
+            </a:r>
+            <a:pPr algn="r" indent="0" marL="0">
+              <a:buNone/>
+            </a:pPr>
+            <a:r>
+              <a:rPr lang="en-US" sz="1200" dirty="0">
+                <a:solidFill>
+                  <a:srgbClr val="B42318"/>
+                </a:solidFill>
+              </a:rPr>
+              <a:t>●  </a:t>
+            </a:r>
+            <a:pPr algn="r" indent="0" marL="0">
+              <a:buNone/>
+            </a:pPr>
+            <a:r>
+              <a:rPr lang="en-US" sz="1200" dirty="0">
+                <a:solidFill>
+                  <a:srgbClr val="3D4453"/>
+                </a:solidFill>
+              </a:rPr>
+              <a:t>Detractor</a:t>
+            </a:r>
+            <a:endParaRPr lang="en-US" sz="1200" dirty="0"/>
           </a:p>
         </p:txBody>
       </p:sp>
       <p:sp>
         <p:nvSpPr>
-          <p:cNvPr id="19" name="Agent tNPS"/>
+          <p:cNvPr id="7" name="Week label"/>
           <p:cNvSpPr txBox="1"/>
           <p:nvPr/>
         </p:nvSpPr>
         <p:spPr>
           <a:xfrm>
-            <a:off x="804672" y="3730752"/>
-            <a:ext cx="3003194" cy="457200"/>
+            <a:off x="868680" y="2468880"/>
+            <a:ext cx="2286000" cy="237744"/>
           </a:xfrm>
           <a:prstGeom prst="rect">
             <a:avLst/>
@@ -3741,38 +3397,219 @@
               <a:buNone/>
             </a:pPr>
             <a:r>
-              <a:rPr lang="en-US" sz="2800" b="1" dirty="0">
-                <a:solidFill>
-                  <a:srgbClr val="B42318"/>
-                </a:solidFill>
-              </a:rPr>
-              <a:t>−37.5</a:t>
-            </a:r>
-            <a:pPr indent="0" marL="0">
-              <a:buNone/>
-            </a:pPr>
-            <a:r>
-              <a:rPr lang="en-US" sz="1300" dirty="0">
+              <a:rPr lang="en-US" sz="1050" b="1" spc="200" kern="0" dirty="0">
                 <a:solidFill>
                   <a:srgbClr val="6B7280"/>
                 </a:solidFill>
               </a:rPr>
-              <a:t>  tNPS</a:t>
+              <a:t>WEEK BEFORE</a:t>
             </a:r>
-            <a:endParaRPr lang="en-US" sz="2800" dirty="0"/>
+            <a:endParaRPr lang="en-US" sz="1050" dirty="0"/>
           </a:p>
         </p:txBody>
       </p:sp>
       <p:sp>
         <p:nvSpPr>
-          <p:cNvPr id="20" name="Agent numbers"/>
+          <p:cNvPr id="8" name="Promoter"/>
+          <p:cNvSpPr/>
+          <p:nvPr/>
+        </p:nvSpPr>
+        <p:spPr>
+          <a:xfrm>
+            <a:off x="868680" y="2798064"/>
+            <a:ext cx="420624" cy="420624"/>
+          </a:xfrm>
+          <a:prstGeom prst="ellipse">
+            <a:avLst/>
+          </a:prstGeom>
+          <a:solidFill>
+            <a:srgbClr val="1E7F5C"/>
+          </a:solidFill>
+          <a:ln/>
+        </p:spPr>
+      </p:sp>
+      <p:sp>
+        <p:nvSpPr>
+          <p:cNvPr id="9" name="Detractor"/>
+          <p:cNvSpPr/>
+          <p:nvPr/>
+        </p:nvSpPr>
+        <p:spPr>
+          <a:xfrm>
+            <a:off x="1417320" y="2798064"/>
+            <a:ext cx="420624" cy="420624"/>
+          </a:xfrm>
+          <a:prstGeom prst="ellipse">
+            <a:avLst/>
+          </a:prstGeom>
+          <a:solidFill>
+            <a:srgbClr val="B42318"/>
+          </a:solidFill>
+          <a:ln/>
+        </p:spPr>
+      </p:sp>
+      <p:sp>
+        <p:nvSpPr>
+          <p:cNvPr id="10" name="Detractor"/>
+          <p:cNvSpPr/>
+          <p:nvPr/>
+        </p:nvSpPr>
+        <p:spPr>
+          <a:xfrm>
+            <a:off x="1965960" y="2798064"/>
+            <a:ext cx="420624" cy="420624"/>
+          </a:xfrm>
+          <a:prstGeom prst="ellipse">
+            <a:avLst/>
+          </a:prstGeom>
+          <a:solidFill>
+            <a:srgbClr val="B42318"/>
+          </a:solidFill>
+          <a:ln/>
+        </p:spPr>
+      </p:sp>
+      <p:sp>
+        <p:nvSpPr>
+          <p:cNvPr id="11" name="Detractor"/>
+          <p:cNvSpPr/>
+          <p:nvPr/>
+        </p:nvSpPr>
+        <p:spPr>
+          <a:xfrm>
+            <a:off x="2514600" y="2798064"/>
+            <a:ext cx="420624" cy="420624"/>
+          </a:xfrm>
+          <a:prstGeom prst="ellipse">
+            <a:avLst/>
+          </a:prstGeom>
+          <a:solidFill>
+            <a:srgbClr val="B42318"/>
+          </a:solidFill>
+          <a:ln/>
+        </p:spPr>
+      </p:sp>
+      <p:sp>
+        <p:nvSpPr>
+          <p:cNvPr id="12" name="Detractor"/>
+          <p:cNvSpPr/>
+          <p:nvPr/>
+        </p:nvSpPr>
+        <p:spPr>
+          <a:xfrm>
+            <a:off x="3063240" y="2798064"/>
+            <a:ext cx="420624" cy="420624"/>
+          </a:xfrm>
+          <a:prstGeom prst="ellipse">
+            <a:avLst/>
+          </a:prstGeom>
+          <a:solidFill>
+            <a:srgbClr val="B42318"/>
+          </a:solidFill>
+          <a:ln/>
+        </p:spPr>
+      </p:sp>
+      <p:sp>
+        <p:nvSpPr>
+          <p:cNvPr id="13" name="Detractor"/>
+          <p:cNvSpPr/>
+          <p:nvPr/>
+        </p:nvSpPr>
+        <p:spPr>
+          <a:xfrm>
+            <a:off x="3611880" y="2798064"/>
+            <a:ext cx="420624" cy="420624"/>
+          </a:xfrm>
+          <a:prstGeom prst="ellipse">
+            <a:avLst/>
+          </a:prstGeom>
+          <a:solidFill>
+            <a:srgbClr val="B42318"/>
+          </a:solidFill>
+          <a:ln/>
+        </p:spPr>
+      </p:sp>
+      <p:sp>
+        <p:nvSpPr>
+          <p:cNvPr id="14" name="Week tNPS"/>
           <p:cNvSpPr txBox="1"/>
           <p:nvPr/>
         </p:nvSpPr>
         <p:spPr>
           <a:xfrm>
-            <a:off x="804672" y="4169664"/>
-            <a:ext cx="3003194" cy="237744"/>
+            <a:off x="4343400" y="2670048"/>
+            <a:ext cx="2560320" cy="566928"/>
+          </a:xfrm>
+          <a:prstGeom prst="rect">
+            <a:avLst/>
+          </a:prstGeom>
+          <a:noFill/>
+          <a:ln/>
+        </p:spPr>
+        <p:txBody>
+          <a:bodyPr wrap="square" lIns="0" tIns="0" rIns="0" bIns="0" rtlCol="0" anchor="ctr"/>
+          <a:lstStyle/>
+          <a:p>
+            <a:pPr algn="r" indent="0" marL="0">
+              <a:buNone/>
+            </a:pPr>
+            <a:r>
+              <a:rPr lang="en-US" sz="3600" b="1" dirty="0">
+                <a:solidFill>
+                  <a:srgbClr val="B42318"/>
+                </a:solidFill>
+              </a:rPr>
+              <a:t>−66.7</a:t>
+            </a:r>
+            <a:endParaRPr lang="en-US" sz="3600" dirty="0"/>
+          </a:p>
+        </p:txBody>
+      </p:sp>
+      <p:sp>
+        <p:nvSpPr>
+          <p:cNvPr id="15" name="Week split"/>
+          <p:cNvSpPr txBox="1"/>
+          <p:nvPr/>
+        </p:nvSpPr>
+        <p:spPr>
+          <a:xfrm>
+            <a:off x="4343400" y="3236976"/>
+            <a:ext cx="2560320" cy="219456"/>
+          </a:xfrm>
+          <a:prstGeom prst="rect">
+            <a:avLst/>
+          </a:prstGeom>
+          <a:noFill/>
+          <a:ln/>
+        </p:spPr>
+        <p:txBody>
+          <a:bodyPr wrap="square" lIns="0" tIns="0" rIns="0" bIns="0" rtlCol="0" anchor="ctr"/>
+          <a:lstStyle/>
+          <a:p>
+            <a:pPr algn="r" indent="0" marL="0">
+              <a:buNone/>
+            </a:pPr>
+            <a:r>
+              <a:rPr lang="en-US" sz="1150" dirty="0">
+                <a:solidFill>
+                  <a:srgbClr val="3D4453"/>
+                </a:solidFill>
+              </a:rPr>
+              <a:t>1 promoter · 5 detractors</a:t>
+            </a:r>
+            <a:endParaRPr lang="en-US" sz="1150" dirty="0"/>
+          </a:p>
+        </p:txBody>
+      </p:sp>
+      <p:sp>
+        <p:nvSpPr>
+          <p:cNvPr id="16" name="Week label"/>
+          <p:cNvSpPr txBox="1"/>
+          <p:nvPr/>
+        </p:nvSpPr>
+        <p:spPr>
+          <a:xfrm>
+            <a:off x="868680" y="3566160"/>
+            <a:ext cx="2286000" cy="237744"/>
           </a:xfrm>
           <a:prstGeom prst="rect">
             <a:avLst/>
@@ -3788,27 +3625,562 @@
               <a:buNone/>
             </a:pPr>
             <a:r>
-              <a:rPr lang="en-US" sz="1200" dirty="0">
+              <a:rPr lang="en-US" sz="1050" b="1" spc="200" kern="0" dirty="0">
                 <a:solidFill>
-                  <a:srgbClr val="3D4453"/>
+                  <a:srgbClr val="1E7F5C"/>
                 </a:solidFill>
               </a:rPr>
-              <a:t>16 surveys · aiCR 61.3% · 5 XM lines</a:t>
+              <a:t>LAST WEEK</a:t>
             </a:r>
-            <a:endParaRPr lang="en-US" sz="1200" dirty="0"/>
+            <a:endParaRPr lang="en-US" sz="1050" dirty="0"/>
           </a:p>
         </p:txBody>
       </p:sp>
       <p:sp>
         <p:nvSpPr>
-          <p:cNvPr id="21" name="Divider"/>
+          <p:cNvPr id="17" name="Promoter"/>
           <p:cNvSpPr/>
           <p:nvPr/>
         </p:nvSpPr>
         <p:spPr>
           <a:xfrm>
-            <a:off x="804672" y="4498848"/>
-            <a:ext cx="3003194" cy="0"/>
+            <a:off x="868680" y="3895344"/>
+            <a:ext cx="420624" cy="420624"/>
+          </a:xfrm>
+          <a:prstGeom prst="ellipse">
+            <a:avLst/>
+          </a:prstGeom>
+          <a:solidFill>
+            <a:srgbClr val="1E7F5C"/>
+          </a:solidFill>
+          <a:ln/>
+        </p:spPr>
+      </p:sp>
+      <p:sp>
+        <p:nvSpPr>
+          <p:cNvPr id="18" name="Promoter"/>
+          <p:cNvSpPr/>
+          <p:nvPr/>
+        </p:nvSpPr>
+        <p:spPr>
+          <a:xfrm>
+            <a:off x="1417320" y="3895344"/>
+            <a:ext cx="420624" cy="420624"/>
+          </a:xfrm>
+          <a:prstGeom prst="ellipse">
+            <a:avLst/>
+          </a:prstGeom>
+          <a:solidFill>
+            <a:srgbClr val="1E7F5C"/>
+          </a:solidFill>
+          <a:ln/>
+        </p:spPr>
+      </p:sp>
+      <p:sp>
+        <p:nvSpPr>
+          <p:cNvPr id="19" name="Promoter"/>
+          <p:cNvSpPr/>
+          <p:nvPr/>
+        </p:nvSpPr>
+        <p:spPr>
+          <a:xfrm>
+            <a:off x="1965960" y="3895344"/>
+            <a:ext cx="420624" cy="420624"/>
+          </a:xfrm>
+          <a:prstGeom prst="ellipse">
+            <a:avLst/>
+          </a:prstGeom>
+          <a:solidFill>
+            <a:srgbClr val="1E7F5C"/>
+          </a:solidFill>
+          <a:ln/>
+        </p:spPr>
+      </p:sp>
+      <p:sp>
+        <p:nvSpPr>
+          <p:cNvPr id="20" name="Promoter"/>
+          <p:cNvSpPr/>
+          <p:nvPr/>
+        </p:nvSpPr>
+        <p:spPr>
+          <a:xfrm>
+            <a:off x="2514600" y="3895344"/>
+            <a:ext cx="420624" cy="420624"/>
+          </a:xfrm>
+          <a:prstGeom prst="ellipse">
+            <a:avLst/>
+          </a:prstGeom>
+          <a:solidFill>
+            <a:srgbClr val="1E7F5C"/>
+          </a:solidFill>
+          <a:ln/>
+        </p:spPr>
+      </p:sp>
+      <p:sp>
+        <p:nvSpPr>
+          <p:cNvPr id="21" name="Detractor"/>
+          <p:cNvSpPr/>
+          <p:nvPr/>
+        </p:nvSpPr>
+        <p:spPr>
+          <a:xfrm>
+            <a:off x="3063240" y="3895344"/>
+            <a:ext cx="420624" cy="420624"/>
+          </a:xfrm>
+          <a:prstGeom prst="ellipse">
+            <a:avLst/>
+          </a:prstGeom>
+          <a:solidFill>
+            <a:srgbClr val="B42318"/>
+          </a:solidFill>
+          <a:ln/>
+        </p:spPr>
+      </p:sp>
+      <p:sp>
+        <p:nvSpPr>
+          <p:cNvPr id="22" name="Detractor"/>
+          <p:cNvSpPr/>
+          <p:nvPr/>
+        </p:nvSpPr>
+        <p:spPr>
+          <a:xfrm>
+            <a:off x="3611880" y="3895344"/>
+            <a:ext cx="420624" cy="420624"/>
+          </a:xfrm>
+          <a:prstGeom prst="ellipse">
+            <a:avLst/>
+          </a:prstGeom>
+          <a:solidFill>
+            <a:srgbClr val="B42318"/>
+          </a:solidFill>
+          <a:ln/>
+        </p:spPr>
+      </p:sp>
+      <p:sp>
+        <p:nvSpPr>
+          <p:cNvPr id="23" name="Week tNPS"/>
+          <p:cNvSpPr txBox="1"/>
+          <p:nvPr/>
+        </p:nvSpPr>
+        <p:spPr>
+          <a:xfrm>
+            <a:off x="4343400" y="3767328"/>
+            <a:ext cx="2560320" cy="566928"/>
+          </a:xfrm>
+          <a:prstGeom prst="rect">
+            <a:avLst/>
+          </a:prstGeom>
+          <a:noFill/>
+          <a:ln/>
+        </p:spPr>
+        <p:txBody>
+          <a:bodyPr wrap="square" lIns="0" tIns="0" rIns="0" bIns="0" rtlCol="0" anchor="ctr"/>
+          <a:lstStyle/>
+          <a:p>
+            <a:pPr algn="r" indent="0" marL="0">
+              <a:buNone/>
+            </a:pPr>
+            <a:r>
+              <a:rPr lang="en-US" sz="3600" b="1" dirty="0">
+                <a:solidFill>
+                  <a:srgbClr val="1E7F5C"/>
+                </a:solidFill>
+              </a:rPr>
+              <a:t>33.3</a:t>
+            </a:r>
+            <a:endParaRPr lang="en-US" sz="3600" dirty="0"/>
+          </a:p>
+        </p:txBody>
+      </p:sp>
+      <p:sp>
+        <p:nvSpPr>
+          <p:cNvPr id="24" name="Week split"/>
+          <p:cNvSpPr txBox="1"/>
+          <p:nvPr/>
+        </p:nvSpPr>
+        <p:spPr>
+          <a:xfrm>
+            <a:off x="4343400" y="4334256"/>
+            <a:ext cx="2560320" cy="219456"/>
+          </a:xfrm>
+          <a:prstGeom prst="rect">
+            <a:avLst/>
+          </a:prstGeom>
+          <a:noFill/>
+          <a:ln/>
+        </p:spPr>
+        <p:txBody>
+          <a:bodyPr wrap="square" lIns="0" tIns="0" rIns="0" bIns="0" rtlCol="0" anchor="ctr"/>
+          <a:lstStyle/>
+          <a:p>
+            <a:pPr algn="r" indent="0" marL="0">
+              <a:buNone/>
+            </a:pPr>
+            <a:r>
+              <a:rPr lang="en-US" sz="1150" dirty="0">
+                <a:solidFill>
+                  <a:srgbClr val="3D4453"/>
+                </a:solidFill>
+              </a:rPr>
+              <a:t>4 promoters · 2 detractors</a:t>
+            </a:r>
+            <a:endParaRPr lang="en-US" sz="1150" dirty="0"/>
+          </a:p>
+        </p:txBody>
+      </p:sp>
+      <p:sp>
+        <p:nvSpPr>
+          <p:cNvPr id="25" name="Win band"/>
+          <p:cNvSpPr/>
+          <p:nvPr/>
+        </p:nvSpPr>
+        <p:spPr>
+          <a:xfrm>
+            <a:off x="822960" y="4754880"/>
+            <a:ext cx="6126480" cy="1097280"/>
+          </a:xfrm>
+          <a:prstGeom prst="roundRect">
+            <a:avLst>
+              <a:gd name="adj" fmla="val 10000"/>
+            </a:avLst>
+          </a:prstGeom>
+          <a:solidFill>
+            <a:srgbClr val="E3F2EC"/>
+          </a:solidFill>
+          <a:ln/>
+        </p:spPr>
+      </p:sp>
+      <p:sp>
+        <p:nvSpPr>
+          <p:cNvPr id="26" name="Win text"/>
+          <p:cNvSpPr txBox="1"/>
+          <p:nvPr/>
+        </p:nvSpPr>
+        <p:spPr>
+          <a:xfrm>
+            <a:off x="1051560" y="4754880"/>
+            <a:ext cx="5669280" cy="1097280"/>
+          </a:xfrm>
+          <a:prstGeom prst="rect">
+            <a:avLst/>
+          </a:prstGeom>
+          <a:noFill/>
+          <a:ln/>
+        </p:spPr>
+        <p:txBody>
+          <a:bodyPr wrap="square" lIns="0" tIns="0" rIns="0" bIns="0" rtlCol="0" anchor="ctr"/>
+          <a:lstStyle/>
+          <a:p>
+            <a:pPr indent="0" marL="0">
+              <a:buNone/>
+            </a:pPr>
+            <a:r>
+              <a:rPr lang="en-US" sz="1400" b="1" dirty="0">
+                <a:solidFill>
+                  <a:srgbClr val="1E7F5C"/>
+                </a:solidFill>
+              </a:rPr>
+              <a:t>+100 points. </a:t>
+            </a:r>
+            <a:pPr indent="0" marL="0">
+              <a:buNone/>
+            </a:pPr>
+            <a:r>
+              <a:rPr lang="en-US" sz="1400" dirty="0">
+                <a:solidFill>
+                  <a:srgbClr val="121826"/>
+                </a:solidFill>
+              </a:rPr>
+              <a:t>He went from mostly detractors to mostly promoters, and last week he reached the 33 target.</a:t>
+            </a:r>
+            <a:endParaRPr lang="en-US" sz="1400" dirty="0"/>
+          </a:p>
+        </p:txBody>
+      </p:sp>
+      <p:sp>
+        <p:nvSpPr>
+          <p:cNvPr id="27" name="Plan card"/>
+          <p:cNvSpPr/>
+          <p:nvPr/>
+        </p:nvSpPr>
+        <p:spPr>
+          <a:xfrm>
+            <a:off x="7498080" y="1691640"/>
+            <a:ext cx="4144975" cy="4434840"/>
+          </a:xfrm>
+          <a:prstGeom prst="roundRect">
+            <a:avLst>
+              <a:gd name="adj" fmla="val 3309"/>
+            </a:avLst>
+          </a:prstGeom>
+          <a:solidFill>
+            <a:srgbClr val="F6F3EE"/>
+          </a:solidFill>
+          <a:ln/>
+        </p:spPr>
+      </p:sp>
+      <p:sp>
+        <p:nvSpPr>
+          <p:cNvPr id="28" name="Label"/>
+          <p:cNvSpPr txBox="1"/>
+          <p:nvPr/>
+        </p:nvSpPr>
+        <p:spPr>
+          <a:xfrm>
+            <a:off x="7772400" y="1947672"/>
+            <a:ext cx="3596335" cy="237744"/>
+          </a:xfrm>
+          <a:prstGeom prst="rect">
+            <a:avLst/>
+          </a:prstGeom>
+          <a:noFill/>
+          <a:ln/>
+        </p:spPr>
+        <p:txBody>
+          <a:bodyPr wrap="square" lIns="0" tIns="0" rIns="0" bIns="0" rtlCol="0" anchor="ctr"/>
+          <a:lstStyle/>
+          <a:p>
+            <a:pPr indent="0" marL="0">
+              <a:buNone/>
+            </a:pPr>
+            <a:r>
+              <a:rPr lang="en-US" sz="1050" b="1" spc="200" kern="0" dirty="0">
+                <a:solidFill>
+                  <a:srgbClr val="C94A10"/>
+                </a:solidFill>
+              </a:rPr>
+              <a:t>STILL TO LOCK IN, TWO AT A TIME</a:t>
+            </a:r>
+            <a:endParaRPr lang="en-US" sz="1050" dirty="0"/>
+          </a:p>
+        </p:txBody>
+      </p:sp>
+      <p:sp>
+        <p:nvSpPr>
+          <p:cNvPr id="29" name="Lock number"/>
+          <p:cNvSpPr txBox="1"/>
+          <p:nvPr/>
+        </p:nvSpPr>
+        <p:spPr>
+          <a:xfrm>
+            <a:off x="7772400" y="2295144"/>
+            <a:ext cx="274320" cy="457200"/>
+          </a:xfrm>
+          <a:prstGeom prst="rect">
+            <a:avLst/>
+          </a:prstGeom>
+          <a:noFill/>
+          <a:ln/>
+        </p:spPr>
+        <p:txBody>
+          <a:bodyPr wrap="square" lIns="0" tIns="0" rIns="0" bIns="0" rtlCol="0" anchor="t"/>
+          <a:lstStyle/>
+          <a:p>
+            <a:pPr indent="0" marL="0">
+              <a:buNone/>
+            </a:pPr>
+            <a:r>
+              <a:rPr lang="en-US" sz="2000" b="1" dirty="0">
+                <a:solidFill>
+                  <a:srgbClr val="F26522"/>
+                </a:solidFill>
+              </a:rPr>
+              <a:t>1</a:t>
+            </a:r>
+            <a:endParaRPr lang="en-US" sz="2000" dirty="0"/>
+          </a:p>
+        </p:txBody>
+      </p:sp>
+      <p:sp>
+        <p:nvSpPr>
+          <p:cNvPr id="30" name="Lock behavior"/>
+          <p:cNvSpPr txBox="1"/>
+          <p:nvPr/>
+        </p:nvSpPr>
+        <p:spPr>
+          <a:xfrm>
+            <a:off x="8092440" y="2331720"/>
+            <a:ext cx="3276295" cy="457200"/>
+          </a:xfrm>
+          <a:prstGeom prst="rect">
+            <a:avLst/>
+          </a:prstGeom>
+          <a:noFill/>
+          <a:ln/>
+        </p:spPr>
+        <p:txBody>
+          <a:bodyPr wrap="square" lIns="0" tIns="0" rIns="0" bIns="0" rtlCol="0" anchor="t"/>
+          <a:lstStyle/>
+          <a:p>
+            <a:pPr indent="0" marL="0">
+              <a:buNone/>
+            </a:pPr>
+            <a:r>
+              <a:rPr lang="en-US" sz="1300" b="1" dirty="0">
+                <a:solidFill>
+                  <a:srgbClr val="121826"/>
+                </a:solidFill>
+              </a:rPr>
+              <a:t>Acknowledgement and empathy</a:t>
+            </a:r>
+            <a:endParaRPr lang="en-US" sz="1300" dirty="0"/>
+          </a:p>
+        </p:txBody>
+      </p:sp>
+      <p:sp>
+        <p:nvSpPr>
+          <p:cNvPr id="31" name="Lock number"/>
+          <p:cNvSpPr txBox="1"/>
+          <p:nvPr/>
+        </p:nvSpPr>
+        <p:spPr>
+          <a:xfrm>
+            <a:off x="7772400" y="2843784"/>
+            <a:ext cx="274320" cy="457200"/>
+          </a:xfrm>
+          <a:prstGeom prst="rect">
+            <a:avLst/>
+          </a:prstGeom>
+          <a:noFill/>
+          <a:ln/>
+        </p:spPr>
+        <p:txBody>
+          <a:bodyPr wrap="square" lIns="0" tIns="0" rIns="0" bIns="0" rtlCol="0" anchor="t"/>
+          <a:lstStyle/>
+          <a:p>
+            <a:pPr indent="0" marL="0">
+              <a:buNone/>
+            </a:pPr>
+            <a:r>
+              <a:rPr lang="en-US" sz="2000" b="1" dirty="0">
+                <a:solidFill>
+                  <a:srgbClr val="F26522"/>
+                </a:solidFill>
+              </a:rPr>
+              <a:t>2</a:t>
+            </a:r>
+            <a:endParaRPr lang="en-US" sz="2000" dirty="0"/>
+          </a:p>
+        </p:txBody>
+      </p:sp>
+      <p:sp>
+        <p:nvSpPr>
+          <p:cNvPr id="32" name="Lock behavior"/>
+          <p:cNvSpPr txBox="1"/>
+          <p:nvPr/>
+        </p:nvSpPr>
+        <p:spPr>
+          <a:xfrm>
+            <a:off x="8092440" y="2880360"/>
+            <a:ext cx="3276295" cy="457200"/>
+          </a:xfrm>
+          <a:prstGeom prst="rect">
+            <a:avLst/>
+          </a:prstGeom>
+          <a:noFill/>
+          <a:ln/>
+        </p:spPr>
+        <p:txBody>
+          <a:bodyPr wrap="square" lIns="0" tIns="0" rIns="0" bIns="0" rtlCol="0" anchor="t"/>
+          <a:lstStyle/>
+          <a:p>
+            <a:pPr indent="0" marL="0">
+              <a:buNone/>
+            </a:pPr>
+            <a:r>
+              <a:rPr lang="en-US" sz="1300" b="1" dirty="0">
+                <a:solidFill>
+                  <a:srgbClr val="121826"/>
+                </a:solidFill>
+              </a:rPr>
+              <a:t>Assurance and rapport</a:t>
+            </a:r>
+            <a:endParaRPr lang="en-US" sz="1300" dirty="0"/>
+          </a:p>
+        </p:txBody>
+      </p:sp>
+      <p:sp>
+        <p:nvSpPr>
+          <p:cNvPr id="33" name="Lock number"/>
+          <p:cNvSpPr txBox="1"/>
+          <p:nvPr/>
+        </p:nvSpPr>
+        <p:spPr>
+          <a:xfrm>
+            <a:off x="7772400" y="3392424"/>
+            <a:ext cx="274320" cy="457200"/>
+          </a:xfrm>
+          <a:prstGeom prst="rect">
+            <a:avLst/>
+          </a:prstGeom>
+          <a:noFill/>
+          <a:ln/>
+        </p:spPr>
+        <p:txBody>
+          <a:bodyPr wrap="square" lIns="0" tIns="0" rIns="0" bIns="0" rtlCol="0" anchor="t"/>
+          <a:lstStyle/>
+          <a:p>
+            <a:pPr indent="0" marL="0">
+              <a:buNone/>
+            </a:pPr>
+            <a:r>
+              <a:rPr lang="en-US" sz="2000" b="1" dirty="0">
+                <a:solidFill>
+                  <a:srgbClr val="F26522"/>
+                </a:solidFill>
+              </a:rPr>
+              <a:t>3</a:t>
+            </a:r>
+            <a:endParaRPr lang="en-US" sz="2000" dirty="0"/>
+          </a:p>
+        </p:txBody>
+      </p:sp>
+      <p:sp>
+        <p:nvSpPr>
+          <p:cNvPr id="34" name="Lock behavior"/>
+          <p:cNvSpPr txBox="1"/>
+          <p:nvPr/>
+        </p:nvSpPr>
+        <p:spPr>
+          <a:xfrm>
+            <a:off x="8092440" y="3429000"/>
+            <a:ext cx="3276295" cy="457200"/>
+          </a:xfrm>
+          <a:prstGeom prst="rect">
+            <a:avLst/>
+          </a:prstGeom>
+          <a:noFill/>
+          <a:ln/>
+        </p:spPr>
+        <p:txBody>
+          <a:bodyPr wrap="square" lIns="0" tIns="0" rIns="0" bIns="0" rtlCol="0" anchor="t"/>
+          <a:lstStyle/>
+          <a:p>
+            <a:pPr indent="0" marL="0">
+              <a:buNone/>
+            </a:pPr>
+            <a:r>
+              <a:rPr lang="en-US" sz="1300" b="1" dirty="0">
+                <a:solidFill>
+                  <a:srgbClr val="121826"/>
+                </a:solidFill>
+              </a:rPr>
+              <a:t>Tone of voice, and no unexplained mute or silence</a:t>
+            </a:r>
+            <a:endParaRPr lang="en-US" sz="1300" dirty="0"/>
+          </a:p>
+        </p:txBody>
+      </p:sp>
+      <p:sp>
+        <p:nvSpPr>
+          <p:cNvPr id="35" name="Divider"/>
+          <p:cNvSpPr/>
+          <p:nvPr/>
+        </p:nvSpPr>
+        <p:spPr>
+          <a:xfrm>
+            <a:off x="7772400" y="4023360"/>
+            <a:ext cx="3596335" cy="0"/>
           </a:xfrm>
           <a:prstGeom prst="line">
             <a:avLst/>
@@ -3824,14 +4196,14 @@
       </p:sp>
       <p:sp>
         <p:nvSpPr>
-          <p:cNvPr id="22" name="Label"/>
+          <p:cNvPr id="36" name="Label"/>
           <p:cNvSpPr txBox="1"/>
           <p:nvPr/>
         </p:nvSpPr>
         <p:spPr>
           <a:xfrm>
-            <a:off x="804672" y="4608576"/>
-            <a:ext cx="3003194" cy="237744"/>
+            <a:off x="7772400" y="4160520"/>
+            <a:ext cx="3596335" cy="237744"/>
           </a:xfrm>
           <a:prstGeom prst="rect">
             <a:avLst/>
@@ -3860,14 +4232,14 @@
       </p:sp>
       <p:sp>
         <p:nvSpPr>
-          <p:cNvPr id="23" name="Paragraph"/>
+          <p:cNvPr id="37" name="Paragraph"/>
           <p:cNvSpPr txBox="1"/>
           <p:nvPr/>
         </p:nvSpPr>
         <p:spPr>
           <a:xfrm>
-            <a:off x="804672" y="4846320"/>
-            <a:ext cx="3003194" cy="566928"/>
+            <a:off x="7772400" y="4407408"/>
+            <a:ext cx="3596335" cy="566928"/>
           </a:xfrm>
           <a:prstGeom prst="rect">
             <a:avLst/>
@@ -3883,27 +4255,27 @@
               <a:buNone/>
             </a:pPr>
             <a:r>
-              <a:rPr lang="en-US" sz="1250" dirty="0">
+              <a:rPr lang="en-US" sz="1300" dirty="0">
                 <a:solidFill>
                   <a:srgbClr val="3D4453"/>
                 </a:solidFill>
               </a:rPr>
-              <a:t>Improving over the last period. Same plan, kept going step by step so the gains hold.</a:t>
+              <a:t>Same plan, kept going step by step so the promoters keep coming.</a:t>
             </a:r>
-            <a:endParaRPr lang="en-US" sz="1250" dirty="0"/>
+            <a:endParaRPr lang="en-US" sz="1300" dirty="0"/>
           </a:p>
         </p:txBody>
       </p:sp>
       <p:sp>
         <p:nvSpPr>
-          <p:cNvPr id="24" name="Label"/>
+          <p:cNvPr id="38" name="Label"/>
           <p:cNvSpPr txBox="1"/>
           <p:nvPr/>
         </p:nvSpPr>
         <p:spPr>
           <a:xfrm>
-            <a:off x="804672" y="5468112"/>
-            <a:ext cx="3003194" cy="237744"/>
+            <a:off x="7772400" y="5093208"/>
+            <a:ext cx="3596335" cy="237744"/>
           </a:xfrm>
           <a:prstGeom prst="rect">
             <a:avLst/>
@@ -3932,14 +4304,14 @@
       </p:sp>
       <p:sp>
         <p:nvSpPr>
-          <p:cNvPr id="25" name="Paragraph"/>
+          <p:cNvPr id="39" name="Paragraph"/>
           <p:cNvSpPr txBox="1"/>
           <p:nvPr/>
         </p:nvSpPr>
         <p:spPr>
           <a:xfrm>
-            <a:off x="804672" y="5705856"/>
-            <a:ext cx="3003194" cy="274320"/>
+            <a:off x="7772400" y="5340096"/>
+            <a:ext cx="3596335" cy="292608"/>
           </a:xfrm>
           <a:prstGeom prst="rect">
             <a:avLst/>
@@ -3955,660 +4327,20 @@
               <a:buNone/>
             </a:pPr>
             <a:r>
-              <a:rPr lang="en-US" sz="1250" b="1" dirty="0">
+              <a:rPr lang="en-US" sz="1300" b="1" dirty="0">
                 <a:solidFill>
                   <a:srgbClr val="121826"/>
                 </a:solidFill>
               </a:rPr>
               <a:t>2 calls a week, side by side</a:t>
             </a:r>
-            <a:endParaRPr lang="en-US" sz="1250" dirty="0"/>
+            <a:endParaRPr lang="en-US" sz="1300" dirty="0"/>
           </a:p>
         </p:txBody>
       </p:sp>
       <p:sp>
         <p:nvSpPr>
-          <p:cNvPr id="26" name="Agent card"/>
-          <p:cNvSpPr/>
-          <p:nvPr/>
-        </p:nvSpPr>
-        <p:spPr>
-          <a:xfrm>
-            <a:off x="4338218" y="3200400"/>
-            <a:ext cx="3515258" cy="2926080"/>
-          </a:xfrm>
-          <a:prstGeom prst="roundRect">
-            <a:avLst>
-              <a:gd name="adj" fmla="val 4688"/>
-            </a:avLst>
-          </a:prstGeom>
-          <a:solidFill>
-            <a:srgbClr val="FFFFFF"/>
-          </a:solidFill>
-          <a:ln w="9525">
-            <a:solidFill>
-              <a:srgbClr val="E3DED7"/>
-            </a:solidFill>
-            <a:prstDash val="solid"/>
-          </a:ln>
-          <a:effectLst>
-            <a:outerShdw sx="100000" sy="100000" kx="0" ky="0" algn="bl" rotWithShape="0" blurRad="76200" dist="25400" dir="5400000">
-              <a:srgbClr val="000000">
-                <a:alpha val="8000"/>
-              </a:srgbClr>
-            </a:outerShdw>
-          </a:effectLst>
-        </p:spPr>
-      </p:sp>
-      <p:sp>
-        <p:nvSpPr>
-          <p:cNvPr id="27" name="Agent name"/>
-          <p:cNvSpPr txBox="1"/>
-          <p:nvPr/>
-        </p:nvSpPr>
-        <p:spPr>
-          <a:xfrm>
-            <a:off x="4594250" y="3364992"/>
-            <a:ext cx="3003194" cy="329184"/>
-          </a:xfrm>
-          <a:prstGeom prst="rect">
-            <a:avLst/>
-          </a:prstGeom>
-          <a:noFill/>
-          <a:ln/>
-        </p:spPr>
-        <p:txBody>
-          <a:bodyPr wrap="square" lIns="0" tIns="0" rIns="0" bIns="0" rtlCol="0" anchor="ctr"/>
-          <a:lstStyle/>
-          <a:p>
-            <a:pPr indent="0" marL="0">
-              <a:buNone/>
-            </a:pPr>
-            <a:r>
-              <a:rPr lang="en-US" sz="1700" b="1" dirty="0">
-                <a:solidFill>
-                  <a:srgbClr val="121826"/>
-                </a:solidFill>
-              </a:rPr>
-              <a:t>Mohamed Mahmoud</a:t>
-            </a:r>
-            <a:endParaRPr lang="en-US" sz="1700" dirty="0"/>
-          </a:p>
-        </p:txBody>
-      </p:sp>
-      <p:sp>
-        <p:nvSpPr>
-          <p:cNvPr id="28" name="Agent tNPS"/>
-          <p:cNvSpPr txBox="1"/>
-          <p:nvPr/>
-        </p:nvSpPr>
-        <p:spPr>
-          <a:xfrm>
-            <a:off x="4594250" y="3730752"/>
-            <a:ext cx="3003194" cy="457200"/>
-          </a:xfrm>
-          <a:prstGeom prst="rect">
-            <a:avLst/>
-          </a:prstGeom>
-          <a:noFill/>
-          <a:ln/>
-        </p:spPr>
-        <p:txBody>
-          <a:bodyPr wrap="square" lIns="0" tIns="0" rIns="0" bIns="0" rtlCol="0" anchor="ctr"/>
-          <a:lstStyle/>
-          <a:p>
-            <a:pPr indent="0" marL="0">
-              <a:buNone/>
-            </a:pPr>
-            <a:r>
-              <a:rPr lang="en-US" sz="2800" b="1" dirty="0">
-                <a:solidFill>
-                  <a:srgbClr val="B42318"/>
-                </a:solidFill>
-              </a:rPr>
-              <a:t>−20.0</a:t>
-            </a:r>
-            <a:pPr indent="0" marL="0">
-              <a:buNone/>
-            </a:pPr>
-            <a:r>
-              <a:rPr lang="en-US" sz="1300" dirty="0">
-                <a:solidFill>
-                  <a:srgbClr val="6B7280"/>
-                </a:solidFill>
-              </a:rPr>
-              <a:t>  tNPS</a:t>
-            </a:r>
-            <a:endParaRPr lang="en-US" sz="2800" dirty="0"/>
-          </a:p>
-        </p:txBody>
-      </p:sp>
-      <p:sp>
-        <p:nvSpPr>
-          <p:cNvPr id="29" name="Agent numbers"/>
-          <p:cNvSpPr txBox="1"/>
-          <p:nvPr/>
-        </p:nvSpPr>
-        <p:spPr>
-          <a:xfrm>
-            <a:off x="4594250" y="4169664"/>
-            <a:ext cx="3003194" cy="237744"/>
-          </a:xfrm>
-          <a:prstGeom prst="rect">
-            <a:avLst/>
-          </a:prstGeom>
-          <a:noFill/>
-          <a:ln/>
-        </p:spPr>
-        <p:txBody>
-          <a:bodyPr wrap="square" lIns="0" tIns="0" rIns="0" bIns="0" rtlCol="0" anchor="ctr"/>
-          <a:lstStyle/>
-          <a:p>
-            <a:pPr indent="0" marL="0">
-              <a:buNone/>
-            </a:pPr>
-            <a:r>
-              <a:rPr lang="en-US" sz="1200" dirty="0">
-                <a:solidFill>
-                  <a:srgbClr val="3D4453"/>
-                </a:solidFill>
-              </a:rPr>
-              <a:t>15 surveys · aiCR 65.4% · 1 XM line</a:t>
-            </a:r>
-            <a:endParaRPr lang="en-US" sz="1200" dirty="0"/>
-          </a:p>
-        </p:txBody>
-      </p:sp>
-      <p:sp>
-        <p:nvSpPr>
-          <p:cNvPr id="30" name="Divider"/>
-          <p:cNvSpPr/>
-          <p:nvPr/>
-        </p:nvSpPr>
-        <p:spPr>
-          <a:xfrm>
-            <a:off x="4594250" y="4498848"/>
-            <a:ext cx="3003194" cy="0"/>
-          </a:xfrm>
-          <a:prstGeom prst="line">
-            <a:avLst/>
-          </a:prstGeom>
-          <a:noFill/>
-          <a:ln w="9525">
-            <a:solidFill>
-              <a:srgbClr val="E3DED7"/>
-            </a:solidFill>
-            <a:prstDash val="solid"/>
-          </a:ln>
-        </p:spPr>
-      </p:sp>
-      <p:sp>
-        <p:nvSpPr>
-          <p:cNvPr id="31" name="Label"/>
-          <p:cNvSpPr txBox="1"/>
-          <p:nvPr/>
-        </p:nvSpPr>
-        <p:spPr>
-          <a:xfrm>
-            <a:off x="4594250" y="4608576"/>
-            <a:ext cx="3003194" cy="237744"/>
-          </a:xfrm>
-          <a:prstGeom prst="rect">
-            <a:avLst/>
-          </a:prstGeom>
-          <a:noFill/>
-          <a:ln/>
-        </p:spPr>
-        <p:txBody>
-          <a:bodyPr wrap="square" lIns="0" tIns="0" rIns="0" bIns="0" rtlCol="0" anchor="ctr"/>
-          <a:lstStyle/>
-          <a:p>
-            <a:pPr indent="0" marL="0">
-              <a:buNone/>
-            </a:pPr>
-            <a:r>
-              <a:rPr lang="en-US" sz="1050" b="1" spc="200" kern="0" dirty="0">
-                <a:solidFill>
-                  <a:srgbClr val="C94A10"/>
-                </a:solidFill>
-              </a:rPr>
-              <a:t>PLAN</a:t>
-            </a:r>
-            <a:endParaRPr lang="en-US" sz="1050" dirty="0"/>
-          </a:p>
-        </p:txBody>
-      </p:sp>
-      <p:sp>
-        <p:nvSpPr>
-          <p:cNvPr id="32" name="Paragraph"/>
-          <p:cNvSpPr txBox="1"/>
-          <p:nvPr/>
-        </p:nvSpPr>
-        <p:spPr>
-          <a:xfrm>
-            <a:off x="4594250" y="4846320"/>
-            <a:ext cx="3003194" cy="566928"/>
-          </a:xfrm>
-          <a:prstGeom prst="rect">
-            <a:avLst/>
-          </a:prstGeom>
-          <a:noFill/>
-          <a:ln/>
-        </p:spPr>
-        <p:txBody>
-          <a:bodyPr wrap="square" lIns="0" tIns="0" rIns="0" bIns="0" rtlCol="0" anchor="t"/>
-          <a:lstStyle/>
-          <a:p>
-            <a:pPr indent="0" marL="0">
-              <a:buNone/>
-            </a:pPr>
-            <a:r>
-              <a:rPr lang="en-US" sz="1250" dirty="0">
-                <a:solidFill>
-                  <a:srgbClr val="3D4453"/>
-                </a:solidFill>
-              </a:rPr>
-              <a:t>Starts at step 1 this week. I model the acknowledgement, then we role play it on his own calls.</a:t>
-            </a:r>
-            <a:endParaRPr lang="en-US" sz="1250" dirty="0"/>
-          </a:p>
-        </p:txBody>
-      </p:sp>
-      <p:sp>
-        <p:nvSpPr>
-          <p:cNvPr id="33" name="Label"/>
-          <p:cNvSpPr txBox="1"/>
-          <p:nvPr/>
-        </p:nvSpPr>
-        <p:spPr>
-          <a:xfrm>
-            <a:off x="4594250" y="5468112"/>
-            <a:ext cx="3003194" cy="237744"/>
-          </a:xfrm>
-          <a:prstGeom prst="rect">
-            <a:avLst/>
-          </a:prstGeom>
-          <a:noFill/>
-          <a:ln/>
-        </p:spPr>
-        <p:txBody>
-          <a:bodyPr wrap="square" lIns="0" tIns="0" rIns="0" bIns="0" rtlCol="0" anchor="ctr"/>
-          <a:lstStyle/>
-          <a:p>
-            <a:pPr indent="0" marL="0">
-              <a:buNone/>
-            </a:pPr>
-            <a:r>
-              <a:rPr lang="en-US" sz="1050" b="1" spc="200" kern="0" dirty="0">
-                <a:solidFill>
-                  <a:srgbClr val="C94A10"/>
-                </a:solidFill>
-              </a:rPr>
-              <a:t>FOLLOW-UP</a:t>
-            </a:r>
-            <a:endParaRPr lang="en-US" sz="1050" dirty="0"/>
-          </a:p>
-        </p:txBody>
-      </p:sp>
-      <p:sp>
-        <p:nvSpPr>
-          <p:cNvPr id="34" name="Paragraph"/>
-          <p:cNvSpPr txBox="1"/>
-          <p:nvPr/>
-        </p:nvSpPr>
-        <p:spPr>
-          <a:xfrm>
-            <a:off x="4594250" y="5705856"/>
-            <a:ext cx="3003194" cy="274320"/>
-          </a:xfrm>
-          <a:prstGeom prst="rect">
-            <a:avLst/>
-          </a:prstGeom>
-          <a:noFill/>
-          <a:ln/>
-        </p:spPr>
-        <p:txBody>
-          <a:bodyPr wrap="square" lIns="0" tIns="0" rIns="0" bIns="0" rtlCol="0" anchor="t"/>
-          <a:lstStyle/>
-          <a:p>
-            <a:pPr indent="0" marL="0">
-              <a:buNone/>
-            </a:pPr>
-            <a:r>
-              <a:rPr lang="en-US" sz="1250" b="1" dirty="0">
-                <a:solidFill>
-                  <a:srgbClr val="121826"/>
-                </a:solidFill>
-              </a:rPr>
-              <a:t>2 to 4 calls before each weekly session</a:t>
-            </a:r>
-            <a:endParaRPr lang="en-US" sz="1250" dirty="0"/>
-          </a:p>
-        </p:txBody>
-      </p:sp>
-      <p:sp>
-        <p:nvSpPr>
-          <p:cNvPr id="35" name="Agent card"/>
-          <p:cNvSpPr/>
-          <p:nvPr/>
-        </p:nvSpPr>
-        <p:spPr>
-          <a:xfrm>
-            <a:off x="8127797" y="3200400"/>
-            <a:ext cx="3515258" cy="2926080"/>
-          </a:xfrm>
-          <a:prstGeom prst="roundRect">
-            <a:avLst>
-              <a:gd name="adj" fmla="val 4688"/>
-            </a:avLst>
-          </a:prstGeom>
-          <a:solidFill>
-            <a:srgbClr val="FFFFFF"/>
-          </a:solidFill>
-          <a:ln w="9525">
-            <a:solidFill>
-              <a:srgbClr val="E3DED7"/>
-            </a:solidFill>
-            <a:prstDash val="solid"/>
-          </a:ln>
-          <a:effectLst>
-            <a:outerShdw sx="100000" sy="100000" kx="0" ky="0" algn="bl" rotWithShape="0" blurRad="76200" dist="25400" dir="5400000">
-              <a:srgbClr val="000000">
-                <a:alpha val="8000"/>
-              </a:srgbClr>
-            </a:outerShdw>
-          </a:effectLst>
-        </p:spPr>
-      </p:sp>
-      <p:sp>
-        <p:nvSpPr>
-          <p:cNvPr id="36" name="Agent name"/>
-          <p:cNvSpPr txBox="1"/>
-          <p:nvPr/>
-        </p:nvSpPr>
-        <p:spPr>
-          <a:xfrm>
-            <a:off x="8383829" y="3364992"/>
-            <a:ext cx="3003194" cy="329184"/>
-          </a:xfrm>
-          <a:prstGeom prst="rect">
-            <a:avLst/>
-          </a:prstGeom>
-          <a:noFill/>
-          <a:ln/>
-        </p:spPr>
-        <p:txBody>
-          <a:bodyPr wrap="square" lIns="0" tIns="0" rIns="0" bIns="0" rtlCol="0" anchor="ctr"/>
-          <a:lstStyle/>
-          <a:p>
-            <a:pPr indent="0" marL="0">
-              <a:buNone/>
-            </a:pPr>
-            <a:r>
-              <a:rPr lang="en-US" sz="1700" b="1" dirty="0">
-                <a:solidFill>
-                  <a:srgbClr val="121826"/>
-                </a:solidFill>
-              </a:rPr>
-              <a:t>Ahmed Elbanna</a:t>
-            </a:r>
-            <a:endParaRPr lang="en-US" sz="1700" dirty="0"/>
-          </a:p>
-        </p:txBody>
-      </p:sp>
-      <p:sp>
-        <p:nvSpPr>
-          <p:cNvPr id="37" name="Agent tNPS"/>
-          <p:cNvSpPr txBox="1"/>
-          <p:nvPr/>
-        </p:nvSpPr>
-        <p:spPr>
-          <a:xfrm>
-            <a:off x="8383829" y="3730752"/>
-            <a:ext cx="3003194" cy="457200"/>
-          </a:xfrm>
-          <a:prstGeom prst="rect">
-            <a:avLst/>
-          </a:prstGeom>
-          <a:noFill/>
-          <a:ln/>
-        </p:spPr>
-        <p:txBody>
-          <a:bodyPr wrap="square" lIns="0" tIns="0" rIns="0" bIns="0" rtlCol="0" anchor="ctr"/>
-          <a:lstStyle/>
-          <a:p>
-            <a:pPr indent="0" marL="0">
-              <a:buNone/>
-            </a:pPr>
-            <a:r>
-              <a:rPr lang="en-US" sz="2800" b="1" dirty="0">
-                <a:solidFill>
-                  <a:srgbClr val="B42318"/>
-                </a:solidFill>
-              </a:rPr>
-              <a:t>−15.4</a:t>
-            </a:r>
-            <a:pPr indent="0" marL="0">
-              <a:buNone/>
-            </a:pPr>
-            <a:r>
-              <a:rPr lang="en-US" sz="1300" dirty="0">
-                <a:solidFill>
-                  <a:srgbClr val="6B7280"/>
-                </a:solidFill>
-              </a:rPr>
-              <a:t>  tNPS</a:t>
-            </a:r>
-            <a:endParaRPr lang="en-US" sz="2800" dirty="0"/>
-          </a:p>
-        </p:txBody>
-      </p:sp>
-      <p:sp>
-        <p:nvSpPr>
-          <p:cNvPr id="38" name="Agent numbers"/>
-          <p:cNvSpPr txBox="1"/>
-          <p:nvPr/>
-        </p:nvSpPr>
-        <p:spPr>
-          <a:xfrm>
-            <a:off x="8383829" y="4169664"/>
-            <a:ext cx="3003194" cy="237744"/>
-          </a:xfrm>
-          <a:prstGeom prst="rect">
-            <a:avLst/>
-          </a:prstGeom>
-          <a:noFill/>
-          <a:ln/>
-        </p:spPr>
-        <p:txBody>
-          <a:bodyPr wrap="square" lIns="0" tIns="0" rIns="0" bIns="0" rtlCol="0" anchor="ctr"/>
-          <a:lstStyle/>
-          <a:p>
-            <a:pPr indent="0" marL="0">
-              <a:buNone/>
-            </a:pPr>
-            <a:r>
-              <a:rPr lang="en-US" sz="1200" dirty="0">
-                <a:solidFill>
-                  <a:srgbClr val="3D4453"/>
-                </a:solidFill>
-              </a:rPr>
-              <a:t>13 surveys · aiCR 58.1% · 1 XM line</a:t>
-            </a:r>
-            <a:endParaRPr lang="en-US" sz="1200" dirty="0"/>
-          </a:p>
-        </p:txBody>
-      </p:sp>
-      <p:sp>
-        <p:nvSpPr>
-          <p:cNvPr id="39" name="Divider"/>
-          <p:cNvSpPr/>
-          <p:nvPr/>
-        </p:nvSpPr>
-        <p:spPr>
-          <a:xfrm>
-            <a:off x="8383829" y="4498848"/>
-            <a:ext cx="3003194" cy="0"/>
-          </a:xfrm>
-          <a:prstGeom prst="line">
-            <a:avLst/>
-          </a:prstGeom>
-          <a:noFill/>
-          <a:ln w="9525">
-            <a:solidFill>
-              <a:srgbClr val="E3DED7"/>
-            </a:solidFill>
-            <a:prstDash val="solid"/>
-          </a:ln>
-        </p:spPr>
-      </p:sp>
-      <p:sp>
-        <p:nvSpPr>
-          <p:cNvPr id="40" name="Label"/>
-          <p:cNvSpPr txBox="1"/>
-          <p:nvPr/>
-        </p:nvSpPr>
-        <p:spPr>
-          <a:xfrm>
-            <a:off x="8383829" y="4608576"/>
-            <a:ext cx="3003194" cy="237744"/>
-          </a:xfrm>
-          <a:prstGeom prst="rect">
-            <a:avLst/>
-          </a:prstGeom>
-          <a:noFill/>
-          <a:ln/>
-        </p:spPr>
-        <p:txBody>
-          <a:bodyPr wrap="square" lIns="0" tIns="0" rIns="0" bIns="0" rtlCol="0" anchor="ctr"/>
-          <a:lstStyle/>
-          <a:p>
-            <a:pPr indent="0" marL="0">
-              <a:buNone/>
-            </a:pPr>
-            <a:r>
-              <a:rPr lang="en-US" sz="1050" b="1" spc="200" kern="0" dirty="0">
-                <a:solidFill>
-                  <a:srgbClr val="C94A10"/>
-                </a:solidFill>
-              </a:rPr>
-              <a:t>PLAN</a:t>
-            </a:r>
-            <a:endParaRPr lang="en-US" sz="1050" dirty="0"/>
-          </a:p>
-        </p:txBody>
-      </p:sp>
-      <p:sp>
-        <p:nvSpPr>
-          <p:cNvPr id="41" name="Paragraph"/>
-          <p:cNvSpPr txBox="1"/>
-          <p:nvPr/>
-        </p:nvSpPr>
-        <p:spPr>
-          <a:xfrm>
-            <a:off x="8383829" y="4846320"/>
-            <a:ext cx="3003194" cy="566928"/>
-          </a:xfrm>
-          <a:prstGeom prst="rect">
-            <a:avLst/>
-          </a:prstGeom>
-          <a:noFill/>
-          <a:ln/>
-        </p:spPr>
-        <p:txBody>
-          <a:bodyPr wrap="square" lIns="0" tIns="0" rIns="0" bIns="0" rtlCol="0" anchor="t"/>
-          <a:lstStyle/>
-          <a:p>
-            <a:pPr indent="0" marL="0">
-              <a:buNone/>
-            </a:pPr>
-            <a:r>
-              <a:rPr lang="en-US" sz="1250" dirty="0">
-                <a:solidFill>
-                  <a:srgbClr val="3D4453"/>
-                </a:solidFill>
-              </a:rPr>
-              <a:t>Starts at step 1 this week. I model the empathy line, then we role play it on his own calls.</a:t>
-            </a:r>
-            <a:endParaRPr lang="en-US" sz="1250" dirty="0"/>
-          </a:p>
-        </p:txBody>
-      </p:sp>
-      <p:sp>
-        <p:nvSpPr>
-          <p:cNvPr id="42" name="Label"/>
-          <p:cNvSpPr txBox="1"/>
-          <p:nvPr/>
-        </p:nvSpPr>
-        <p:spPr>
-          <a:xfrm>
-            <a:off x="8383829" y="5468112"/>
-            <a:ext cx="3003194" cy="237744"/>
-          </a:xfrm>
-          <a:prstGeom prst="rect">
-            <a:avLst/>
-          </a:prstGeom>
-          <a:noFill/>
-          <a:ln/>
-        </p:spPr>
-        <p:txBody>
-          <a:bodyPr wrap="square" lIns="0" tIns="0" rIns="0" bIns="0" rtlCol="0" anchor="ctr"/>
-          <a:lstStyle/>
-          <a:p>
-            <a:pPr indent="0" marL="0">
-              <a:buNone/>
-            </a:pPr>
-            <a:r>
-              <a:rPr lang="en-US" sz="1050" b="1" spc="200" kern="0" dirty="0">
-                <a:solidFill>
-                  <a:srgbClr val="C94A10"/>
-                </a:solidFill>
-              </a:rPr>
-              <a:t>FOLLOW-UP</a:t>
-            </a:r>
-            <a:endParaRPr lang="en-US" sz="1050" dirty="0"/>
-          </a:p>
-        </p:txBody>
-      </p:sp>
-      <p:sp>
-        <p:nvSpPr>
-          <p:cNvPr id="43" name="Paragraph"/>
-          <p:cNvSpPr txBox="1"/>
-          <p:nvPr/>
-        </p:nvSpPr>
-        <p:spPr>
-          <a:xfrm>
-            <a:off x="8383829" y="5705856"/>
-            <a:ext cx="3003194" cy="274320"/>
-          </a:xfrm>
-          <a:prstGeom prst="rect">
-            <a:avLst/>
-          </a:prstGeom>
-          <a:noFill/>
-          <a:ln/>
-        </p:spPr>
-        <p:txBody>
-          <a:bodyPr wrap="square" lIns="0" tIns="0" rIns="0" bIns="0" rtlCol="0" anchor="t"/>
-          <a:lstStyle/>
-          <a:p>
-            <a:pPr indent="0" marL="0">
-              <a:buNone/>
-            </a:pPr>
-            <a:r>
-              <a:rPr lang="en-US" sz="1250" b="1" dirty="0">
-                <a:solidFill>
-                  <a:srgbClr val="121826"/>
-                </a:solidFill>
-              </a:rPr>
-              <a:t>2 to 4 calls before each weekly session</a:t>
-            </a:r>
-            <a:endParaRPr lang="en-US" sz="1250" dirty="0"/>
-          </a:p>
-        </p:txBody>
-      </p:sp>
-      <p:sp>
-        <p:nvSpPr>
-          <p:cNvPr id="44" name="Slide Number Placeholder 0"/>
+          <p:cNvPr id="40" name="Slide Number Placeholder 0"/>
           <p:cNvSpPr>
             <a:spLocks noGrp="1"/>
           </p:cNvSpPr>
@@ -4680,7 +4412,7 @@
               <p:cTn id="2" dur="indefinite" nodeType="mainSeq">
                 <p:childTnLst>
                   <p:par>
-                    <p:cTn id="213" fill="hold">
+                    <p:cTn id="171" fill="hold">
                       <p:stCondLst>
                         <p:cond delay="indefinite"/>
                         <p:cond evt="onBegin" delay="0">
@@ -4689,7 +4421,7 @@
                       </p:stCondLst>
                       <p:childTnLst>
                         <p:par>
-                          <p:cTn id="214" fill="hold">
+                          <p:cTn id="172" fill="hold">
                             <p:stCondLst>
                               <p:cond delay="0"/>
                             </p:stCondLst>
@@ -4811,7 +4543,7 @@
                                 </p:cTn>
                               </p:par>
                               <p:par>
-                                <p:cTn id="13" presetID="10" presetClass="entr" presetSubtype="0" grpId="0" fill="hold" nodeType="withEffect">
+                                <p:cTn id="15" presetID="42" presetClass="entr" presetSubtype="0" grpId="0" fill="hold" nodeType="withEffect">
                                   <p:stCondLst>
                                     <p:cond delay="600"/>
                                   </p:stCondLst>
@@ -4836,9 +4568,252 @@
                                     </p:set>
                                     <p:animEffect transition="in" filter="fade">
                                       <p:cBhvr>
-                                        <p:cTn id="12" dur="600"/>
+                                        <p:cTn id="12" dur="750"/>
                                         <p:tgtEl>
                                           <p:spTgt spid="4"/>
+                                        </p:tgtEl>
+                                      </p:cBhvr>
+                                    </p:animEffect>
+                                    <p:anim calcmode="lin" valueType="num">
+                                      <p:cBhvr>
+                                        <p:cTn id="13" dur="750" decel="100000" fill="hold"/>
+                                        <p:tgtEl>
+                                          <p:spTgt spid="4"/>
+                                        </p:tgtEl>
+                                        <p:attrNameLst>
+                                          <p:attrName>ppt_x</p:attrName>
+                                        </p:attrNameLst>
+                                      </p:cBhvr>
+                                      <p:tavLst>
+                                        <p:tav tm="0">
+                                          <p:val>
+                                            <p:strVal val="#ppt_x"/>
+                                          </p:val>
+                                        </p:tav>
+                                        <p:tav tm="100000">
+                                          <p:val>
+                                            <p:strVal val="#ppt_x"/>
+                                          </p:val>
+                                        </p:tav>
+                                      </p:tavLst>
+                                    </p:anim>
+                                    <p:anim calcmode="lin" valueType="num">
+                                      <p:cBhvr>
+                                        <p:cTn id="14" dur="750" decel="100000" fill="hold"/>
+                                        <p:tgtEl>
+                                          <p:spTgt spid="4"/>
+                                        </p:tgtEl>
+                                        <p:attrNameLst>
+                                          <p:attrName>ppt_y</p:attrName>
+                                        </p:attrNameLst>
+                                      </p:cBhvr>
+                                      <p:tavLst>
+                                        <p:tav tm="0">
+                                          <p:val>
+                                            <p:strVal val="#ppt_y+.08"/>
+                                          </p:val>
+                                        </p:tav>
+                                        <p:tav tm="100000">
+                                          <p:val>
+                                            <p:strVal val="#ppt_y"/>
+                                          </p:val>
+                                        </p:tav>
+                                      </p:tavLst>
+                                    </p:anim>
+                                  </p:childTnLst>
+                                </p:cTn>
+                              </p:par>
+                              <p:par>
+                                <p:cTn id="20" presetID="42" presetClass="entr" presetSubtype="0" grpId="0" fill="hold" nodeType="withEffect">
+                                  <p:stCondLst>
+                                    <p:cond delay="600"/>
+                                  </p:stCondLst>
+                                  <p:childTnLst>
+                                    <p:set>
+                                      <p:cBhvr>
+                                        <p:cTn id="16" dur="1" fill="hold">
+                                          <p:stCondLst>
+                                            <p:cond delay="0"/>
+                                          </p:stCondLst>
+                                        </p:cTn>
+                                        <p:tgtEl>
+                                          <p:spTgt spid="5"/>
+                                        </p:tgtEl>
+                                        <p:attrNameLst>
+                                          <p:attrName>style.visibility</p:attrName>
+                                        </p:attrNameLst>
+                                      </p:cBhvr>
+                                      <p:to>
+                                        <p:strVal val="visible"/>
+                                      </p:to>
+                                    </p:set>
+                                    <p:animEffect transition="in" filter="fade">
+                                      <p:cBhvr>
+                                        <p:cTn id="17" dur="750"/>
+                                        <p:tgtEl>
+                                          <p:spTgt spid="5"/>
+                                        </p:tgtEl>
+                                      </p:cBhvr>
+                                    </p:animEffect>
+                                    <p:anim calcmode="lin" valueType="num">
+                                      <p:cBhvr>
+                                        <p:cTn id="18" dur="750" decel="100000" fill="hold"/>
+                                        <p:tgtEl>
+                                          <p:spTgt spid="5"/>
+                                        </p:tgtEl>
+                                        <p:attrNameLst>
+                                          <p:attrName>ppt_x</p:attrName>
+                                        </p:attrNameLst>
+                                      </p:cBhvr>
+                                      <p:tavLst>
+                                        <p:tav tm="0">
+                                          <p:val>
+                                            <p:strVal val="#ppt_x"/>
+                                          </p:val>
+                                        </p:tav>
+                                        <p:tav tm="100000">
+                                          <p:val>
+                                            <p:strVal val="#ppt_x"/>
+                                          </p:val>
+                                        </p:tav>
+                                      </p:tavLst>
+                                    </p:anim>
+                                    <p:anim calcmode="lin" valueType="num">
+                                      <p:cBhvr>
+                                        <p:cTn id="19" dur="750" decel="100000" fill="hold"/>
+                                        <p:tgtEl>
+                                          <p:spTgt spid="5"/>
+                                        </p:tgtEl>
+                                        <p:attrNameLst>
+                                          <p:attrName>ppt_y</p:attrName>
+                                        </p:attrNameLst>
+                                      </p:cBhvr>
+                                      <p:tavLst>
+                                        <p:tav tm="0">
+                                          <p:val>
+                                            <p:strVal val="#ppt_y+.08"/>
+                                          </p:val>
+                                        </p:tav>
+                                        <p:tav tm="100000">
+                                          <p:val>
+                                            <p:strVal val="#ppt_y"/>
+                                          </p:val>
+                                        </p:tav>
+                                      </p:tavLst>
+                                    </p:anim>
+                                  </p:childTnLst>
+                                </p:cTn>
+                              </p:par>
+                              <p:par>
+                                <p:cTn id="25" presetID="42" presetClass="entr" presetSubtype="0" grpId="0" fill="hold" nodeType="withEffect">
+                                  <p:stCondLst>
+                                    <p:cond delay="600"/>
+                                  </p:stCondLst>
+                                  <p:childTnLst>
+                                    <p:set>
+                                      <p:cBhvr>
+                                        <p:cTn id="21" dur="1" fill="hold">
+                                          <p:stCondLst>
+                                            <p:cond delay="0"/>
+                                          </p:stCondLst>
+                                        </p:cTn>
+                                        <p:tgtEl>
+                                          <p:spTgt spid="6"/>
+                                        </p:tgtEl>
+                                        <p:attrNameLst>
+                                          <p:attrName>style.visibility</p:attrName>
+                                        </p:attrNameLst>
+                                      </p:cBhvr>
+                                      <p:to>
+                                        <p:strVal val="visible"/>
+                                      </p:to>
+                                    </p:set>
+                                    <p:animEffect transition="in" filter="fade">
+                                      <p:cBhvr>
+                                        <p:cTn id="22" dur="750"/>
+                                        <p:tgtEl>
+                                          <p:spTgt spid="6"/>
+                                        </p:tgtEl>
+                                      </p:cBhvr>
+                                    </p:animEffect>
+                                    <p:anim calcmode="lin" valueType="num">
+                                      <p:cBhvr>
+                                        <p:cTn id="23" dur="750" decel="100000" fill="hold"/>
+                                        <p:tgtEl>
+                                          <p:spTgt spid="6"/>
+                                        </p:tgtEl>
+                                        <p:attrNameLst>
+                                          <p:attrName>ppt_x</p:attrName>
+                                        </p:attrNameLst>
+                                      </p:cBhvr>
+                                      <p:tavLst>
+                                        <p:tav tm="0">
+                                          <p:val>
+                                            <p:strVal val="#ppt_x"/>
+                                          </p:val>
+                                        </p:tav>
+                                        <p:tav tm="100000">
+                                          <p:val>
+                                            <p:strVal val="#ppt_x"/>
+                                          </p:val>
+                                        </p:tav>
+                                      </p:tavLst>
+                                    </p:anim>
+                                    <p:anim calcmode="lin" valueType="num">
+                                      <p:cBhvr>
+                                        <p:cTn id="24" dur="750" decel="100000" fill="hold"/>
+                                        <p:tgtEl>
+                                          <p:spTgt spid="6"/>
+                                        </p:tgtEl>
+                                        <p:attrNameLst>
+                                          <p:attrName>ppt_y</p:attrName>
+                                        </p:attrNameLst>
+                                      </p:cBhvr>
+                                      <p:tavLst>
+                                        <p:tav tm="0">
+                                          <p:val>
+                                            <p:strVal val="#ppt_y+.08"/>
+                                          </p:val>
+                                        </p:tav>
+                                        <p:tav tm="100000">
+                                          <p:val>
+                                            <p:strVal val="#ppt_y"/>
+                                          </p:val>
+                                        </p:tav>
+                                      </p:tavLst>
+                                    </p:anim>
+                                  </p:childTnLst>
+                                </p:cTn>
+                              </p:par>
+                              <p:par>
+                                <p:cTn id="28" presetID="10" presetClass="entr" presetSubtype="0" grpId="0" fill="hold" nodeType="withEffect">
+                                  <p:stCondLst>
+                                    <p:cond delay="1000"/>
+                                  </p:stCondLst>
+                                  <p:childTnLst>
+                                    <p:set>
+                                      <p:cBhvr>
+                                        <p:cTn id="26" dur="1" fill="hold">
+                                          <p:stCondLst>
+                                            <p:cond delay="0"/>
+                                          </p:stCondLst>
+                                        </p:cTn>
+                                        <p:tgtEl>
+                                          <p:spTgt spid="7"/>
+                                        </p:tgtEl>
+                                        <p:attrNameLst>
+                                          <p:attrName>style.visibility</p:attrName>
+                                        </p:attrNameLst>
+                                      </p:cBhvr>
+                                      <p:to>
+                                        <p:strVal val="visible"/>
+                                      </p:to>
+                                    </p:set>
+                                    <p:animEffect transition="in" filter="fade">
+                                      <p:cBhvr>
+                                        <p:cTn id="27" dur="600"/>
+                                        <p:tgtEl>
+                                          <p:spTgt spid="7"/>
                                         </p:tgtEl>
                                       </p:cBhvr>
                                     </p:animEffect>
@@ -4846,20 +4821,587 @@
                                 </p:cTn>
                               </p:par>
                               <p:par>
-                                <p:cTn id="16" presetID="10" presetClass="entr" presetSubtype="0" grpId="0" fill="hold" nodeType="withEffect">
+                                <p:cTn id="33" presetID="53" presetClass="entr" presetSubtype="16" grpId="0" fill="hold" nodeType="withEffect">
                                   <p:stCondLst>
-                                    <p:cond delay="600"/>
+                                    <p:cond delay="1150"/>
                                   </p:stCondLst>
                                   <p:childTnLst>
                                     <p:set>
                                       <p:cBhvr>
-                                        <p:cTn id="14" dur="1" fill="hold">
+                                        <p:cTn id="29" dur="1" fill="hold">
                                           <p:stCondLst>
                                             <p:cond delay="0"/>
                                           </p:stCondLst>
                                         </p:cTn>
                                         <p:tgtEl>
-                                          <p:spTgt spid="5"/>
+                                          <p:spTgt spid="8"/>
+                                        </p:tgtEl>
+                                        <p:attrNameLst>
+                                          <p:attrName>style.visibility</p:attrName>
+                                        </p:attrNameLst>
+                                      </p:cBhvr>
+                                      <p:to>
+                                        <p:strVal val="visible"/>
+                                      </p:to>
+                                    </p:set>
+                                    <p:anim calcmode="lin" valueType="num">
+                                      <p:cBhvr>
+                                        <p:cTn id="30" dur="500" decel="100000" fill="hold"/>
+                                        <p:tgtEl>
+                                          <p:spTgt spid="8"/>
+                                        </p:tgtEl>
+                                        <p:attrNameLst>
+                                          <p:attrName>ppt_w</p:attrName>
+                                        </p:attrNameLst>
+                                      </p:cBhvr>
+                                      <p:tavLst>
+                                        <p:tav tm="0">
+                                          <p:val>
+                                            <p:fltVal val="0"/>
+                                          </p:val>
+                                        </p:tav>
+                                        <p:tav tm="100000">
+                                          <p:val>
+                                            <p:strVal val="#ppt_w"/>
+                                          </p:val>
+                                        </p:tav>
+                                      </p:tavLst>
+                                    </p:anim>
+                                    <p:anim calcmode="lin" valueType="num">
+                                      <p:cBhvr>
+                                        <p:cTn id="31" dur="500" decel="100000" fill="hold"/>
+                                        <p:tgtEl>
+                                          <p:spTgt spid="8"/>
+                                        </p:tgtEl>
+                                        <p:attrNameLst>
+                                          <p:attrName>ppt_h</p:attrName>
+                                        </p:attrNameLst>
+                                      </p:cBhvr>
+                                      <p:tavLst>
+                                        <p:tav tm="0">
+                                          <p:val>
+                                            <p:fltVal val="0"/>
+                                          </p:val>
+                                        </p:tav>
+                                        <p:tav tm="100000">
+                                          <p:val>
+                                            <p:strVal val="#ppt_h"/>
+                                          </p:val>
+                                        </p:tav>
+                                      </p:tavLst>
+                                    </p:anim>
+                                    <p:animEffect transition="in" filter="fade">
+                                      <p:cBhvr>
+                                        <p:cTn id="32" dur="500"/>
+                                        <p:tgtEl>
+                                          <p:spTgt spid="8"/>
+                                        </p:tgtEl>
+                                      </p:cBhvr>
+                                    </p:animEffect>
+                                  </p:childTnLst>
+                                </p:cTn>
+                              </p:par>
+                              <p:par>
+                                <p:cTn id="38" presetID="53" presetClass="entr" presetSubtype="16" grpId="0" fill="hold" nodeType="withEffect">
+                                  <p:stCondLst>
+                                    <p:cond delay="1260"/>
+                                  </p:stCondLst>
+                                  <p:childTnLst>
+                                    <p:set>
+                                      <p:cBhvr>
+                                        <p:cTn id="34" dur="1" fill="hold">
+                                          <p:stCondLst>
+                                            <p:cond delay="0"/>
+                                          </p:stCondLst>
+                                        </p:cTn>
+                                        <p:tgtEl>
+                                          <p:spTgt spid="9"/>
+                                        </p:tgtEl>
+                                        <p:attrNameLst>
+                                          <p:attrName>style.visibility</p:attrName>
+                                        </p:attrNameLst>
+                                      </p:cBhvr>
+                                      <p:to>
+                                        <p:strVal val="visible"/>
+                                      </p:to>
+                                    </p:set>
+                                    <p:anim calcmode="lin" valueType="num">
+                                      <p:cBhvr>
+                                        <p:cTn id="35" dur="500" decel="100000" fill="hold"/>
+                                        <p:tgtEl>
+                                          <p:spTgt spid="9"/>
+                                        </p:tgtEl>
+                                        <p:attrNameLst>
+                                          <p:attrName>ppt_w</p:attrName>
+                                        </p:attrNameLst>
+                                      </p:cBhvr>
+                                      <p:tavLst>
+                                        <p:tav tm="0">
+                                          <p:val>
+                                            <p:fltVal val="0"/>
+                                          </p:val>
+                                        </p:tav>
+                                        <p:tav tm="100000">
+                                          <p:val>
+                                            <p:strVal val="#ppt_w"/>
+                                          </p:val>
+                                        </p:tav>
+                                      </p:tavLst>
+                                    </p:anim>
+                                    <p:anim calcmode="lin" valueType="num">
+                                      <p:cBhvr>
+                                        <p:cTn id="36" dur="500" decel="100000" fill="hold"/>
+                                        <p:tgtEl>
+                                          <p:spTgt spid="9"/>
+                                        </p:tgtEl>
+                                        <p:attrNameLst>
+                                          <p:attrName>ppt_h</p:attrName>
+                                        </p:attrNameLst>
+                                      </p:cBhvr>
+                                      <p:tavLst>
+                                        <p:tav tm="0">
+                                          <p:val>
+                                            <p:fltVal val="0"/>
+                                          </p:val>
+                                        </p:tav>
+                                        <p:tav tm="100000">
+                                          <p:val>
+                                            <p:strVal val="#ppt_h"/>
+                                          </p:val>
+                                        </p:tav>
+                                      </p:tavLst>
+                                    </p:anim>
+                                    <p:animEffect transition="in" filter="fade">
+                                      <p:cBhvr>
+                                        <p:cTn id="37" dur="500"/>
+                                        <p:tgtEl>
+                                          <p:spTgt spid="9"/>
+                                        </p:tgtEl>
+                                      </p:cBhvr>
+                                    </p:animEffect>
+                                  </p:childTnLst>
+                                </p:cTn>
+                              </p:par>
+                              <p:par>
+                                <p:cTn id="43" presetID="53" presetClass="entr" presetSubtype="16" grpId="0" fill="hold" nodeType="withEffect">
+                                  <p:stCondLst>
+                                    <p:cond delay="1370"/>
+                                  </p:stCondLst>
+                                  <p:childTnLst>
+                                    <p:set>
+                                      <p:cBhvr>
+                                        <p:cTn id="39" dur="1" fill="hold">
+                                          <p:stCondLst>
+                                            <p:cond delay="0"/>
+                                          </p:stCondLst>
+                                        </p:cTn>
+                                        <p:tgtEl>
+                                          <p:spTgt spid="10"/>
+                                        </p:tgtEl>
+                                        <p:attrNameLst>
+                                          <p:attrName>style.visibility</p:attrName>
+                                        </p:attrNameLst>
+                                      </p:cBhvr>
+                                      <p:to>
+                                        <p:strVal val="visible"/>
+                                      </p:to>
+                                    </p:set>
+                                    <p:anim calcmode="lin" valueType="num">
+                                      <p:cBhvr>
+                                        <p:cTn id="40" dur="500" decel="100000" fill="hold"/>
+                                        <p:tgtEl>
+                                          <p:spTgt spid="10"/>
+                                        </p:tgtEl>
+                                        <p:attrNameLst>
+                                          <p:attrName>ppt_w</p:attrName>
+                                        </p:attrNameLst>
+                                      </p:cBhvr>
+                                      <p:tavLst>
+                                        <p:tav tm="0">
+                                          <p:val>
+                                            <p:fltVal val="0"/>
+                                          </p:val>
+                                        </p:tav>
+                                        <p:tav tm="100000">
+                                          <p:val>
+                                            <p:strVal val="#ppt_w"/>
+                                          </p:val>
+                                        </p:tav>
+                                      </p:tavLst>
+                                    </p:anim>
+                                    <p:anim calcmode="lin" valueType="num">
+                                      <p:cBhvr>
+                                        <p:cTn id="41" dur="500" decel="100000" fill="hold"/>
+                                        <p:tgtEl>
+                                          <p:spTgt spid="10"/>
+                                        </p:tgtEl>
+                                        <p:attrNameLst>
+                                          <p:attrName>ppt_h</p:attrName>
+                                        </p:attrNameLst>
+                                      </p:cBhvr>
+                                      <p:tavLst>
+                                        <p:tav tm="0">
+                                          <p:val>
+                                            <p:fltVal val="0"/>
+                                          </p:val>
+                                        </p:tav>
+                                        <p:tav tm="100000">
+                                          <p:val>
+                                            <p:strVal val="#ppt_h"/>
+                                          </p:val>
+                                        </p:tav>
+                                      </p:tavLst>
+                                    </p:anim>
+                                    <p:animEffect transition="in" filter="fade">
+                                      <p:cBhvr>
+                                        <p:cTn id="42" dur="500"/>
+                                        <p:tgtEl>
+                                          <p:spTgt spid="10"/>
+                                        </p:tgtEl>
+                                      </p:cBhvr>
+                                    </p:animEffect>
+                                  </p:childTnLst>
+                                </p:cTn>
+                              </p:par>
+                              <p:par>
+                                <p:cTn id="48" presetID="53" presetClass="entr" presetSubtype="16" grpId="0" fill="hold" nodeType="withEffect">
+                                  <p:stCondLst>
+                                    <p:cond delay="1480"/>
+                                  </p:stCondLst>
+                                  <p:childTnLst>
+                                    <p:set>
+                                      <p:cBhvr>
+                                        <p:cTn id="44" dur="1" fill="hold">
+                                          <p:stCondLst>
+                                            <p:cond delay="0"/>
+                                          </p:stCondLst>
+                                        </p:cTn>
+                                        <p:tgtEl>
+                                          <p:spTgt spid="11"/>
+                                        </p:tgtEl>
+                                        <p:attrNameLst>
+                                          <p:attrName>style.visibility</p:attrName>
+                                        </p:attrNameLst>
+                                      </p:cBhvr>
+                                      <p:to>
+                                        <p:strVal val="visible"/>
+                                      </p:to>
+                                    </p:set>
+                                    <p:anim calcmode="lin" valueType="num">
+                                      <p:cBhvr>
+                                        <p:cTn id="45" dur="500" decel="100000" fill="hold"/>
+                                        <p:tgtEl>
+                                          <p:spTgt spid="11"/>
+                                        </p:tgtEl>
+                                        <p:attrNameLst>
+                                          <p:attrName>ppt_w</p:attrName>
+                                        </p:attrNameLst>
+                                      </p:cBhvr>
+                                      <p:tavLst>
+                                        <p:tav tm="0">
+                                          <p:val>
+                                            <p:fltVal val="0"/>
+                                          </p:val>
+                                        </p:tav>
+                                        <p:tav tm="100000">
+                                          <p:val>
+                                            <p:strVal val="#ppt_w"/>
+                                          </p:val>
+                                        </p:tav>
+                                      </p:tavLst>
+                                    </p:anim>
+                                    <p:anim calcmode="lin" valueType="num">
+                                      <p:cBhvr>
+                                        <p:cTn id="46" dur="500" decel="100000" fill="hold"/>
+                                        <p:tgtEl>
+                                          <p:spTgt spid="11"/>
+                                        </p:tgtEl>
+                                        <p:attrNameLst>
+                                          <p:attrName>ppt_h</p:attrName>
+                                        </p:attrNameLst>
+                                      </p:cBhvr>
+                                      <p:tavLst>
+                                        <p:tav tm="0">
+                                          <p:val>
+                                            <p:fltVal val="0"/>
+                                          </p:val>
+                                        </p:tav>
+                                        <p:tav tm="100000">
+                                          <p:val>
+                                            <p:strVal val="#ppt_h"/>
+                                          </p:val>
+                                        </p:tav>
+                                      </p:tavLst>
+                                    </p:anim>
+                                    <p:animEffect transition="in" filter="fade">
+                                      <p:cBhvr>
+                                        <p:cTn id="47" dur="500"/>
+                                        <p:tgtEl>
+                                          <p:spTgt spid="11"/>
+                                        </p:tgtEl>
+                                      </p:cBhvr>
+                                    </p:animEffect>
+                                  </p:childTnLst>
+                                </p:cTn>
+                              </p:par>
+                              <p:par>
+                                <p:cTn id="53" presetID="53" presetClass="entr" presetSubtype="16" grpId="0" fill="hold" nodeType="withEffect">
+                                  <p:stCondLst>
+                                    <p:cond delay="1590"/>
+                                  </p:stCondLst>
+                                  <p:childTnLst>
+                                    <p:set>
+                                      <p:cBhvr>
+                                        <p:cTn id="49" dur="1" fill="hold">
+                                          <p:stCondLst>
+                                            <p:cond delay="0"/>
+                                          </p:stCondLst>
+                                        </p:cTn>
+                                        <p:tgtEl>
+                                          <p:spTgt spid="12"/>
+                                        </p:tgtEl>
+                                        <p:attrNameLst>
+                                          <p:attrName>style.visibility</p:attrName>
+                                        </p:attrNameLst>
+                                      </p:cBhvr>
+                                      <p:to>
+                                        <p:strVal val="visible"/>
+                                      </p:to>
+                                    </p:set>
+                                    <p:anim calcmode="lin" valueType="num">
+                                      <p:cBhvr>
+                                        <p:cTn id="50" dur="500" decel="100000" fill="hold"/>
+                                        <p:tgtEl>
+                                          <p:spTgt spid="12"/>
+                                        </p:tgtEl>
+                                        <p:attrNameLst>
+                                          <p:attrName>ppt_w</p:attrName>
+                                        </p:attrNameLst>
+                                      </p:cBhvr>
+                                      <p:tavLst>
+                                        <p:tav tm="0">
+                                          <p:val>
+                                            <p:fltVal val="0"/>
+                                          </p:val>
+                                        </p:tav>
+                                        <p:tav tm="100000">
+                                          <p:val>
+                                            <p:strVal val="#ppt_w"/>
+                                          </p:val>
+                                        </p:tav>
+                                      </p:tavLst>
+                                    </p:anim>
+                                    <p:anim calcmode="lin" valueType="num">
+                                      <p:cBhvr>
+                                        <p:cTn id="51" dur="500" decel="100000" fill="hold"/>
+                                        <p:tgtEl>
+                                          <p:spTgt spid="12"/>
+                                        </p:tgtEl>
+                                        <p:attrNameLst>
+                                          <p:attrName>ppt_h</p:attrName>
+                                        </p:attrNameLst>
+                                      </p:cBhvr>
+                                      <p:tavLst>
+                                        <p:tav tm="0">
+                                          <p:val>
+                                            <p:fltVal val="0"/>
+                                          </p:val>
+                                        </p:tav>
+                                        <p:tav tm="100000">
+                                          <p:val>
+                                            <p:strVal val="#ppt_h"/>
+                                          </p:val>
+                                        </p:tav>
+                                      </p:tavLst>
+                                    </p:anim>
+                                    <p:animEffect transition="in" filter="fade">
+                                      <p:cBhvr>
+                                        <p:cTn id="52" dur="500"/>
+                                        <p:tgtEl>
+                                          <p:spTgt spid="12"/>
+                                        </p:tgtEl>
+                                      </p:cBhvr>
+                                    </p:animEffect>
+                                  </p:childTnLst>
+                                </p:cTn>
+                              </p:par>
+                              <p:par>
+                                <p:cTn id="58" presetID="53" presetClass="entr" presetSubtype="16" grpId="0" fill="hold" nodeType="withEffect">
+                                  <p:stCondLst>
+                                    <p:cond delay="1700"/>
+                                  </p:stCondLst>
+                                  <p:childTnLst>
+                                    <p:set>
+                                      <p:cBhvr>
+                                        <p:cTn id="54" dur="1" fill="hold">
+                                          <p:stCondLst>
+                                            <p:cond delay="0"/>
+                                          </p:stCondLst>
+                                        </p:cTn>
+                                        <p:tgtEl>
+                                          <p:spTgt spid="13"/>
+                                        </p:tgtEl>
+                                        <p:attrNameLst>
+                                          <p:attrName>style.visibility</p:attrName>
+                                        </p:attrNameLst>
+                                      </p:cBhvr>
+                                      <p:to>
+                                        <p:strVal val="visible"/>
+                                      </p:to>
+                                    </p:set>
+                                    <p:anim calcmode="lin" valueType="num">
+                                      <p:cBhvr>
+                                        <p:cTn id="55" dur="500" decel="100000" fill="hold"/>
+                                        <p:tgtEl>
+                                          <p:spTgt spid="13"/>
+                                        </p:tgtEl>
+                                        <p:attrNameLst>
+                                          <p:attrName>ppt_w</p:attrName>
+                                        </p:attrNameLst>
+                                      </p:cBhvr>
+                                      <p:tavLst>
+                                        <p:tav tm="0">
+                                          <p:val>
+                                            <p:fltVal val="0"/>
+                                          </p:val>
+                                        </p:tav>
+                                        <p:tav tm="100000">
+                                          <p:val>
+                                            <p:strVal val="#ppt_w"/>
+                                          </p:val>
+                                        </p:tav>
+                                      </p:tavLst>
+                                    </p:anim>
+                                    <p:anim calcmode="lin" valueType="num">
+                                      <p:cBhvr>
+                                        <p:cTn id="56" dur="500" decel="100000" fill="hold"/>
+                                        <p:tgtEl>
+                                          <p:spTgt spid="13"/>
+                                        </p:tgtEl>
+                                        <p:attrNameLst>
+                                          <p:attrName>ppt_h</p:attrName>
+                                        </p:attrNameLst>
+                                      </p:cBhvr>
+                                      <p:tavLst>
+                                        <p:tav tm="0">
+                                          <p:val>
+                                            <p:fltVal val="0"/>
+                                          </p:val>
+                                        </p:tav>
+                                        <p:tav tm="100000">
+                                          <p:val>
+                                            <p:strVal val="#ppt_h"/>
+                                          </p:val>
+                                        </p:tav>
+                                      </p:tavLst>
+                                    </p:anim>
+                                    <p:animEffect transition="in" filter="fade">
+                                      <p:cBhvr>
+                                        <p:cTn id="57" dur="500"/>
+                                        <p:tgtEl>
+                                          <p:spTgt spid="13"/>
+                                        </p:tgtEl>
+                                      </p:cBhvr>
+                                    </p:animEffect>
+                                  </p:childTnLst>
+                                </p:cTn>
+                              </p:par>
+                              <p:par>
+                                <p:cTn id="63" presetID="53" presetClass="entr" presetSubtype="16" grpId="0" fill="hold" nodeType="withEffect">
+                                  <p:stCondLst>
+                                    <p:cond delay="1850"/>
+                                  </p:stCondLst>
+                                  <p:childTnLst>
+                                    <p:set>
+                                      <p:cBhvr>
+                                        <p:cTn id="59" dur="1" fill="hold">
+                                          <p:stCondLst>
+                                            <p:cond delay="0"/>
+                                          </p:stCondLst>
+                                        </p:cTn>
+                                        <p:tgtEl>
+                                          <p:spTgt spid="14"/>
+                                        </p:tgtEl>
+                                        <p:attrNameLst>
+                                          <p:attrName>style.visibility</p:attrName>
+                                        </p:attrNameLst>
+                                      </p:cBhvr>
+                                      <p:to>
+                                        <p:strVal val="visible"/>
+                                      </p:to>
+                                    </p:set>
+                                    <p:anim calcmode="lin" valueType="num">
+                                      <p:cBhvr>
+                                        <p:cTn id="60" dur="500" decel="100000" fill="hold"/>
+                                        <p:tgtEl>
+                                          <p:spTgt spid="14"/>
+                                        </p:tgtEl>
+                                        <p:attrNameLst>
+                                          <p:attrName>ppt_w</p:attrName>
+                                        </p:attrNameLst>
+                                      </p:cBhvr>
+                                      <p:tavLst>
+                                        <p:tav tm="0">
+                                          <p:val>
+                                            <p:fltVal val="0"/>
+                                          </p:val>
+                                        </p:tav>
+                                        <p:tav tm="100000">
+                                          <p:val>
+                                            <p:strVal val="#ppt_w"/>
+                                          </p:val>
+                                        </p:tav>
+                                      </p:tavLst>
+                                    </p:anim>
+                                    <p:anim calcmode="lin" valueType="num">
+                                      <p:cBhvr>
+                                        <p:cTn id="61" dur="500" decel="100000" fill="hold"/>
+                                        <p:tgtEl>
+                                          <p:spTgt spid="14"/>
+                                        </p:tgtEl>
+                                        <p:attrNameLst>
+                                          <p:attrName>ppt_h</p:attrName>
+                                        </p:attrNameLst>
+                                      </p:cBhvr>
+                                      <p:tavLst>
+                                        <p:tav tm="0">
+                                          <p:val>
+                                            <p:fltVal val="0"/>
+                                          </p:val>
+                                        </p:tav>
+                                        <p:tav tm="100000">
+                                          <p:val>
+                                            <p:strVal val="#ppt_h"/>
+                                          </p:val>
+                                        </p:tav>
+                                      </p:tavLst>
+                                    </p:anim>
+                                    <p:animEffect transition="in" filter="fade">
+                                      <p:cBhvr>
+                                        <p:cTn id="62" dur="500"/>
+                                        <p:tgtEl>
+                                          <p:spTgt spid="14"/>
+                                        </p:tgtEl>
+                                      </p:cBhvr>
+                                    </p:animEffect>
+                                  </p:childTnLst>
+                                </p:cTn>
+                              </p:par>
+                              <p:par>
+                                <p:cTn id="66" presetID="10" presetClass="entr" presetSubtype="0" grpId="0" fill="hold" nodeType="withEffect">
+                                  <p:stCondLst>
+                                    <p:cond delay="1850"/>
+                                  </p:stCondLst>
+                                  <p:childTnLst>
+                                    <p:set>
+                                      <p:cBhvr>
+                                        <p:cTn id="64" dur="1" fill="hold">
+                                          <p:stCondLst>
+                                            <p:cond delay="0"/>
+                                          </p:stCondLst>
+                                        </p:cTn>
+                                        <p:tgtEl>
+                                          <p:spTgt spid="15"/>
                                         </p:tgtEl>
                                         <p:attrNameLst>
                                           <p:attrName>style.visibility</p:attrName>
@@ -4871,9 +5413,9 @@
                                     </p:set>
                                     <p:animEffect transition="in" filter="fade">
                                       <p:cBhvr>
-                                        <p:cTn id="15" dur="600"/>
-                                        <p:tgtEl>
-                                          <p:spTgt spid="5"/>
+                                        <p:cTn id="65" dur="600"/>
+                                        <p:tgtEl>
+                                          <p:spTgt spid="15"/>
                                         </p:tgtEl>
                                       </p:cBhvr>
                                     </p:animEffect>
@@ -4881,20 +5423,20 @@
                                 </p:cTn>
                               </p:par>
                               <p:par>
-                                <p:cTn id="21" presetID="42" presetClass="entr" presetSubtype="0" grpId="0" fill="hold" nodeType="withEffect">
+                                <p:cTn id="69" presetID="10" presetClass="entr" presetSubtype="0" grpId="0" fill="hold" nodeType="withEffect">
                                   <p:stCondLst>
-                                    <p:cond delay="850"/>
+                                    <p:cond delay="2250"/>
                                   </p:stCondLst>
                                   <p:childTnLst>
                                     <p:set>
                                       <p:cBhvr>
-                                        <p:cTn id="17" dur="1" fill="hold">
+                                        <p:cTn id="67" dur="1" fill="hold">
                                           <p:stCondLst>
                                             <p:cond delay="0"/>
                                           </p:stCondLst>
                                         </p:cTn>
                                         <p:tgtEl>
-                                          <p:spTgt spid="6"/>
+                                          <p:spTgt spid="16"/>
                                         </p:tgtEl>
                                         <p:attrNameLst>
                                           <p:attrName>style.visibility</p:attrName>
@@ -4906,76 +5448,597 @@
                                     </p:set>
                                     <p:animEffect transition="in" filter="fade">
                                       <p:cBhvr>
-                                        <p:cTn id="18" dur="750"/>
-                                        <p:tgtEl>
-                                          <p:spTgt spid="6"/>
+                                        <p:cTn id="68" dur="600"/>
+                                        <p:tgtEl>
+                                          <p:spTgt spid="16"/>
                                         </p:tgtEl>
                                       </p:cBhvr>
                                     </p:animEffect>
-                                    <p:anim calcmode="lin" valueType="num">
-                                      <p:cBhvr>
-                                        <p:cTn id="19" dur="750" decel="100000" fill="hold"/>
-                                        <p:tgtEl>
-                                          <p:spTgt spid="6"/>
-                                        </p:tgtEl>
-                                        <p:attrNameLst>
-                                          <p:attrName>ppt_x</p:attrName>
-                                        </p:attrNameLst>
-                                      </p:cBhvr>
-                                      <p:tavLst>
-                                        <p:tav tm="0">
-                                          <p:val>
-                                            <p:strVal val="#ppt_x"/>
-                                          </p:val>
-                                        </p:tav>
-                                        <p:tav tm="100000">
-                                          <p:val>
-                                            <p:strVal val="#ppt_x"/>
-                                          </p:val>
-                                        </p:tav>
-                                      </p:tavLst>
-                                    </p:anim>
-                                    <p:anim calcmode="lin" valueType="num">
-                                      <p:cBhvr>
-                                        <p:cTn id="20" dur="750" decel="100000" fill="hold"/>
-                                        <p:tgtEl>
-                                          <p:spTgt spid="6"/>
-                                        </p:tgtEl>
-                                        <p:attrNameLst>
-                                          <p:attrName>ppt_y</p:attrName>
-                                        </p:attrNameLst>
-                                      </p:cBhvr>
-                                      <p:tavLst>
-                                        <p:tav tm="0">
-                                          <p:val>
-                                            <p:strVal val="#ppt_y+.08"/>
-                                          </p:val>
-                                        </p:tav>
-                                        <p:tav tm="100000">
-                                          <p:val>
-                                            <p:strVal val="#ppt_y"/>
-                                          </p:val>
-                                        </p:tav>
-                                      </p:tavLst>
-                                    </p:anim>
                                   </p:childTnLst>
                                 </p:cTn>
                               </p:par>
                               <p:par>
-                                <p:cTn id="26" presetID="42" presetClass="entr" presetSubtype="0" grpId="0" fill="hold" nodeType="withEffect">
+                                <p:cTn id="74" presetID="53" presetClass="entr" presetSubtype="16" grpId="0" fill="hold" nodeType="withEffect">
                                   <p:stCondLst>
-                                    <p:cond delay="850"/>
+                                    <p:cond delay="2400"/>
                                   </p:stCondLst>
                                   <p:childTnLst>
                                     <p:set>
                                       <p:cBhvr>
-                                        <p:cTn id="22" dur="1" fill="hold">
+                                        <p:cTn id="70" dur="1" fill="hold">
                                           <p:stCondLst>
                                             <p:cond delay="0"/>
                                           </p:stCondLst>
                                         </p:cTn>
                                         <p:tgtEl>
-                                          <p:spTgt spid="7"/>
+                                          <p:spTgt spid="17"/>
+                                        </p:tgtEl>
+                                        <p:attrNameLst>
+                                          <p:attrName>style.visibility</p:attrName>
+                                        </p:attrNameLst>
+                                      </p:cBhvr>
+                                      <p:to>
+                                        <p:strVal val="visible"/>
+                                      </p:to>
+                                    </p:set>
+                                    <p:anim calcmode="lin" valueType="num">
+                                      <p:cBhvr>
+                                        <p:cTn id="71" dur="500" decel="100000" fill="hold"/>
+                                        <p:tgtEl>
+                                          <p:spTgt spid="17"/>
+                                        </p:tgtEl>
+                                        <p:attrNameLst>
+                                          <p:attrName>ppt_w</p:attrName>
+                                        </p:attrNameLst>
+                                      </p:cBhvr>
+                                      <p:tavLst>
+                                        <p:tav tm="0">
+                                          <p:val>
+                                            <p:fltVal val="0"/>
+                                          </p:val>
+                                        </p:tav>
+                                        <p:tav tm="100000">
+                                          <p:val>
+                                            <p:strVal val="#ppt_w"/>
+                                          </p:val>
+                                        </p:tav>
+                                      </p:tavLst>
+                                    </p:anim>
+                                    <p:anim calcmode="lin" valueType="num">
+                                      <p:cBhvr>
+                                        <p:cTn id="72" dur="500" decel="100000" fill="hold"/>
+                                        <p:tgtEl>
+                                          <p:spTgt spid="17"/>
+                                        </p:tgtEl>
+                                        <p:attrNameLst>
+                                          <p:attrName>ppt_h</p:attrName>
+                                        </p:attrNameLst>
+                                      </p:cBhvr>
+                                      <p:tavLst>
+                                        <p:tav tm="0">
+                                          <p:val>
+                                            <p:fltVal val="0"/>
+                                          </p:val>
+                                        </p:tav>
+                                        <p:tav tm="100000">
+                                          <p:val>
+                                            <p:strVal val="#ppt_h"/>
+                                          </p:val>
+                                        </p:tav>
+                                      </p:tavLst>
+                                    </p:anim>
+                                    <p:animEffect transition="in" filter="fade">
+                                      <p:cBhvr>
+                                        <p:cTn id="73" dur="500"/>
+                                        <p:tgtEl>
+                                          <p:spTgt spid="17"/>
+                                        </p:tgtEl>
+                                      </p:cBhvr>
+                                    </p:animEffect>
+                                  </p:childTnLst>
+                                </p:cTn>
+                              </p:par>
+                              <p:par>
+                                <p:cTn id="79" presetID="53" presetClass="entr" presetSubtype="16" grpId="0" fill="hold" nodeType="withEffect">
+                                  <p:stCondLst>
+                                    <p:cond delay="2510"/>
+                                  </p:stCondLst>
+                                  <p:childTnLst>
+                                    <p:set>
+                                      <p:cBhvr>
+                                        <p:cTn id="75" dur="1" fill="hold">
+                                          <p:stCondLst>
+                                            <p:cond delay="0"/>
+                                          </p:stCondLst>
+                                        </p:cTn>
+                                        <p:tgtEl>
+                                          <p:spTgt spid="18"/>
+                                        </p:tgtEl>
+                                        <p:attrNameLst>
+                                          <p:attrName>style.visibility</p:attrName>
+                                        </p:attrNameLst>
+                                      </p:cBhvr>
+                                      <p:to>
+                                        <p:strVal val="visible"/>
+                                      </p:to>
+                                    </p:set>
+                                    <p:anim calcmode="lin" valueType="num">
+                                      <p:cBhvr>
+                                        <p:cTn id="76" dur="500" decel="100000" fill="hold"/>
+                                        <p:tgtEl>
+                                          <p:spTgt spid="18"/>
+                                        </p:tgtEl>
+                                        <p:attrNameLst>
+                                          <p:attrName>ppt_w</p:attrName>
+                                        </p:attrNameLst>
+                                      </p:cBhvr>
+                                      <p:tavLst>
+                                        <p:tav tm="0">
+                                          <p:val>
+                                            <p:fltVal val="0"/>
+                                          </p:val>
+                                        </p:tav>
+                                        <p:tav tm="100000">
+                                          <p:val>
+                                            <p:strVal val="#ppt_w"/>
+                                          </p:val>
+                                        </p:tav>
+                                      </p:tavLst>
+                                    </p:anim>
+                                    <p:anim calcmode="lin" valueType="num">
+                                      <p:cBhvr>
+                                        <p:cTn id="77" dur="500" decel="100000" fill="hold"/>
+                                        <p:tgtEl>
+                                          <p:spTgt spid="18"/>
+                                        </p:tgtEl>
+                                        <p:attrNameLst>
+                                          <p:attrName>ppt_h</p:attrName>
+                                        </p:attrNameLst>
+                                      </p:cBhvr>
+                                      <p:tavLst>
+                                        <p:tav tm="0">
+                                          <p:val>
+                                            <p:fltVal val="0"/>
+                                          </p:val>
+                                        </p:tav>
+                                        <p:tav tm="100000">
+                                          <p:val>
+                                            <p:strVal val="#ppt_h"/>
+                                          </p:val>
+                                        </p:tav>
+                                      </p:tavLst>
+                                    </p:anim>
+                                    <p:animEffect transition="in" filter="fade">
+                                      <p:cBhvr>
+                                        <p:cTn id="78" dur="500"/>
+                                        <p:tgtEl>
+                                          <p:spTgt spid="18"/>
+                                        </p:tgtEl>
+                                      </p:cBhvr>
+                                    </p:animEffect>
+                                  </p:childTnLst>
+                                </p:cTn>
+                              </p:par>
+                              <p:par>
+                                <p:cTn id="84" presetID="53" presetClass="entr" presetSubtype="16" grpId="0" fill="hold" nodeType="withEffect">
+                                  <p:stCondLst>
+                                    <p:cond delay="2620"/>
+                                  </p:stCondLst>
+                                  <p:childTnLst>
+                                    <p:set>
+                                      <p:cBhvr>
+                                        <p:cTn id="80" dur="1" fill="hold">
+                                          <p:stCondLst>
+                                            <p:cond delay="0"/>
+                                          </p:stCondLst>
+                                        </p:cTn>
+                                        <p:tgtEl>
+                                          <p:spTgt spid="19"/>
+                                        </p:tgtEl>
+                                        <p:attrNameLst>
+                                          <p:attrName>style.visibility</p:attrName>
+                                        </p:attrNameLst>
+                                      </p:cBhvr>
+                                      <p:to>
+                                        <p:strVal val="visible"/>
+                                      </p:to>
+                                    </p:set>
+                                    <p:anim calcmode="lin" valueType="num">
+                                      <p:cBhvr>
+                                        <p:cTn id="81" dur="500" decel="100000" fill="hold"/>
+                                        <p:tgtEl>
+                                          <p:spTgt spid="19"/>
+                                        </p:tgtEl>
+                                        <p:attrNameLst>
+                                          <p:attrName>ppt_w</p:attrName>
+                                        </p:attrNameLst>
+                                      </p:cBhvr>
+                                      <p:tavLst>
+                                        <p:tav tm="0">
+                                          <p:val>
+                                            <p:fltVal val="0"/>
+                                          </p:val>
+                                        </p:tav>
+                                        <p:tav tm="100000">
+                                          <p:val>
+                                            <p:strVal val="#ppt_w"/>
+                                          </p:val>
+                                        </p:tav>
+                                      </p:tavLst>
+                                    </p:anim>
+                                    <p:anim calcmode="lin" valueType="num">
+                                      <p:cBhvr>
+                                        <p:cTn id="82" dur="500" decel="100000" fill="hold"/>
+                                        <p:tgtEl>
+                                          <p:spTgt spid="19"/>
+                                        </p:tgtEl>
+                                        <p:attrNameLst>
+                                          <p:attrName>ppt_h</p:attrName>
+                                        </p:attrNameLst>
+                                      </p:cBhvr>
+                                      <p:tavLst>
+                                        <p:tav tm="0">
+                                          <p:val>
+                                            <p:fltVal val="0"/>
+                                          </p:val>
+                                        </p:tav>
+                                        <p:tav tm="100000">
+                                          <p:val>
+                                            <p:strVal val="#ppt_h"/>
+                                          </p:val>
+                                        </p:tav>
+                                      </p:tavLst>
+                                    </p:anim>
+                                    <p:animEffect transition="in" filter="fade">
+                                      <p:cBhvr>
+                                        <p:cTn id="83" dur="500"/>
+                                        <p:tgtEl>
+                                          <p:spTgt spid="19"/>
+                                        </p:tgtEl>
+                                      </p:cBhvr>
+                                    </p:animEffect>
+                                  </p:childTnLst>
+                                </p:cTn>
+                              </p:par>
+                              <p:par>
+                                <p:cTn id="89" presetID="53" presetClass="entr" presetSubtype="16" grpId="0" fill="hold" nodeType="withEffect">
+                                  <p:stCondLst>
+                                    <p:cond delay="2730"/>
+                                  </p:stCondLst>
+                                  <p:childTnLst>
+                                    <p:set>
+                                      <p:cBhvr>
+                                        <p:cTn id="85" dur="1" fill="hold">
+                                          <p:stCondLst>
+                                            <p:cond delay="0"/>
+                                          </p:stCondLst>
+                                        </p:cTn>
+                                        <p:tgtEl>
+                                          <p:spTgt spid="20"/>
+                                        </p:tgtEl>
+                                        <p:attrNameLst>
+                                          <p:attrName>style.visibility</p:attrName>
+                                        </p:attrNameLst>
+                                      </p:cBhvr>
+                                      <p:to>
+                                        <p:strVal val="visible"/>
+                                      </p:to>
+                                    </p:set>
+                                    <p:anim calcmode="lin" valueType="num">
+                                      <p:cBhvr>
+                                        <p:cTn id="86" dur="500" decel="100000" fill="hold"/>
+                                        <p:tgtEl>
+                                          <p:spTgt spid="20"/>
+                                        </p:tgtEl>
+                                        <p:attrNameLst>
+                                          <p:attrName>ppt_w</p:attrName>
+                                        </p:attrNameLst>
+                                      </p:cBhvr>
+                                      <p:tavLst>
+                                        <p:tav tm="0">
+                                          <p:val>
+                                            <p:fltVal val="0"/>
+                                          </p:val>
+                                        </p:tav>
+                                        <p:tav tm="100000">
+                                          <p:val>
+                                            <p:strVal val="#ppt_w"/>
+                                          </p:val>
+                                        </p:tav>
+                                      </p:tavLst>
+                                    </p:anim>
+                                    <p:anim calcmode="lin" valueType="num">
+                                      <p:cBhvr>
+                                        <p:cTn id="87" dur="500" decel="100000" fill="hold"/>
+                                        <p:tgtEl>
+                                          <p:spTgt spid="20"/>
+                                        </p:tgtEl>
+                                        <p:attrNameLst>
+                                          <p:attrName>ppt_h</p:attrName>
+                                        </p:attrNameLst>
+                                      </p:cBhvr>
+                                      <p:tavLst>
+                                        <p:tav tm="0">
+                                          <p:val>
+                                            <p:fltVal val="0"/>
+                                          </p:val>
+                                        </p:tav>
+                                        <p:tav tm="100000">
+                                          <p:val>
+                                            <p:strVal val="#ppt_h"/>
+                                          </p:val>
+                                        </p:tav>
+                                      </p:tavLst>
+                                    </p:anim>
+                                    <p:animEffect transition="in" filter="fade">
+                                      <p:cBhvr>
+                                        <p:cTn id="88" dur="500"/>
+                                        <p:tgtEl>
+                                          <p:spTgt spid="20"/>
+                                        </p:tgtEl>
+                                      </p:cBhvr>
+                                    </p:animEffect>
+                                  </p:childTnLst>
+                                </p:cTn>
+                              </p:par>
+                              <p:par>
+                                <p:cTn id="94" presetID="53" presetClass="entr" presetSubtype="16" grpId="0" fill="hold" nodeType="withEffect">
+                                  <p:stCondLst>
+                                    <p:cond delay="2840"/>
+                                  </p:stCondLst>
+                                  <p:childTnLst>
+                                    <p:set>
+                                      <p:cBhvr>
+                                        <p:cTn id="90" dur="1" fill="hold">
+                                          <p:stCondLst>
+                                            <p:cond delay="0"/>
+                                          </p:stCondLst>
+                                        </p:cTn>
+                                        <p:tgtEl>
+                                          <p:spTgt spid="21"/>
+                                        </p:tgtEl>
+                                        <p:attrNameLst>
+                                          <p:attrName>style.visibility</p:attrName>
+                                        </p:attrNameLst>
+                                      </p:cBhvr>
+                                      <p:to>
+                                        <p:strVal val="visible"/>
+                                      </p:to>
+                                    </p:set>
+                                    <p:anim calcmode="lin" valueType="num">
+                                      <p:cBhvr>
+                                        <p:cTn id="91" dur="500" decel="100000" fill="hold"/>
+                                        <p:tgtEl>
+                                          <p:spTgt spid="21"/>
+                                        </p:tgtEl>
+                                        <p:attrNameLst>
+                                          <p:attrName>ppt_w</p:attrName>
+                                        </p:attrNameLst>
+                                      </p:cBhvr>
+                                      <p:tavLst>
+                                        <p:tav tm="0">
+                                          <p:val>
+                                            <p:fltVal val="0"/>
+                                          </p:val>
+                                        </p:tav>
+                                        <p:tav tm="100000">
+                                          <p:val>
+                                            <p:strVal val="#ppt_w"/>
+                                          </p:val>
+                                        </p:tav>
+                                      </p:tavLst>
+                                    </p:anim>
+                                    <p:anim calcmode="lin" valueType="num">
+                                      <p:cBhvr>
+                                        <p:cTn id="92" dur="500" decel="100000" fill="hold"/>
+                                        <p:tgtEl>
+                                          <p:spTgt spid="21"/>
+                                        </p:tgtEl>
+                                        <p:attrNameLst>
+                                          <p:attrName>ppt_h</p:attrName>
+                                        </p:attrNameLst>
+                                      </p:cBhvr>
+                                      <p:tavLst>
+                                        <p:tav tm="0">
+                                          <p:val>
+                                            <p:fltVal val="0"/>
+                                          </p:val>
+                                        </p:tav>
+                                        <p:tav tm="100000">
+                                          <p:val>
+                                            <p:strVal val="#ppt_h"/>
+                                          </p:val>
+                                        </p:tav>
+                                      </p:tavLst>
+                                    </p:anim>
+                                    <p:animEffect transition="in" filter="fade">
+                                      <p:cBhvr>
+                                        <p:cTn id="93" dur="500"/>
+                                        <p:tgtEl>
+                                          <p:spTgt spid="21"/>
+                                        </p:tgtEl>
+                                      </p:cBhvr>
+                                    </p:animEffect>
+                                  </p:childTnLst>
+                                </p:cTn>
+                              </p:par>
+                              <p:par>
+                                <p:cTn id="99" presetID="53" presetClass="entr" presetSubtype="16" grpId="0" fill="hold" nodeType="withEffect">
+                                  <p:stCondLst>
+                                    <p:cond delay="2950"/>
+                                  </p:stCondLst>
+                                  <p:childTnLst>
+                                    <p:set>
+                                      <p:cBhvr>
+                                        <p:cTn id="95" dur="1" fill="hold">
+                                          <p:stCondLst>
+                                            <p:cond delay="0"/>
+                                          </p:stCondLst>
+                                        </p:cTn>
+                                        <p:tgtEl>
+                                          <p:spTgt spid="22"/>
+                                        </p:tgtEl>
+                                        <p:attrNameLst>
+                                          <p:attrName>style.visibility</p:attrName>
+                                        </p:attrNameLst>
+                                      </p:cBhvr>
+                                      <p:to>
+                                        <p:strVal val="visible"/>
+                                      </p:to>
+                                    </p:set>
+                                    <p:anim calcmode="lin" valueType="num">
+                                      <p:cBhvr>
+                                        <p:cTn id="96" dur="500" decel="100000" fill="hold"/>
+                                        <p:tgtEl>
+                                          <p:spTgt spid="22"/>
+                                        </p:tgtEl>
+                                        <p:attrNameLst>
+                                          <p:attrName>ppt_w</p:attrName>
+                                        </p:attrNameLst>
+                                      </p:cBhvr>
+                                      <p:tavLst>
+                                        <p:tav tm="0">
+                                          <p:val>
+                                            <p:fltVal val="0"/>
+                                          </p:val>
+                                        </p:tav>
+                                        <p:tav tm="100000">
+                                          <p:val>
+                                            <p:strVal val="#ppt_w"/>
+                                          </p:val>
+                                        </p:tav>
+                                      </p:tavLst>
+                                    </p:anim>
+                                    <p:anim calcmode="lin" valueType="num">
+                                      <p:cBhvr>
+                                        <p:cTn id="97" dur="500" decel="100000" fill="hold"/>
+                                        <p:tgtEl>
+                                          <p:spTgt spid="22"/>
+                                        </p:tgtEl>
+                                        <p:attrNameLst>
+                                          <p:attrName>ppt_h</p:attrName>
+                                        </p:attrNameLst>
+                                      </p:cBhvr>
+                                      <p:tavLst>
+                                        <p:tav tm="0">
+                                          <p:val>
+                                            <p:fltVal val="0"/>
+                                          </p:val>
+                                        </p:tav>
+                                        <p:tav tm="100000">
+                                          <p:val>
+                                            <p:strVal val="#ppt_h"/>
+                                          </p:val>
+                                        </p:tav>
+                                      </p:tavLst>
+                                    </p:anim>
+                                    <p:animEffect transition="in" filter="fade">
+                                      <p:cBhvr>
+                                        <p:cTn id="98" dur="500"/>
+                                        <p:tgtEl>
+                                          <p:spTgt spid="22"/>
+                                        </p:tgtEl>
+                                      </p:cBhvr>
+                                    </p:animEffect>
+                                  </p:childTnLst>
+                                </p:cTn>
+                              </p:par>
+                              <p:par>
+                                <p:cTn id="104" presetID="53" presetClass="entr" presetSubtype="16" grpId="0" fill="hold" nodeType="withEffect">
+                                  <p:stCondLst>
+                                    <p:cond delay="3100"/>
+                                  </p:stCondLst>
+                                  <p:childTnLst>
+                                    <p:set>
+                                      <p:cBhvr>
+                                        <p:cTn id="100" dur="1" fill="hold">
+                                          <p:stCondLst>
+                                            <p:cond delay="0"/>
+                                          </p:stCondLst>
+                                        </p:cTn>
+                                        <p:tgtEl>
+                                          <p:spTgt spid="23"/>
+                                        </p:tgtEl>
+                                        <p:attrNameLst>
+                                          <p:attrName>style.visibility</p:attrName>
+                                        </p:attrNameLst>
+                                      </p:cBhvr>
+                                      <p:to>
+                                        <p:strVal val="visible"/>
+                                      </p:to>
+                                    </p:set>
+                                    <p:anim calcmode="lin" valueType="num">
+                                      <p:cBhvr>
+                                        <p:cTn id="101" dur="500" decel="100000" fill="hold"/>
+                                        <p:tgtEl>
+                                          <p:spTgt spid="23"/>
+                                        </p:tgtEl>
+                                        <p:attrNameLst>
+                                          <p:attrName>ppt_w</p:attrName>
+                                        </p:attrNameLst>
+                                      </p:cBhvr>
+                                      <p:tavLst>
+                                        <p:tav tm="0">
+                                          <p:val>
+                                            <p:fltVal val="0"/>
+                                          </p:val>
+                                        </p:tav>
+                                        <p:tav tm="100000">
+                                          <p:val>
+                                            <p:strVal val="#ppt_w"/>
+                                          </p:val>
+                                        </p:tav>
+                                      </p:tavLst>
+                                    </p:anim>
+                                    <p:anim calcmode="lin" valueType="num">
+                                      <p:cBhvr>
+                                        <p:cTn id="102" dur="500" decel="100000" fill="hold"/>
+                                        <p:tgtEl>
+                                          <p:spTgt spid="23"/>
+                                        </p:tgtEl>
+                                        <p:attrNameLst>
+                                          <p:attrName>ppt_h</p:attrName>
+                                        </p:attrNameLst>
+                                      </p:cBhvr>
+                                      <p:tavLst>
+                                        <p:tav tm="0">
+                                          <p:val>
+                                            <p:fltVal val="0"/>
+                                          </p:val>
+                                        </p:tav>
+                                        <p:tav tm="100000">
+                                          <p:val>
+                                            <p:strVal val="#ppt_h"/>
+                                          </p:val>
+                                        </p:tav>
+                                      </p:tavLst>
+                                    </p:anim>
+                                    <p:animEffect transition="in" filter="fade">
+                                      <p:cBhvr>
+                                        <p:cTn id="103" dur="500"/>
+                                        <p:tgtEl>
+                                          <p:spTgt spid="23"/>
+                                        </p:tgtEl>
+                                      </p:cBhvr>
+                                    </p:animEffect>
+                                  </p:childTnLst>
+                                </p:cTn>
+                              </p:par>
+                              <p:par>
+                                <p:cTn id="107" presetID="10" presetClass="entr" presetSubtype="0" grpId="0" fill="hold" nodeType="withEffect">
+                                  <p:stCondLst>
+                                    <p:cond delay="3100"/>
+                                  </p:stCondLst>
+                                  <p:childTnLst>
+                                    <p:set>
+                                      <p:cBhvr>
+                                        <p:cTn id="105" dur="1" fill="hold">
+                                          <p:stCondLst>
+                                            <p:cond delay="0"/>
+                                          </p:stCondLst>
+                                        </p:cTn>
+                                        <p:tgtEl>
+                                          <p:spTgt spid="24"/>
                                         </p:tgtEl>
                                         <p:attrNameLst>
                                           <p:attrName>style.visibility</p:attrName>
@@ -4987,2890 +6050,9 @@
                                     </p:set>
                                     <p:animEffect transition="in" filter="fade">
                                       <p:cBhvr>
-                                        <p:cTn id="23" dur="750"/>
-                                        <p:tgtEl>
-                                          <p:spTgt spid="7"/>
-                                        </p:tgtEl>
-                                      </p:cBhvr>
-                                    </p:animEffect>
-                                    <p:anim calcmode="lin" valueType="num">
-                                      <p:cBhvr>
-                                        <p:cTn id="24" dur="750" decel="100000" fill="hold"/>
-                                        <p:tgtEl>
-                                          <p:spTgt spid="7"/>
-                                        </p:tgtEl>
-                                        <p:attrNameLst>
-                                          <p:attrName>ppt_x</p:attrName>
-                                        </p:attrNameLst>
-                                      </p:cBhvr>
-                                      <p:tavLst>
-                                        <p:tav tm="0">
-                                          <p:val>
-                                            <p:strVal val="#ppt_x"/>
-                                          </p:val>
-                                        </p:tav>
-                                        <p:tav tm="100000">
-                                          <p:val>
-                                            <p:strVal val="#ppt_x"/>
-                                          </p:val>
-                                        </p:tav>
-                                      </p:tavLst>
-                                    </p:anim>
-                                    <p:anim calcmode="lin" valueType="num">
-                                      <p:cBhvr>
-                                        <p:cTn id="25" dur="750" decel="100000" fill="hold"/>
-                                        <p:tgtEl>
-                                          <p:spTgt spid="7"/>
-                                        </p:tgtEl>
-                                        <p:attrNameLst>
-                                          <p:attrName>ppt_y</p:attrName>
-                                        </p:attrNameLst>
-                                      </p:cBhvr>
-                                      <p:tavLst>
-                                        <p:tav tm="0">
-                                          <p:val>
-                                            <p:strVal val="#ppt_y+.08"/>
-                                          </p:val>
-                                        </p:tav>
-                                        <p:tav tm="100000">
-                                          <p:val>
-                                            <p:strVal val="#ppt_y"/>
-                                          </p:val>
-                                        </p:tav>
-                                      </p:tavLst>
-                                    </p:anim>
-                                  </p:childTnLst>
-                                </p:cTn>
-                              </p:par>
-                              <p:par>
-                                <p:cTn id="31" presetID="42" presetClass="entr" presetSubtype="0" grpId="0" fill="hold" nodeType="withEffect">
-                                  <p:stCondLst>
-                                    <p:cond delay="850"/>
-                                  </p:stCondLst>
-                                  <p:childTnLst>
-                                    <p:set>
-                                      <p:cBhvr>
-                                        <p:cTn id="27" dur="1" fill="hold">
-                                          <p:stCondLst>
-                                            <p:cond delay="0"/>
-                                          </p:stCondLst>
-                                        </p:cTn>
-                                        <p:tgtEl>
-                                          <p:spTgt spid="8"/>
-                                        </p:tgtEl>
-                                        <p:attrNameLst>
-                                          <p:attrName>style.visibility</p:attrName>
-                                        </p:attrNameLst>
-                                      </p:cBhvr>
-                                      <p:to>
-                                        <p:strVal val="visible"/>
-                                      </p:to>
-                                    </p:set>
-                                    <p:animEffect transition="in" filter="fade">
-                                      <p:cBhvr>
-                                        <p:cTn id="28" dur="750"/>
-                                        <p:tgtEl>
-                                          <p:spTgt spid="8"/>
-                                        </p:tgtEl>
-                                      </p:cBhvr>
-                                    </p:animEffect>
-                                    <p:anim calcmode="lin" valueType="num">
-                                      <p:cBhvr>
-                                        <p:cTn id="29" dur="750" decel="100000" fill="hold"/>
-                                        <p:tgtEl>
-                                          <p:spTgt spid="8"/>
-                                        </p:tgtEl>
-                                        <p:attrNameLst>
-                                          <p:attrName>ppt_x</p:attrName>
-                                        </p:attrNameLst>
-                                      </p:cBhvr>
-                                      <p:tavLst>
-                                        <p:tav tm="0">
-                                          <p:val>
-                                            <p:strVal val="#ppt_x"/>
-                                          </p:val>
-                                        </p:tav>
-                                        <p:tav tm="100000">
-                                          <p:val>
-                                            <p:strVal val="#ppt_x"/>
-                                          </p:val>
-                                        </p:tav>
-                                      </p:tavLst>
-                                    </p:anim>
-                                    <p:anim calcmode="lin" valueType="num">
-                                      <p:cBhvr>
-                                        <p:cTn id="30" dur="750" decel="100000" fill="hold"/>
-                                        <p:tgtEl>
-                                          <p:spTgt spid="8"/>
-                                        </p:tgtEl>
-                                        <p:attrNameLst>
-                                          <p:attrName>ppt_y</p:attrName>
-                                        </p:attrNameLst>
-                                      </p:cBhvr>
-                                      <p:tavLst>
-                                        <p:tav tm="0">
-                                          <p:val>
-                                            <p:strVal val="#ppt_y+.08"/>
-                                          </p:val>
-                                        </p:tav>
-                                        <p:tav tm="100000">
-                                          <p:val>
-                                            <p:strVal val="#ppt_y"/>
-                                          </p:val>
-                                        </p:tav>
-                                      </p:tavLst>
-                                    </p:anim>
-                                  </p:childTnLst>
-                                </p:cTn>
-                              </p:par>
-                              <p:par>
-                                <p:cTn id="36" presetID="42" presetClass="entr" presetSubtype="0" grpId="0" fill="hold" nodeType="withEffect">
-                                  <p:stCondLst>
-                                    <p:cond delay="1050"/>
-                                  </p:stCondLst>
-                                  <p:childTnLst>
-                                    <p:set>
-                                      <p:cBhvr>
-                                        <p:cTn id="32" dur="1" fill="hold">
-                                          <p:stCondLst>
-                                            <p:cond delay="0"/>
-                                          </p:stCondLst>
-                                        </p:cTn>
-                                        <p:tgtEl>
-                                          <p:spTgt spid="9"/>
-                                        </p:tgtEl>
-                                        <p:attrNameLst>
-                                          <p:attrName>style.visibility</p:attrName>
-                                        </p:attrNameLst>
-                                      </p:cBhvr>
-                                      <p:to>
-                                        <p:strVal val="visible"/>
-                                      </p:to>
-                                    </p:set>
-                                    <p:animEffect transition="in" filter="fade">
-                                      <p:cBhvr>
-                                        <p:cTn id="33" dur="750"/>
-                                        <p:tgtEl>
-                                          <p:spTgt spid="9"/>
-                                        </p:tgtEl>
-                                      </p:cBhvr>
-                                    </p:animEffect>
-                                    <p:anim calcmode="lin" valueType="num">
-                                      <p:cBhvr>
-                                        <p:cTn id="34" dur="750" decel="100000" fill="hold"/>
-                                        <p:tgtEl>
-                                          <p:spTgt spid="9"/>
-                                        </p:tgtEl>
-                                        <p:attrNameLst>
-                                          <p:attrName>ppt_x</p:attrName>
-                                        </p:attrNameLst>
-                                      </p:cBhvr>
-                                      <p:tavLst>
-                                        <p:tav tm="0">
-                                          <p:val>
-                                            <p:strVal val="#ppt_x"/>
-                                          </p:val>
-                                        </p:tav>
-                                        <p:tav tm="100000">
-                                          <p:val>
-                                            <p:strVal val="#ppt_x"/>
-                                          </p:val>
-                                        </p:tav>
-                                      </p:tavLst>
-                                    </p:anim>
-                                    <p:anim calcmode="lin" valueType="num">
-                                      <p:cBhvr>
-                                        <p:cTn id="35" dur="750" decel="100000" fill="hold"/>
-                                        <p:tgtEl>
-                                          <p:spTgt spid="9"/>
-                                        </p:tgtEl>
-                                        <p:attrNameLst>
-                                          <p:attrName>ppt_y</p:attrName>
-                                        </p:attrNameLst>
-                                      </p:cBhvr>
-                                      <p:tavLst>
-                                        <p:tav tm="0">
-                                          <p:val>
-                                            <p:strVal val="#ppt_y+.08"/>
-                                          </p:val>
-                                        </p:tav>
-                                        <p:tav tm="100000">
-                                          <p:val>
-                                            <p:strVal val="#ppt_y"/>
-                                          </p:val>
-                                        </p:tav>
-                                      </p:tavLst>
-                                    </p:anim>
-                                  </p:childTnLst>
-                                </p:cTn>
-                              </p:par>
-                              <p:par>
-                                <p:cTn id="41" presetID="42" presetClass="entr" presetSubtype="0" grpId="0" fill="hold" nodeType="withEffect">
-                                  <p:stCondLst>
-                                    <p:cond delay="1050"/>
-                                  </p:stCondLst>
-                                  <p:childTnLst>
-                                    <p:set>
-                                      <p:cBhvr>
-                                        <p:cTn id="37" dur="1" fill="hold">
-                                          <p:stCondLst>
-                                            <p:cond delay="0"/>
-                                          </p:stCondLst>
-                                        </p:cTn>
-                                        <p:tgtEl>
-                                          <p:spTgt spid="10"/>
-                                        </p:tgtEl>
-                                        <p:attrNameLst>
-                                          <p:attrName>style.visibility</p:attrName>
-                                        </p:attrNameLst>
-                                      </p:cBhvr>
-                                      <p:to>
-                                        <p:strVal val="visible"/>
-                                      </p:to>
-                                    </p:set>
-                                    <p:animEffect transition="in" filter="fade">
-                                      <p:cBhvr>
-                                        <p:cTn id="38" dur="750"/>
-                                        <p:tgtEl>
-                                          <p:spTgt spid="10"/>
-                                        </p:tgtEl>
-                                      </p:cBhvr>
-                                    </p:animEffect>
-                                    <p:anim calcmode="lin" valueType="num">
-                                      <p:cBhvr>
-                                        <p:cTn id="39" dur="750" decel="100000" fill="hold"/>
-                                        <p:tgtEl>
-                                          <p:spTgt spid="10"/>
-                                        </p:tgtEl>
-                                        <p:attrNameLst>
-                                          <p:attrName>ppt_x</p:attrName>
-                                        </p:attrNameLst>
-                                      </p:cBhvr>
-                                      <p:tavLst>
-                                        <p:tav tm="0">
-                                          <p:val>
-                                            <p:strVal val="#ppt_x"/>
-                                          </p:val>
-                                        </p:tav>
-                                        <p:tav tm="100000">
-                                          <p:val>
-                                            <p:strVal val="#ppt_x"/>
-                                          </p:val>
-                                        </p:tav>
-                                      </p:tavLst>
-                                    </p:anim>
-                                    <p:anim calcmode="lin" valueType="num">
-                                      <p:cBhvr>
-                                        <p:cTn id="40" dur="750" decel="100000" fill="hold"/>
-                                        <p:tgtEl>
-                                          <p:spTgt spid="10"/>
-                                        </p:tgtEl>
-                                        <p:attrNameLst>
-                                          <p:attrName>ppt_y</p:attrName>
-                                        </p:attrNameLst>
-                                      </p:cBhvr>
-                                      <p:tavLst>
-                                        <p:tav tm="0">
-                                          <p:val>
-                                            <p:strVal val="#ppt_y+.08"/>
-                                          </p:val>
-                                        </p:tav>
-                                        <p:tav tm="100000">
-                                          <p:val>
-                                            <p:strVal val="#ppt_y"/>
-                                          </p:val>
-                                        </p:tav>
-                                      </p:tavLst>
-                                    </p:anim>
-                                  </p:childTnLst>
-                                </p:cTn>
-                              </p:par>
-                              <p:par>
-                                <p:cTn id="46" presetID="42" presetClass="entr" presetSubtype="0" grpId="0" fill="hold" nodeType="withEffect">
-                                  <p:stCondLst>
-                                    <p:cond delay="1050"/>
-                                  </p:stCondLst>
-                                  <p:childTnLst>
-                                    <p:set>
-                                      <p:cBhvr>
-                                        <p:cTn id="42" dur="1" fill="hold">
-                                          <p:stCondLst>
-                                            <p:cond delay="0"/>
-                                          </p:stCondLst>
-                                        </p:cTn>
-                                        <p:tgtEl>
-                                          <p:spTgt spid="11"/>
-                                        </p:tgtEl>
-                                        <p:attrNameLst>
-                                          <p:attrName>style.visibility</p:attrName>
-                                        </p:attrNameLst>
-                                      </p:cBhvr>
-                                      <p:to>
-                                        <p:strVal val="visible"/>
-                                      </p:to>
-                                    </p:set>
-                                    <p:animEffect transition="in" filter="fade">
-                                      <p:cBhvr>
-                                        <p:cTn id="43" dur="750"/>
-                                        <p:tgtEl>
-                                          <p:spTgt spid="11"/>
-                                        </p:tgtEl>
-                                      </p:cBhvr>
-                                    </p:animEffect>
-                                    <p:anim calcmode="lin" valueType="num">
-                                      <p:cBhvr>
-                                        <p:cTn id="44" dur="750" decel="100000" fill="hold"/>
-                                        <p:tgtEl>
-                                          <p:spTgt spid="11"/>
-                                        </p:tgtEl>
-                                        <p:attrNameLst>
-                                          <p:attrName>ppt_x</p:attrName>
-                                        </p:attrNameLst>
-                                      </p:cBhvr>
-                                      <p:tavLst>
-                                        <p:tav tm="0">
-                                          <p:val>
-                                            <p:strVal val="#ppt_x"/>
-                                          </p:val>
-                                        </p:tav>
-                                        <p:tav tm="100000">
-                                          <p:val>
-                                            <p:strVal val="#ppt_x"/>
-                                          </p:val>
-                                        </p:tav>
-                                      </p:tavLst>
-                                    </p:anim>
-                                    <p:anim calcmode="lin" valueType="num">
-                                      <p:cBhvr>
-                                        <p:cTn id="45" dur="750" decel="100000" fill="hold"/>
-                                        <p:tgtEl>
-                                          <p:spTgt spid="11"/>
-                                        </p:tgtEl>
-                                        <p:attrNameLst>
-                                          <p:attrName>ppt_y</p:attrName>
-                                        </p:attrNameLst>
-                                      </p:cBhvr>
-                                      <p:tavLst>
-                                        <p:tav tm="0">
-                                          <p:val>
-                                            <p:strVal val="#ppt_y+.08"/>
-                                          </p:val>
-                                        </p:tav>
-                                        <p:tav tm="100000">
-                                          <p:val>
-                                            <p:strVal val="#ppt_y"/>
-                                          </p:val>
-                                        </p:tav>
-                                      </p:tavLst>
-                                    </p:anim>
-                                  </p:childTnLst>
-                                </p:cTn>
-                              </p:par>
-                              <p:par>
-                                <p:cTn id="51" presetID="42" presetClass="entr" presetSubtype="0" grpId="0" fill="hold" nodeType="withEffect">
-                                  <p:stCondLst>
-                                    <p:cond delay="1250"/>
-                                  </p:stCondLst>
-                                  <p:childTnLst>
-                                    <p:set>
-                                      <p:cBhvr>
-                                        <p:cTn id="47" dur="1" fill="hold">
-                                          <p:stCondLst>
-                                            <p:cond delay="0"/>
-                                          </p:stCondLst>
-                                        </p:cTn>
-                                        <p:tgtEl>
-                                          <p:spTgt spid="12"/>
-                                        </p:tgtEl>
-                                        <p:attrNameLst>
-                                          <p:attrName>style.visibility</p:attrName>
-                                        </p:attrNameLst>
-                                      </p:cBhvr>
-                                      <p:to>
-                                        <p:strVal val="visible"/>
-                                      </p:to>
-                                    </p:set>
-                                    <p:animEffect transition="in" filter="fade">
-                                      <p:cBhvr>
-                                        <p:cTn id="48" dur="750"/>
-                                        <p:tgtEl>
-                                          <p:spTgt spid="12"/>
-                                        </p:tgtEl>
-                                      </p:cBhvr>
-                                    </p:animEffect>
-                                    <p:anim calcmode="lin" valueType="num">
-                                      <p:cBhvr>
-                                        <p:cTn id="49" dur="750" decel="100000" fill="hold"/>
-                                        <p:tgtEl>
-                                          <p:spTgt spid="12"/>
-                                        </p:tgtEl>
-                                        <p:attrNameLst>
-                                          <p:attrName>ppt_x</p:attrName>
-                                        </p:attrNameLst>
-                                      </p:cBhvr>
-                                      <p:tavLst>
-                                        <p:tav tm="0">
-                                          <p:val>
-                                            <p:strVal val="#ppt_x"/>
-                                          </p:val>
-                                        </p:tav>
-                                        <p:tav tm="100000">
-                                          <p:val>
-                                            <p:strVal val="#ppt_x"/>
-                                          </p:val>
-                                        </p:tav>
-                                      </p:tavLst>
-                                    </p:anim>
-                                    <p:anim calcmode="lin" valueType="num">
-                                      <p:cBhvr>
-                                        <p:cTn id="50" dur="750" decel="100000" fill="hold"/>
-                                        <p:tgtEl>
-                                          <p:spTgt spid="12"/>
-                                        </p:tgtEl>
-                                        <p:attrNameLst>
-                                          <p:attrName>ppt_y</p:attrName>
-                                        </p:attrNameLst>
-                                      </p:cBhvr>
-                                      <p:tavLst>
-                                        <p:tav tm="0">
-                                          <p:val>
-                                            <p:strVal val="#ppt_y+.08"/>
-                                          </p:val>
-                                        </p:tav>
-                                        <p:tav tm="100000">
-                                          <p:val>
-                                            <p:strVal val="#ppt_y"/>
-                                          </p:val>
-                                        </p:tav>
-                                      </p:tavLst>
-                                    </p:anim>
-                                  </p:childTnLst>
-                                </p:cTn>
-                              </p:par>
-                              <p:par>
-                                <p:cTn id="56" presetID="42" presetClass="entr" presetSubtype="0" grpId="0" fill="hold" nodeType="withEffect">
-                                  <p:stCondLst>
-                                    <p:cond delay="1250"/>
-                                  </p:stCondLst>
-                                  <p:childTnLst>
-                                    <p:set>
-                                      <p:cBhvr>
-                                        <p:cTn id="52" dur="1" fill="hold">
-                                          <p:stCondLst>
-                                            <p:cond delay="0"/>
-                                          </p:stCondLst>
-                                        </p:cTn>
-                                        <p:tgtEl>
-                                          <p:spTgt spid="13"/>
-                                        </p:tgtEl>
-                                        <p:attrNameLst>
-                                          <p:attrName>style.visibility</p:attrName>
-                                        </p:attrNameLst>
-                                      </p:cBhvr>
-                                      <p:to>
-                                        <p:strVal val="visible"/>
-                                      </p:to>
-                                    </p:set>
-                                    <p:animEffect transition="in" filter="fade">
-                                      <p:cBhvr>
-                                        <p:cTn id="53" dur="750"/>
-                                        <p:tgtEl>
-                                          <p:spTgt spid="13"/>
-                                        </p:tgtEl>
-                                      </p:cBhvr>
-                                    </p:animEffect>
-                                    <p:anim calcmode="lin" valueType="num">
-                                      <p:cBhvr>
-                                        <p:cTn id="54" dur="750" decel="100000" fill="hold"/>
-                                        <p:tgtEl>
-                                          <p:spTgt spid="13"/>
-                                        </p:tgtEl>
-                                        <p:attrNameLst>
-                                          <p:attrName>ppt_x</p:attrName>
-                                        </p:attrNameLst>
-                                      </p:cBhvr>
-                                      <p:tavLst>
-                                        <p:tav tm="0">
-                                          <p:val>
-                                            <p:strVal val="#ppt_x"/>
-                                          </p:val>
-                                        </p:tav>
-                                        <p:tav tm="100000">
-                                          <p:val>
-                                            <p:strVal val="#ppt_x"/>
-                                          </p:val>
-                                        </p:tav>
-                                      </p:tavLst>
-                                    </p:anim>
-                                    <p:anim calcmode="lin" valueType="num">
-                                      <p:cBhvr>
-                                        <p:cTn id="55" dur="750" decel="100000" fill="hold"/>
-                                        <p:tgtEl>
-                                          <p:spTgt spid="13"/>
-                                        </p:tgtEl>
-                                        <p:attrNameLst>
-                                          <p:attrName>ppt_y</p:attrName>
-                                        </p:attrNameLst>
-                                      </p:cBhvr>
-                                      <p:tavLst>
-                                        <p:tav tm="0">
-                                          <p:val>
-                                            <p:strVal val="#ppt_y+.08"/>
-                                          </p:val>
-                                        </p:tav>
-                                        <p:tav tm="100000">
-                                          <p:val>
-                                            <p:strVal val="#ppt_y"/>
-                                          </p:val>
-                                        </p:tav>
-                                      </p:tavLst>
-                                    </p:anim>
-                                  </p:childTnLst>
-                                </p:cTn>
-                              </p:par>
-                              <p:par>
-                                <p:cTn id="61" presetID="42" presetClass="entr" presetSubtype="0" grpId="0" fill="hold" nodeType="withEffect">
-                                  <p:stCondLst>
-                                    <p:cond delay="1250"/>
-                                  </p:stCondLst>
-                                  <p:childTnLst>
-                                    <p:set>
-                                      <p:cBhvr>
-                                        <p:cTn id="57" dur="1" fill="hold">
-                                          <p:stCondLst>
-                                            <p:cond delay="0"/>
-                                          </p:stCondLst>
-                                        </p:cTn>
-                                        <p:tgtEl>
-                                          <p:spTgt spid="14"/>
-                                        </p:tgtEl>
-                                        <p:attrNameLst>
-                                          <p:attrName>style.visibility</p:attrName>
-                                        </p:attrNameLst>
-                                      </p:cBhvr>
-                                      <p:to>
-                                        <p:strVal val="visible"/>
-                                      </p:to>
-                                    </p:set>
-                                    <p:animEffect transition="in" filter="fade">
-                                      <p:cBhvr>
-                                        <p:cTn id="58" dur="750"/>
-                                        <p:tgtEl>
-                                          <p:spTgt spid="14"/>
-                                        </p:tgtEl>
-                                      </p:cBhvr>
-                                    </p:animEffect>
-                                    <p:anim calcmode="lin" valueType="num">
-                                      <p:cBhvr>
-                                        <p:cTn id="59" dur="750" decel="100000" fill="hold"/>
-                                        <p:tgtEl>
-                                          <p:spTgt spid="14"/>
-                                        </p:tgtEl>
-                                        <p:attrNameLst>
-                                          <p:attrName>ppt_x</p:attrName>
-                                        </p:attrNameLst>
-                                      </p:cBhvr>
-                                      <p:tavLst>
-                                        <p:tav tm="0">
-                                          <p:val>
-                                            <p:strVal val="#ppt_x"/>
-                                          </p:val>
-                                        </p:tav>
-                                        <p:tav tm="100000">
-                                          <p:val>
-                                            <p:strVal val="#ppt_x"/>
-                                          </p:val>
-                                        </p:tav>
-                                      </p:tavLst>
-                                    </p:anim>
-                                    <p:anim calcmode="lin" valueType="num">
-                                      <p:cBhvr>
-                                        <p:cTn id="60" dur="750" decel="100000" fill="hold"/>
-                                        <p:tgtEl>
-                                          <p:spTgt spid="14"/>
-                                        </p:tgtEl>
-                                        <p:attrNameLst>
-                                          <p:attrName>ppt_y</p:attrName>
-                                        </p:attrNameLst>
-                                      </p:cBhvr>
-                                      <p:tavLst>
-                                        <p:tav tm="0">
-                                          <p:val>
-                                            <p:strVal val="#ppt_y+.08"/>
-                                          </p:val>
-                                        </p:tav>
-                                        <p:tav tm="100000">
-                                          <p:val>
-                                            <p:strVal val="#ppt_y"/>
-                                          </p:val>
-                                        </p:tav>
-                                      </p:tavLst>
-                                    </p:anim>
-                                  </p:childTnLst>
-                                </p:cTn>
-                              </p:par>
-                              <p:par>
-                                <p:cTn id="66" presetID="42" presetClass="entr" presetSubtype="0" grpId="0" fill="hold" nodeType="withEffect">
-                                  <p:stCondLst>
-                                    <p:cond delay="1700"/>
-                                  </p:stCondLst>
-                                  <p:childTnLst>
-                                    <p:set>
-                                      <p:cBhvr>
-                                        <p:cTn id="62" dur="1" fill="hold">
-                                          <p:stCondLst>
-                                            <p:cond delay="0"/>
-                                          </p:stCondLst>
-                                        </p:cTn>
-                                        <p:tgtEl>
-                                          <p:spTgt spid="15"/>
-                                        </p:tgtEl>
-                                        <p:attrNameLst>
-                                          <p:attrName>style.visibility</p:attrName>
-                                        </p:attrNameLst>
-                                      </p:cBhvr>
-                                      <p:to>
-                                        <p:strVal val="visible"/>
-                                      </p:to>
-                                    </p:set>
-                                    <p:animEffect transition="in" filter="fade">
-                                      <p:cBhvr>
-                                        <p:cTn id="63" dur="750"/>
-                                        <p:tgtEl>
-                                          <p:spTgt spid="15"/>
-                                        </p:tgtEl>
-                                      </p:cBhvr>
-                                    </p:animEffect>
-                                    <p:anim calcmode="lin" valueType="num">
-                                      <p:cBhvr>
-                                        <p:cTn id="64" dur="750" decel="100000" fill="hold"/>
-                                        <p:tgtEl>
-                                          <p:spTgt spid="15"/>
-                                        </p:tgtEl>
-                                        <p:attrNameLst>
-                                          <p:attrName>ppt_x</p:attrName>
-                                        </p:attrNameLst>
-                                      </p:cBhvr>
-                                      <p:tavLst>
-                                        <p:tav tm="0">
-                                          <p:val>
-                                            <p:strVal val="#ppt_x"/>
-                                          </p:val>
-                                        </p:tav>
-                                        <p:tav tm="100000">
-                                          <p:val>
-                                            <p:strVal val="#ppt_x"/>
-                                          </p:val>
-                                        </p:tav>
-                                      </p:tavLst>
-                                    </p:anim>
-                                    <p:anim calcmode="lin" valueType="num">
-                                      <p:cBhvr>
-                                        <p:cTn id="65" dur="750" decel="100000" fill="hold"/>
-                                        <p:tgtEl>
-                                          <p:spTgt spid="15"/>
-                                        </p:tgtEl>
-                                        <p:attrNameLst>
-                                          <p:attrName>ppt_y</p:attrName>
-                                        </p:attrNameLst>
-                                      </p:cBhvr>
-                                      <p:tavLst>
-                                        <p:tav tm="0">
-                                          <p:val>
-                                            <p:strVal val="#ppt_y+.08"/>
-                                          </p:val>
-                                        </p:tav>
-                                        <p:tav tm="100000">
-                                          <p:val>
-                                            <p:strVal val="#ppt_y"/>
-                                          </p:val>
-                                        </p:tav>
-                                      </p:tavLst>
-                                    </p:anim>
-                                  </p:childTnLst>
-                                </p:cTn>
-                              </p:par>
-                              <p:par>
-                                <p:cTn id="71" presetID="42" presetClass="entr" presetSubtype="0" grpId="0" fill="hold" nodeType="withEffect">
-                                  <p:stCondLst>
-                                    <p:cond delay="1700"/>
-                                  </p:stCondLst>
-                                  <p:childTnLst>
-                                    <p:set>
-                                      <p:cBhvr>
-                                        <p:cTn id="67" dur="1" fill="hold">
-                                          <p:stCondLst>
-                                            <p:cond delay="0"/>
-                                          </p:stCondLst>
-                                        </p:cTn>
-                                        <p:tgtEl>
-                                          <p:spTgt spid="16"/>
-                                        </p:tgtEl>
-                                        <p:attrNameLst>
-                                          <p:attrName>style.visibility</p:attrName>
-                                        </p:attrNameLst>
-                                      </p:cBhvr>
-                                      <p:to>
-                                        <p:strVal val="visible"/>
-                                      </p:to>
-                                    </p:set>
-                                    <p:animEffect transition="in" filter="fade">
-                                      <p:cBhvr>
-                                        <p:cTn id="68" dur="750"/>
-                                        <p:tgtEl>
-                                          <p:spTgt spid="16"/>
-                                        </p:tgtEl>
-                                      </p:cBhvr>
-                                    </p:animEffect>
-                                    <p:anim calcmode="lin" valueType="num">
-                                      <p:cBhvr>
-                                        <p:cTn id="69" dur="750" decel="100000" fill="hold"/>
-                                        <p:tgtEl>
-                                          <p:spTgt spid="16"/>
-                                        </p:tgtEl>
-                                        <p:attrNameLst>
-                                          <p:attrName>ppt_x</p:attrName>
-                                        </p:attrNameLst>
-                                      </p:cBhvr>
-                                      <p:tavLst>
-                                        <p:tav tm="0">
-                                          <p:val>
-                                            <p:strVal val="#ppt_x"/>
-                                          </p:val>
-                                        </p:tav>
-                                        <p:tav tm="100000">
-                                          <p:val>
-                                            <p:strVal val="#ppt_x"/>
-                                          </p:val>
-                                        </p:tav>
-                                      </p:tavLst>
-                                    </p:anim>
-                                    <p:anim calcmode="lin" valueType="num">
-                                      <p:cBhvr>
-                                        <p:cTn id="70" dur="750" decel="100000" fill="hold"/>
-                                        <p:tgtEl>
-                                          <p:spTgt spid="16"/>
-                                        </p:tgtEl>
-                                        <p:attrNameLst>
-                                          <p:attrName>ppt_y</p:attrName>
-                                        </p:attrNameLst>
-                                      </p:cBhvr>
-                                      <p:tavLst>
-                                        <p:tav tm="0">
-                                          <p:val>
-                                            <p:strVal val="#ppt_y+.08"/>
-                                          </p:val>
-                                        </p:tav>
-                                        <p:tav tm="100000">
-                                          <p:val>
-                                            <p:strVal val="#ppt_y"/>
-                                          </p:val>
-                                        </p:tav>
-                                      </p:tavLst>
-                                    </p:anim>
-                                  </p:childTnLst>
-                                </p:cTn>
-                              </p:par>
-                              <p:par>
-                                <p:cTn id="76" presetID="42" presetClass="entr" presetSubtype="0" grpId="0" fill="hold" nodeType="withEffect">
-                                  <p:stCondLst>
-                                    <p:cond delay="1700"/>
-                                  </p:stCondLst>
-                                  <p:childTnLst>
-                                    <p:set>
-                                      <p:cBhvr>
-                                        <p:cTn id="72" dur="1" fill="hold">
-                                          <p:stCondLst>
-                                            <p:cond delay="0"/>
-                                          </p:stCondLst>
-                                        </p:cTn>
-                                        <p:tgtEl>
-                                          <p:spTgt spid="19"/>
-                                        </p:tgtEl>
-                                        <p:attrNameLst>
-                                          <p:attrName>style.visibility</p:attrName>
-                                        </p:attrNameLst>
-                                      </p:cBhvr>
-                                      <p:to>
-                                        <p:strVal val="visible"/>
-                                      </p:to>
-                                    </p:set>
-                                    <p:animEffect transition="in" filter="fade">
-                                      <p:cBhvr>
-                                        <p:cTn id="73" dur="750"/>
-                                        <p:tgtEl>
-                                          <p:spTgt spid="19"/>
-                                        </p:tgtEl>
-                                      </p:cBhvr>
-                                    </p:animEffect>
-                                    <p:anim calcmode="lin" valueType="num">
-                                      <p:cBhvr>
-                                        <p:cTn id="74" dur="750" decel="100000" fill="hold"/>
-                                        <p:tgtEl>
-                                          <p:spTgt spid="19"/>
-                                        </p:tgtEl>
-                                        <p:attrNameLst>
-                                          <p:attrName>ppt_x</p:attrName>
-                                        </p:attrNameLst>
-                                      </p:cBhvr>
-                                      <p:tavLst>
-                                        <p:tav tm="0">
-                                          <p:val>
-                                            <p:strVal val="#ppt_x"/>
-                                          </p:val>
-                                        </p:tav>
-                                        <p:tav tm="100000">
-                                          <p:val>
-                                            <p:strVal val="#ppt_x"/>
-                                          </p:val>
-                                        </p:tav>
-                                      </p:tavLst>
-                                    </p:anim>
-                                    <p:anim calcmode="lin" valueType="num">
-                                      <p:cBhvr>
-                                        <p:cTn id="75" dur="750" decel="100000" fill="hold"/>
-                                        <p:tgtEl>
-                                          <p:spTgt spid="19"/>
-                                        </p:tgtEl>
-                                        <p:attrNameLst>
-                                          <p:attrName>ppt_y</p:attrName>
-                                        </p:attrNameLst>
-                                      </p:cBhvr>
-                                      <p:tavLst>
-                                        <p:tav tm="0">
-                                          <p:val>
-                                            <p:strVal val="#ppt_y+.08"/>
-                                          </p:val>
-                                        </p:tav>
-                                        <p:tav tm="100000">
-                                          <p:val>
-                                            <p:strVal val="#ppt_y"/>
-                                          </p:val>
-                                        </p:tav>
-                                      </p:tavLst>
-                                    </p:anim>
-                                  </p:childTnLst>
-                                </p:cTn>
-                              </p:par>
-                              <p:par>
-                                <p:cTn id="81" presetID="42" presetClass="entr" presetSubtype="0" grpId="0" fill="hold" nodeType="withEffect">
-                                  <p:stCondLst>
-                                    <p:cond delay="1700"/>
-                                  </p:stCondLst>
-                                  <p:childTnLst>
-                                    <p:set>
-                                      <p:cBhvr>
-                                        <p:cTn id="77" dur="1" fill="hold">
-                                          <p:stCondLst>
-                                            <p:cond delay="0"/>
-                                          </p:stCondLst>
-                                        </p:cTn>
-                                        <p:tgtEl>
-                                          <p:spTgt spid="20"/>
-                                        </p:tgtEl>
-                                        <p:attrNameLst>
-                                          <p:attrName>style.visibility</p:attrName>
-                                        </p:attrNameLst>
-                                      </p:cBhvr>
-                                      <p:to>
-                                        <p:strVal val="visible"/>
-                                      </p:to>
-                                    </p:set>
-                                    <p:animEffect transition="in" filter="fade">
-                                      <p:cBhvr>
-                                        <p:cTn id="78" dur="750"/>
-                                        <p:tgtEl>
-                                          <p:spTgt spid="20"/>
-                                        </p:tgtEl>
-                                      </p:cBhvr>
-                                    </p:animEffect>
-                                    <p:anim calcmode="lin" valueType="num">
-                                      <p:cBhvr>
-                                        <p:cTn id="79" dur="750" decel="100000" fill="hold"/>
-                                        <p:tgtEl>
-                                          <p:spTgt spid="20"/>
-                                        </p:tgtEl>
-                                        <p:attrNameLst>
-                                          <p:attrName>ppt_x</p:attrName>
-                                        </p:attrNameLst>
-                                      </p:cBhvr>
-                                      <p:tavLst>
-                                        <p:tav tm="0">
-                                          <p:val>
-                                            <p:strVal val="#ppt_x"/>
-                                          </p:val>
-                                        </p:tav>
-                                        <p:tav tm="100000">
-                                          <p:val>
-                                            <p:strVal val="#ppt_x"/>
-                                          </p:val>
-                                        </p:tav>
-                                      </p:tavLst>
-                                    </p:anim>
-                                    <p:anim calcmode="lin" valueType="num">
-                                      <p:cBhvr>
-                                        <p:cTn id="80" dur="750" decel="100000" fill="hold"/>
-                                        <p:tgtEl>
-                                          <p:spTgt spid="20"/>
-                                        </p:tgtEl>
-                                        <p:attrNameLst>
-                                          <p:attrName>ppt_y</p:attrName>
-                                        </p:attrNameLst>
-                                      </p:cBhvr>
-                                      <p:tavLst>
-                                        <p:tav tm="0">
-                                          <p:val>
-                                            <p:strVal val="#ppt_y+.08"/>
-                                          </p:val>
-                                        </p:tav>
-                                        <p:tav tm="100000">
-                                          <p:val>
-                                            <p:strVal val="#ppt_y"/>
-                                          </p:val>
-                                        </p:tav>
-                                      </p:tavLst>
-                                    </p:anim>
-                                  </p:childTnLst>
-                                </p:cTn>
-                              </p:par>
-                              <p:par>
-                                <p:cTn id="86" presetID="42" presetClass="entr" presetSubtype="0" grpId="0" fill="hold" nodeType="withEffect">
-                                  <p:stCondLst>
-                                    <p:cond delay="1700"/>
-                                  </p:stCondLst>
-                                  <p:childTnLst>
-                                    <p:set>
-                                      <p:cBhvr>
-                                        <p:cTn id="82" dur="1" fill="hold">
-                                          <p:stCondLst>
-                                            <p:cond delay="0"/>
-                                          </p:stCondLst>
-                                        </p:cTn>
-                                        <p:tgtEl>
-                                          <p:spTgt spid="21"/>
-                                        </p:tgtEl>
-                                        <p:attrNameLst>
-                                          <p:attrName>style.visibility</p:attrName>
-                                        </p:attrNameLst>
-                                      </p:cBhvr>
-                                      <p:to>
-                                        <p:strVal val="visible"/>
-                                      </p:to>
-                                    </p:set>
-                                    <p:animEffect transition="in" filter="fade">
-                                      <p:cBhvr>
-                                        <p:cTn id="83" dur="750"/>
-                                        <p:tgtEl>
-                                          <p:spTgt spid="21"/>
-                                        </p:tgtEl>
-                                      </p:cBhvr>
-                                    </p:animEffect>
-                                    <p:anim calcmode="lin" valueType="num">
-                                      <p:cBhvr>
-                                        <p:cTn id="84" dur="750" decel="100000" fill="hold"/>
-                                        <p:tgtEl>
-                                          <p:spTgt spid="21"/>
-                                        </p:tgtEl>
-                                        <p:attrNameLst>
-                                          <p:attrName>ppt_x</p:attrName>
-                                        </p:attrNameLst>
-                                      </p:cBhvr>
-                                      <p:tavLst>
-                                        <p:tav tm="0">
-                                          <p:val>
-                                            <p:strVal val="#ppt_x"/>
-                                          </p:val>
-                                        </p:tav>
-                                        <p:tav tm="100000">
-                                          <p:val>
-                                            <p:strVal val="#ppt_x"/>
-                                          </p:val>
-                                        </p:tav>
-                                      </p:tavLst>
-                                    </p:anim>
-                                    <p:anim calcmode="lin" valueType="num">
-                                      <p:cBhvr>
-                                        <p:cTn id="85" dur="750" decel="100000" fill="hold"/>
-                                        <p:tgtEl>
-                                          <p:spTgt spid="21"/>
-                                        </p:tgtEl>
-                                        <p:attrNameLst>
-                                          <p:attrName>ppt_y</p:attrName>
-                                        </p:attrNameLst>
-                                      </p:cBhvr>
-                                      <p:tavLst>
-                                        <p:tav tm="0">
-                                          <p:val>
-                                            <p:strVal val="#ppt_y+.08"/>
-                                          </p:val>
-                                        </p:tav>
-                                        <p:tav tm="100000">
-                                          <p:val>
-                                            <p:strVal val="#ppt_y"/>
-                                          </p:val>
-                                        </p:tav>
-                                      </p:tavLst>
-                                    </p:anim>
-                                  </p:childTnLst>
-                                </p:cTn>
-                              </p:par>
-                              <p:par>
-                                <p:cTn id="91" presetID="42" presetClass="entr" presetSubtype="0" grpId="0" fill="hold" nodeType="withEffect">
-                                  <p:stCondLst>
-                                    <p:cond delay="1700"/>
-                                  </p:stCondLst>
-                                  <p:childTnLst>
-                                    <p:set>
-                                      <p:cBhvr>
-                                        <p:cTn id="87" dur="1" fill="hold">
-                                          <p:stCondLst>
-                                            <p:cond delay="0"/>
-                                          </p:stCondLst>
-                                        </p:cTn>
-                                        <p:tgtEl>
-                                          <p:spTgt spid="22"/>
-                                        </p:tgtEl>
-                                        <p:attrNameLst>
-                                          <p:attrName>style.visibility</p:attrName>
-                                        </p:attrNameLst>
-                                      </p:cBhvr>
-                                      <p:to>
-                                        <p:strVal val="visible"/>
-                                      </p:to>
-                                    </p:set>
-                                    <p:animEffect transition="in" filter="fade">
-                                      <p:cBhvr>
-                                        <p:cTn id="88" dur="750"/>
-                                        <p:tgtEl>
-                                          <p:spTgt spid="22"/>
-                                        </p:tgtEl>
-                                      </p:cBhvr>
-                                    </p:animEffect>
-                                    <p:anim calcmode="lin" valueType="num">
-                                      <p:cBhvr>
-                                        <p:cTn id="89" dur="750" decel="100000" fill="hold"/>
-                                        <p:tgtEl>
-                                          <p:spTgt spid="22"/>
-                                        </p:tgtEl>
-                                        <p:attrNameLst>
-                                          <p:attrName>ppt_x</p:attrName>
-                                        </p:attrNameLst>
-                                      </p:cBhvr>
-                                      <p:tavLst>
-                                        <p:tav tm="0">
-                                          <p:val>
-                                            <p:strVal val="#ppt_x"/>
-                                          </p:val>
-                                        </p:tav>
-                                        <p:tav tm="100000">
-                                          <p:val>
-                                            <p:strVal val="#ppt_x"/>
-                                          </p:val>
-                                        </p:tav>
-                                      </p:tavLst>
-                                    </p:anim>
-                                    <p:anim calcmode="lin" valueType="num">
-                                      <p:cBhvr>
-                                        <p:cTn id="90" dur="750" decel="100000" fill="hold"/>
-                                        <p:tgtEl>
-                                          <p:spTgt spid="22"/>
-                                        </p:tgtEl>
-                                        <p:attrNameLst>
-                                          <p:attrName>ppt_y</p:attrName>
-                                        </p:attrNameLst>
-                                      </p:cBhvr>
-                                      <p:tavLst>
-                                        <p:tav tm="0">
-                                          <p:val>
-                                            <p:strVal val="#ppt_y+.08"/>
-                                          </p:val>
-                                        </p:tav>
-                                        <p:tav tm="100000">
-                                          <p:val>
-                                            <p:strVal val="#ppt_y"/>
-                                          </p:val>
-                                        </p:tav>
-                                      </p:tavLst>
-                                    </p:anim>
-                                  </p:childTnLst>
-                                </p:cTn>
-                              </p:par>
-                              <p:par>
-                                <p:cTn id="96" presetID="42" presetClass="entr" presetSubtype="0" grpId="0" fill="hold" nodeType="withEffect">
-                                  <p:stCondLst>
-                                    <p:cond delay="1700"/>
-                                  </p:stCondLst>
-                                  <p:childTnLst>
-                                    <p:set>
-                                      <p:cBhvr>
-                                        <p:cTn id="92" dur="1" fill="hold">
-                                          <p:stCondLst>
-                                            <p:cond delay="0"/>
-                                          </p:stCondLst>
-                                        </p:cTn>
-                                        <p:tgtEl>
-                                          <p:spTgt spid="23"/>
-                                        </p:tgtEl>
-                                        <p:attrNameLst>
-                                          <p:attrName>style.visibility</p:attrName>
-                                        </p:attrNameLst>
-                                      </p:cBhvr>
-                                      <p:to>
-                                        <p:strVal val="visible"/>
-                                      </p:to>
-                                    </p:set>
-                                    <p:animEffect transition="in" filter="fade">
-                                      <p:cBhvr>
-                                        <p:cTn id="93" dur="750"/>
-                                        <p:tgtEl>
-                                          <p:spTgt spid="23"/>
-                                        </p:tgtEl>
-                                      </p:cBhvr>
-                                    </p:animEffect>
-                                    <p:anim calcmode="lin" valueType="num">
-                                      <p:cBhvr>
-                                        <p:cTn id="94" dur="750" decel="100000" fill="hold"/>
-                                        <p:tgtEl>
-                                          <p:spTgt spid="23"/>
-                                        </p:tgtEl>
-                                        <p:attrNameLst>
-                                          <p:attrName>ppt_x</p:attrName>
-                                        </p:attrNameLst>
-                                      </p:cBhvr>
-                                      <p:tavLst>
-                                        <p:tav tm="0">
-                                          <p:val>
-                                            <p:strVal val="#ppt_x"/>
-                                          </p:val>
-                                        </p:tav>
-                                        <p:tav tm="100000">
-                                          <p:val>
-                                            <p:strVal val="#ppt_x"/>
-                                          </p:val>
-                                        </p:tav>
-                                      </p:tavLst>
-                                    </p:anim>
-                                    <p:anim calcmode="lin" valueType="num">
-                                      <p:cBhvr>
-                                        <p:cTn id="95" dur="750" decel="100000" fill="hold"/>
-                                        <p:tgtEl>
-                                          <p:spTgt spid="23"/>
-                                        </p:tgtEl>
-                                        <p:attrNameLst>
-                                          <p:attrName>ppt_y</p:attrName>
-                                        </p:attrNameLst>
-                                      </p:cBhvr>
-                                      <p:tavLst>
-                                        <p:tav tm="0">
-                                          <p:val>
-                                            <p:strVal val="#ppt_y+.08"/>
-                                          </p:val>
-                                        </p:tav>
-                                        <p:tav tm="100000">
-                                          <p:val>
-                                            <p:strVal val="#ppt_y"/>
-                                          </p:val>
-                                        </p:tav>
-                                      </p:tavLst>
-                                    </p:anim>
-                                  </p:childTnLst>
-                                </p:cTn>
-                              </p:par>
-                              <p:par>
-                                <p:cTn id="101" presetID="42" presetClass="entr" presetSubtype="0" grpId="0" fill="hold" nodeType="withEffect">
-                                  <p:stCondLst>
-                                    <p:cond delay="1700"/>
-                                  </p:stCondLst>
-                                  <p:childTnLst>
-                                    <p:set>
-                                      <p:cBhvr>
-                                        <p:cTn id="97" dur="1" fill="hold">
-                                          <p:stCondLst>
-                                            <p:cond delay="0"/>
-                                          </p:stCondLst>
-                                        </p:cTn>
+                                        <p:cTn id="106" dur="600"/>
                                         <p:tgtEl>
                                           <p:spTgt spid="24"/>
-                                        </p:tgtEl>
-                                        <p:attrNameLst>
-                                          <p:attrName>style.visibility</p:attrName>
-                                        </p:attrNameLst>
-                                      </p:cBhvr>
-                                      <p:to>
-                                        <p:strVal val="visible"/>
-                                      </p:to>
-                                    </p:set>
-                                    <p:animEffect transition="in" filter="fade">
-                                      <p:cBhvr>
-                                        <p:cTn id="98" dur="750"/>
-                                        <p:tgtEl>
-                                          <p:spTgt spid="24"/>
-                                        </p:tgtEl>
-                                      </p:cBhvr>
-                                    </p:animEffect>
-                                    <p:anim calcmode="lin" valueType="num">
-                                      <p:cBhvr>
-                                        <p:cTn id="99" dur="750" decel="100000" fill="hold"/>
-                                        <p:tgtEl>
-                                          <p:spTgt spid="24"/>
-                                        </p:tgtEl>
-                                        <p:attrNameLst>
-                                          <p:attrName>ppt_x</p:attrName>
-                                        </p:attrNameLst>
-                                      </p:cBhvr>
-                                      <p:tavLst>
-                                        <p:tav tm="0">
-                                          <p:val>
-                                            <p:strVal val="#ppt_x"/>
-                                          </p:val>
-                                        </p:tav>
-                                        <p:tav tm="100000">
-                                          <p:val>
-                                            <p:strVal val="#ppt_x"/>
-                                          </p:val>
-                                        </p:tav>
-                                      </p:tavLst>
-                                    </p:anim>
-                                    <p:anim calcmode="lin" valueType="num">
-                                      <p:cBhvr>
-                                        <p:cTn id="100" dur="750" decel="100000" fill="hold"/>
-                                        <p:tgtEl>
-                                          <p:spTgt spid="24"/>
-                                        </p:tgtEl>
-                                        <p:attrNameLst>
-                                          <p:attrName>ppt_y</p:attrName>
-                                        </p:attrNameLst>
-                                      </p:cBhvr>
-                                      <p:tavLst>
-                                        <p:tav tm="0">
-                                          <p:val>
-                                            <p:strVal val="#ppt_y+.08"/>
-                                          </p:val>
-                                        </p:tav>
-                                        <p:tav tm="100000">
-                                          <p:val>
-                                            <p:strVal val="#ppt_y"/>
-                                          </p:val>
-                                        </p:tav>
-                                      </p:tavLst>
-                                    </p:anim>
-                                  </p:childTnLst>
-                                </p:cTn>
-                              </p:par>
-                              <p:par>
-                                <p:cTn id="106" presetID="42" presetClass="entr" presetSubtype="0" grpId="0" fill="hold" nodeType="withEffect">
-                                  <p:stCondLst>
-                                    <p:cond delay="1700"/>
-                                  </p:stCondLst>
-                                  <p:childTnLst>
-                                    <p:set>
-                                      <p:cBhvr>
-                                        <p:cTn id="102" dur="1" fill="hold">
-                                          <p:stCondLst>
-                                            <p:cond delay="0"/>
-                                          </p:stCondLst>
-                                        </p:cTn>
-                                        <p:tgtEl>
-                                          <p:spTgt spid="25"/>
-                                        </p:tgtEl>
-                                        <p:attrNameLst>
-                                          <p:attrName>style.visibility</p:attrName>
-                                        </p:attrNameLst>
-                                      </p:cBhvr>
-                                      <p:to>
-                                        <p:strVal val="visible"/>
-                                      </p:to>
-                                    </p:set>
-                                    <p:animEffect transition="in" filter="fade">
-                                      <p:cBhvr>
-                                        <p:cTn id="103" dur="750"/>
-                                        <p:tgtEl>
-                                          <p:spTgt spid="25"/>
-                                        </p:tgtEl>
-                                      </p:cBhvr>
-                                    </p:animEffect>
-                                    <p:anim calcmode="lin" valueType="num">
-                                      <p:cBhvr>
-                                        <p:cTn id="104" dur="750" decel="100000" fill="hold"/>
-                                        <p:tgtEl>
-                                          <p:spTgt spid="25"/>
-                                        </p:tgtEl>
-                                        <p:attrNameLst>
-                                          <p:attrName>ppt_x</p:attrName>
-                                        </p:attrNameLst>
-                                      </p:cBhvr>
-                                      <p:tavLst>
-                                        <p:tav tm="0">
-                                          <p:val>
-                                            <p:strVal val="#ppt_x"/>
-                                          </p:val>
-                                        </p:tav>
-                                        <p:tav tm="100000">
-                                          <p:val>
-                                            <p:strVal val="#ppt_x"/>
-                                          </p:val>
-                                        </p:tav>
-                                      </p:tavLst>
-                                    </p:anim>
-                                    <p:anim calcmode="lin" valueType="num">
-                                      <p:cBhvr>
-                                        <p:cTn id="105" dur="750" decel="100000" fill="hold"/>
-                                        <p:tgtEl>
-                                          <p:spTgt spid="25"/>
-                                        </p:tgtEl>
-                                        <p:attrNameLst>
-                                          <p:attrName>ppt_y</p:attrName>
-                                        </p:attrNameLst>
-                                      </p:cBhvr>
-                                      <p:tavLst>
-                                        <p:tav tm="0">
-                                          <p:val>
-                                            <p:strVal val="#ppt_y+.08"/>
-                                          </p:val>
-                                        </p:tav>
-                                        <p:tav tm="100000">
-                                          <p:val>
-                                            <p:strVal val="#ppt_y"/>
-                                          </p:val>
-                                        </p:tav>
-                                      </p:tavLst>
-                                    </p:anim>
-                                  </p:childTnLst>
-                                </p:cTn>
-                              </p:par>
-                              <p:par>
-                                <p:cTn id="111" presetID="42" presetClass="entr" presetSubtype="0" grpId="0" fill="hold" nodeType="withEffect">
-                                  <p:stCondLst>
-                                    <p:cond delay="1900"/>
-                                  </p:stCondLst>
-                                  <p:childTnLst>
-                                    <p:set>
-                                      <p:cBhvr>
-                                        <p:cTn id="107" dur="1" fill="hold">
-                                          <p:stCondLst>
-                                            <p:cond delay="0"/>
-                                          </p:stCondLst>
-                                        </p:cTn>
-                                        <p:tgtEl>
-                                          <p:spTgt spid="26"/>
-                                        </p:tgtEl>
-                                        <p:attrNameLst>
-                                          <p:attrName>style.visibility</p:attrName>
-                                        </p:attrNameLst>
-                                      </p:cBhvr>
-                                      <p:to>
-                                        <p:strVal val="visible"/>
-                                      </p:to>
-                                    </p:set>
-                                    <p:animEffect transition="in" filter="fade">
-                                      <p:cBhvr>
-                                        <p:cTn id="108" dur="750"/>
-                                        <p:tgtEl>
-                                          <p:spTgt spid="26"/>
-                                        </p:tgtEl>
-                                      </p:cBhvr>
-                                    </p:animEffect>
-                                    <p:anim calcmode="lin" valueType="num">
-                                      <p:cBhvr>
-                                        <p:cTn id="109" dur="750" decel="100000" fill="hold"/>
-                                        <p:tgtEl>
-                                          <p:spTgt spid="26"/>
-                                        </p:tgtEl>
-                                        <p:attrNameLst>
-                                          <p:attrName>ppt_x</p:attrName>
-                                        </p:attrNameLst>
-                                      </p:cBhvr>
-                                      <p:tavLst>
-                                        <p:tav tm="0">
-                                          <p:val>
-                                            <p:strVal val="#ppt_x"/>
-                                          </p:val>
-                                        </p:tav>
-                                        <p:tav tm="100000">
-                                          <p:val>
-                                            <p:strVal val="#ppt_x"/>
-                                          </p:val>
-                                        </p:tav>
-                                      </p:tavLst>
-                                    </p:anim>
-                                    <p:anim calcmode="lin" valueType="num">
-                                      <p:cBhvr>
-                                        <p:cTn id="110" dur="750" decel="100000" fill="hold"/>
-                                        <p:tgtEl>
-                                          <p:spTgt spid="26"/>
-                                        </p:tgtEl>
-                                        <p:attrNameLst>
-                                          <p:attrName>ppt_y</p:attrName>
-                                        </p:attrNameLst>
-                                      </p:cBhvr>
-                                      <p:tavLst>
-                                        <p:tav tm="0">
-                                          <p:val>
-                                            <p:strVal val="#ppt_y+.08"/>
-                                          </p:val>
-                                        </p:tav>
-                                        <p:tav tm="100000">
-                                          <p:val>
-                                            <p:strVal val="#ppt_y"/>
-                                          </p:val>
-                                        </p:tav>
-                                      </p:tavLst>
-                                    </p:anim>
-                                  </p:childTnLst>
-                                </p:cTn>
-                              </p:par>
-                              <p:par>
-                                <p:cTn id="116" presetID="42" presetClass="entr" presetSubtype="0" grpId="0" fill="hold" nodeType="withEffect">
-                                  <p:stCondLst>
-                                    <p:cond delay="1900"/>
-                                  </p:stCondLst>
-                                  <p:childTnLst>
-                                    <p:set>
-                                      <p:cBhvr>
-                                        <p:cTn id="112" dur="1" fill="hold">
-                                          <p:stCondLst>
-                                            <p:cond delay="0"/>
-                                          </p:stCondLst>
-                                        </p:cTn>
-                                        <p:tgtEl>
-                                          <p:spTgt spid="27"/>
-                                        </p:tgtEl>
-                                        <p:attrNameLst>
-                                          <p:attrName>style.visibility</p:attrName>
-                                        </p:attrNameLst>
-                                      </p:cBhvr>
-                                      <p:to>
-                                        <p:strVal val="visible"/>
-                                      </p:to>
-                                    </p:set>
-                                    <p:animEffect transition="in" filter="fade">
-                                      <p:cBhvr>
-                                        <p:cTn id="113" dur="750"/>
-                                        <p:tgtEl>
-                                          <p:spTgt spid="27"/>
-                                        </p:tgtEl>
-                                      </p:cBhvr>
-                                    </p:animEffect>
-                                    <p:anim calcmode="lin" valueType="num">
-                                      <p:cBhvr>
-                                        <p:cTn id="114" dur="750" decel="100000" fill="hold"/>
-                                        <p:tgtEl>
-                                          <p:spTgt spid="27"/>
-                                        </p:tgtEl>
-                                        <p:attrNameLst>
-                                          <p:attrName>ppt_x</p:attrName>
-                                        </p:attrNameLst>
-                                      </p:cBhvr>
-                                      <p:tavLst>
-                                        <p:tav tm="0">
-                                          <p:val>
-                                            <p:strVal val="#ppt_x"/>
-                                          </p:val>
-                                        </p:tav>
-                                        <p:tav tm="100000">
-                                          <p:val>
-                                            <p:strVal val="#ppt_x"/>
-                                          </p:val>
-                                        </p:tav>
-                                      </p:tavLst>
-                                    </p:anim>
-                                    <p:anim calcmode="lin" valueType="num">
-                                      <p:cBhvr>
-                                        <p:cTn id="115" dur="750" decel="100000" fill="hold"/>
-                                        <p:tgtEl>
-                                          <p:spTgt spid="27"/>
-                                        </p:tgtEl>
-                                        <p:attrNameLst>
-                                          <p:attrName>ppt_y</p:attrName>
-                                        </p:attrNameLst>
-                                      </p:cBhvr>
-                                      <p:tavLst>
-                                        <p:tav tm="0">
-                                          <p:val>
-                                            <p:strVal val="#ppt_y+.08"/>
-                                          </p:val>
-                                        </p:tav>
-                                        <p:tav tm="100000">
-                                          <p:val>
-                                            <p:strVal val="#ppt_y"/>
-                                          </p:val>
-                                        </p:tav>
-                                      </p:tavLst>
-                                    </p:anim>
-                                  </p:childTnLst>
-                                </p:cTn>
-                              </p:par>
-                              <p:par>
-                                <p:cTn id="121" presetID="42" presetClass="entr" presetSubtype="0" grpId="0" fill="hold" nodeType="withEffect">
-                                  <p:stCondLst>
-                                    <p:cond delay="1900"/>
-                                  </p:stCondLst>
-                                  <p:childTnLst>
-                                    <p:set>
-                                      <p:cBhvr>
-                                        <p:cTn id="117" dur="1" fill="hold">
-                                          <p:stCondLst>
-                                            <p:cond delay="0"/>
-                                          </p:stCondLst>
-                                        </p:cTn>
-                                        <p:tgtEl>
-                                          <p:spTgt spid="28"/>
-                                        </p:tgtEl>
-                                        <p:attrNameLst>
-                                          <p:attrName>style.visibility</p:attrName>
-                                        </p:attrNameLst>
-                                      </p:cBhvr>
-                                      <p:to>
-                                        <p:strVal val="visible"/>
-                                      </p:to>
-                                    </p:set>
-                                    <p:animEffect transition="in" filter="fade">
-                                      <p:cBhvr>
-                                        <p:cTn id="118" dur="750"/>
-                                        <p:tgtEl>
-                                          <p:spTgt spid="28"/>
-                                        </p:tgtEl>
-                                      </p:cBhvr>
-                                    </p:animEffect>
-                                    <p:anim calcmode="lin" valueType="num">
-                                      <p:cBhvr>
-                                        <p:cTn id="119" dur="750" decel="100000" fill="hold"/>
-                                        <p:tgtEl>
-                                          <p:spTgt spid="28"/>
-                                        </p:tgtEl>
-                                        <p:attrNameLst>
-                                          <p:attrName>ppt_x</p:attrName>
-                                        </p:attrNameLst>
-                                      </p:cBhvr>
-                                      <p:tavLst>
-                                        <p:tav tm="0">
-                                          <p:val>
-                                            <p:strVal val="#ppt_x"/>
-                                          </p:val>
-                                        </p:tav>
-                                        <p:tav tm="100000">
-                                          <p:val>
-                                            <p:strVal val="#ppt_x"/>
-                                          </p:val>
-                                        </p:tav>
-                                      </p:tavLst>
-                                    </p:anim>
-                                    <p:anim calcmode="lin" valueType="num">
-                                      <p:cBhvr>
-                                        <p:cTn id="120" dur="750" decel="100000" fill="hold"/>
-                                        <p:tgtEl>
-                                          <p:spTgt spid="28"/>
-                                        </p:tgtEl>
-                                        <p:attrNameLst>
-                                          <p:attrName>ppt_y</p:attrName>
-                                        </p:attrNameLst>
-                                      </p:cBhvr>
-                                      <p:tavLst>
-                                        <p:tav tm="0">
-                                          <p:val>
-                                            <p:strVal val="#ppt_y+.08"/>
-                                          </p:val>
-                                        </p:tav>
-                                        <p:tav tm="100000">
-                                          <p:val>
-                                            <p:strVal val="#ppt_y"/>
-                                          </p:val>
-                                        </p:tav>
-                                      </p:tavLst>
-                                    </p:anim>
-                                  </p:childTnLst>
-                                </p:cTn>
-                              </p:par>
-                              <p:par>
-                                <p:cTn id="126" presetID="42" presetClass="entr" presetSubtype="0" grpId="0" fill="hold" nodeType="withEffect">
-                                  <p:stCondLst>
-                                    <p:cond delay="1900"/>
-                                  </p:stCondLst>
-                                  <p:childTnLst>
-                                    <p:set>
-                                      <p:cBhvr>
-                                        <p:cTn id="122" dur="1" fill="hold">
-                                          <p:stCondLst>
-                                            <p:cond delay="0"/>
-                                          </p:stCondLst>
-                                        </p:cTn>
-                                        <p:tgtEl>
-                                          <p:spTgt spid="29"/>
-                                        </p:tgtEl>
-                                        <p:attrNameLst>
-                                          <p:attrName>style.visibility</p:attrName>
-                                        </p:attrNameLst>
-                                      </p:cBhvr>
-                                      <p:to>
-                                        <p:strVal val="visible"/>
-                                      </p:to>
-                                    </p:set>
-                                    <p:animEffect transition="in" filter="fade">
-                                      <p:cBhvr>
-                                        <p:cTn id="123" dur="750"/>
-                                        <p:tgtEl>
-                                          <p:spTgt spid="29"/>
-                                        </p:tgtEl>
-                                      </p:cBhvr>
-                                    </p:animEffect>
-                                    <p:anim calcmode="lin" valueType="num">
-                                      <p:cBhvr>
-                                        <p:cTn id="124" dur="750" decel="100000" fill="hold"/>
-                                        <p:tgtEl>
-                                          <p:spTgt spid="29"/>
-                                        </p:tgtEl>
-                                        <p:attrNameLst>
-                                          <p:attrName>ppt_x</p:attrName>
-                                        </p:attrNameLst>
-                                      </p:cBhvr>
-                                      <p:tavLst>
-                                        <p:tav tm="0">
-                                          <p:val>
-                                            <p:strVal val="#ppt_x"/>
-                                          </p:val>
-                                        </p:tav>
-                                        <p:tav tm="100000">
-                                          <p:val>
-                                            <p:strVal val="#ppt_x"/>
-                                          </p:val>
-                                        </p:tav>
-                                      </p:tavLst>
-                                    </p:anim>
-                                    <p:anim calcmode="lin" valueType="num">
-                                      <p:cBhvr>
-                                        <p:cTn id="125" dur="750" decel="100000" fill="hold"/>
-                                        <p:tgtEl>
-                                          <p:spTgt spid="29"/>
-                                        </p:tgtEl>
-                                        <p:attrNameLst>
-                                          <p:attrName>ppt_y</p:attrName>
-                                        </p:attrNameLst>
-                                      </p:cBhvr>
-                                      <p:tavLst>
-                                        <p:tav tm="0">
-                                          <p:val>
-                                            <p:strVal val="#ppt_y+.08"/>
-                                          </p:val>
-                                        </p:tav>
-                                        <p:tav tm="100000">
-                                          <p:val>
-                                            <p:strVal val="#ppt_y"/>
-                                          </p:val>
-                                        </p:tav>
-                                      </p:tavLst>
-                                    </p:anim>
-                                  </p:childTnLst>
-                                </p:cTn>
-                              </p:par>
-                              <p:par>
-                                <p:cTn id="131" presetID="42" presetClass="entr" presetSubtype="0" grpId="0" fill="hold" nodeType="withEffect">
-                                  <p:stCondLst>
-                                    <p:cond delay="1900"/>
-                                  </p:stCondLst>
-                                  <p:childTnLst>
-                                    <p:set>
-                                      <p:cBhvr>
-                                        <p:cTn id="127" dur="1" fill="hold">
-                                          <p:stCondLst>
-                                            <p:cond delay="0"/>
-                                          </p:stCondLst>
-                                        </p:cTn>
-                                        <p:tgtEl>
-                                          <p:spTgt spid="30"/>
-                                        </p:tgtEl>
-                                        <p:attrNameLst>
-                                          <p:attrName>style.visibility</p:attrName>
-                                        </p:attrNameLst>
-                                      </p:cBhvr>
-                                      <p:to>
-                                        <p:strVal val="visible"/>
-                                      </p:to>
-                                    </p:set>
-                                    <p:animEffect transition="in" filter="fade">
-                                      <p:cBhvr>
-                                        <p:cTn id="128" dur="750"/>
-                                        <p:tgtEl>
-                                          <p:spTgt spid="30"/>
-                                        </p:tgtEl>
-                                      </p:cBhvr>
-                                    </p:animEffect>
-                                    <p:anim calcmode="lin" valueType="num">
-                                      <p:cBhvr>
-                                        <p:cTn id="129" dur="750" decel="100000" fill="hold"/>
-                                        <p:tgtEl>
-                                          <p:spTgt spid="30"/>
-                                        </p:tgtEl>
-                                        <p:attrNameLst>
-                                          <p:attrName>ppt_x</p:attrName>
-                                        </p:attrNameLst>
-                                      </p:cBhvr>
-                                      <p:tavLst>
-                                        <p:tav tm="0">
-                                          <p:val>
-                                            <p:strVal val="#ppt_x"/>
-                                          </p:val>
-                                        </p:tav>
-                                        <p:tav tm="100000">
-                                          <p:val>
-                                            <p:strVal val="#ppt_x"/>
-                                          </p:val>
-                                        </p:tav>
-                                      </p:tavLst>
-                                    </p:anim>
-                                    <p:anim calcmode="lin" valueType="num">
-                                      <p:cBhvr>
-                                        <p:cTn id="130" dur="750" decel="100000" fill="hold"/>
-                                        <p:tgtEl>
-                                          <p:spTgt spid="30"/>
-                                        </p:tgtEl>
-                                        <p:attrNameLst>
-                                          <p:attrName>ppt_y</p:attrName>
-                                        </p:attrNameLst>
-                                      </p:cBhvr>
-                                      <p:tavLst>
-                                        <p:tav tm="0">
-                                          <p:val>
-                                            <p:strVal val="#ppt_y+.08"/>
-                                          </p:val>
-                                        </p:tav>
-                                        <p:tav tm="100000">
-                                          <p:val>
-                                            <p:strVal val="#ppt_y"/>
-                                          </p:val>
-                                        </p:tav>
-                                      </p:tavLst>
-                                    </p:anim>
-                                  </p:childTnLst>
-                                </p:cTn>
-                              </p:par>
-                              <p:par>
-                                <p:cTn id="136" presetID="42" presetClass="entr" presetSubtype="0" grpId="0" fill="hold" nodeType="withEffect">
-                                  <p:stCondLst>
-                                    <p:cond delay="1900"/>
-                                  </p:stCondLst>
-                                  <p:childTnLst>
-                                    <p:set>
-                                      <p:cBhvr>
-                                        <p:cTn id="132" dur="1" fill="hold">
-                                          <p:stCondLst>
-                                            <p:cond delay="0"/>
-                                          </p:stCondLst>
-                                        </p:cTn>
-                                        <p:tgtEl>
-                                          <p:spTgt spid="31"/>
-                                        </p:tgtEl>
-                                        <p:attrNameLst>
-                                          <p:attrName>style.visibility</p:attrName>
-                                        </p:attrNameLst>
-                                      </p:cBhvr>
-                                      <p:to>
-                                        <p:strVal val="visible"/>
-                                      </p:to>
-                                    </p:set>
-                                    <p:animEffect transition="in" filter="fade">
-                                      <p:cBhvr>
-                                        <p:cTn id="133" dur="750"/>
-                                        <p:tgtEl>
-                                          <p:spTgt spid="31"/>
-                                        </p:tgtEl>
-                                      </p:cBhvr>
-                                    </p:animEffect>
-                                    <p:anim calcmode="lin" valueType="num">
-                                      <p:cBhvr>
-                                        <p:cTn id="134" dur="750" decel="100000" fill="hold"/>
-                                        <p:tgtEl>
-                                          <p:spTgt spid="31"/>
-                                        </p:tgtEl>
-                                        <p:attrNameLst>
-                                          <p:attrName>ppt_x</p:attrName>
-                                        </p:attrNameLst>
-                                      </p:cBhvr>
-                                      <p:tavLst>
-                                        <p:tav tm="0">
-                                          <p:val>
-                                            <p:strVal val="#ppt_x"/>
-                                          </p:val>
-                                        </p:tav>
-                                        <p:tav tm="100000">
-                                          <p:val>
-                                            <p:strVal val="#ppt_x"/>
-                                          </p:val>
-                                        </p:tav>
-                                      </p:tavLst>
-                                    </p:anim>
-                                    <p:anim calcmode="lin" valueType="num">
-                                      <p:cBhvr>
-                                        <p:cTn id="135" dur="750" decel="100000" fill="hold"/>
-                                        <p:tgtEl>
-                                          <p:spTgt spid="31"/>
-                                        </p:tgtEl>
-                                        <p:attrNameLst>
-                                          <p:attrName>ppt_y</p:attrName>
-                                        </p:attrNameLst>
-                                      </p:cBhvr>
-                                      <p:tavLst>
-                                        <p:tav tm="0">
-                                          <p:val>
-                                            <p:strVal val="#ppt_y+.08"/>
-                                          </p:val>
-                                        </p:tav>
-                                        <p:tav tm="100000">
-                                          <p:val>
-                                            <p:strVal val="#ppt_y"/>
-                                          </p:val>
-                                        </p:tav>
-                                      </p:tavLst>
-                                    </p:anim>
-                                  </p:childTnLst>
-                                </p:cTn>
-                              </p:par>
-                              <p:par>
-                                <p:cTn id="141" presetID="42" presetClass="entr" presetSubtype="0" grpId="0" fill="hold" nodeType="withEffect">
-                                  <p:stCondLst>
-                                    <p:cond delay="1900"/>
-                                  </p:stCondLst>
-                                  <p:childTnLst>
-                                    <p:set>
-                                      <p:cBhvr>
-                                        <p:cTn id="137" dur="1" fill="hold">
-                                          <p:stCondLst>
-                                            <p:cond delay="0"/>
-                                          </p:stCondLst>
-                                        </p:cTn>
-                                        <p:tgtEl>
-                                          <p:spTgt spid="32"/>
-                                        </p:tgtEl>
-                                        <p:attrNameLst>
-                                          <p:attrName>style.visibility</p:attrName>
-                                        </p:attrNameLst>
-                                      </p:cBhvr>
-                                      <p:to>
-                                        <p:strVal val="visible"/>
-                                      </p:to>
-                                    </p:set>
-                                    <p:animEffect transition="in" filter="fade">
-                                      <p:cBhvr>
-                                        <p:cTn id="138" dur="750"/>
-                                        <p:tgtEl>
-                                          <p:spTgt spid="32"/>
-                                        </p:tgtEl>
-                                      </p:cBhvr>
-                                    </p:animEffect>
-                                    <p:anim calcmode="lin" valueType="num">
-                                      <p:cBhvr>
-                                        <p:cTn id="139" dur="750" decel="100000" fill="hold"/>
-                                        <p:tgtEl>
-                                          <p:spTgt spid="32"/>
-                                        </p:tgtEl>
-                                        <p:attrNameLst>
-                                          <p:attrName>ppt_x</p:attrName>
-                                        </p:attrNameLst>
-                                      </p:cBhvr>
-                                      <p:tavLst>
-                                        <p:tav tm="0">
-                                          <p:val>
-                                            <p:strVal val="#ppt_x"/>
-                                          </p:val>
-                                        </p:tav>
-                                        <p:tav tm="100000">
-                                          <p:val>
-                                            <p:strVal val="#ppt_x"/>
-                                          </p:val>
-                                        </p:tav>
-                                      </p:tavLst>
-                                    </p:anim>
-                                    <p:anim calcmode="lin" valueType="num">
-                                      <p:cBhvr>
-                                        <p:cTn id="140" dur="750" decel="100000" fill="hold"/>
-                                        <p:tgtEl>
-                                          <p:spTgt spid="32"/>
-                                        </p:tgtEl>
-                                        <p:attrNameLst>
-                                          <p:attrName>ppt_y</p:attrName>
-                                        </p:attrNameLst>
-                                      </p:cBhvr>
-                                      <p:tavLst>
-                                        <p:tav tm="0">
-                                          <p:val>
-                                            <p:strVal val="#ppt_y+.08"/>
-                                          </p:val>
-                                        </p:tav>
-                                        <p:tav tm="100000">
-                                          <p:val>
-                                            <p:strVal val="#ppt_y"/>
-                                          </p:val>
-                                        </p:tav>
-                                      </p:tavLst>
-                                    </p:anim>
-                                  </p:childTnLst>
-                                </p:cTn>
-                              </p:par>
-                              <p:par>
-                                <p:cTn id="146" presetID="42" presetClass="entr" presetSubtype="0" grpId="0" fill="hold" nodeType="withEffect">
-                                  <p:stCondLst>
-                                    <p:cond delay="1900"/>
-                                  </p:stCondLst>
-                                  <p:childTnLst>
-                                    <p:set>
-                                      <p:cBhvr>
-                                        <p:cTn id="142" dur="1" fill="hold">
-                                          <p:stCondLst>
-                                            <p:cond delay="0"/>
-                                          </p:stCondLst>
-                                        </p:cTn>
-                                        <p:tgtEl>
-                                          <p:spTgt spid="33"/>
-                                        </p:tgtEl>
-                                        <p:attrNameLst>
-                                          <p:attrName>style.visibility</p:attrName>
-                                        </p:attrNameLst>
-                                      </p:cBhvr>
-                                      <p:to>
-                                        <p:strVal val="visible"/>
-                                      </p:to>
-                                    </p:set>
-                                    <p:animEffect transition="in" filter="fade">
-                                      <p:cBhvr>
-                                        <p:cTn id="143" dur="750"/>
-                                        <p:tgtEl>
-                                          <p:spTgt spid="33"/>
-                                        </p:tgtEl>
-                                      </p:cBhvr>
-                                    </p:animEffect>
-                                    <p:anim calcmode="lin" valueType="num">
-                                      <p:cBhvr>
-                                        <p:cTn id="144" dur="750" decel="100000" fill="hold"/>
-                                        <p:tgtEl>
-                                          <p:spTgt spid="33"/>
-                                        </p:tgtEl>
-                                        <p:attrNameLst>
-                                          <p:attrName>ppt_x</p:attrName>
-                                        </p:attrNameLst>
-                                      </p:cBhvr>
-                                      <p:tavLst>
-                                        <p:tav tm="0">
-                                          <p:val>
-                                            <p:strVal val="#ppt_x"/>
-                                          </p:val>
-                                        </p:tav>
-                                        <p:tav tm="100000">
-                                          <p:val>
-                                            <p:strVal val="#ppt_x"/>
-                                          </p:val>
-                                        </p:tav>
-                                      </p:tavLst>
-                                    </p:anim>
-                                    <p:anim calcmode="lin" valueType="num">
-                                      <p:cBhvr>
-                                        <p:cTn id="145" dur="750" decel="100000" fill="hold"/>
-                                        <p:tgtEl>
-                                          <p:spTgt spid="33"/>
-                                        </p:tgtEl>
-                                        <p:attrNameLst>
-                                          <p:attrName>ppt_y</p:attrName>
-                                        </p:attrNameLst>
-                                      </p:cBhvr>
-                                      <p:tavLst>
-                                        <p:tav tm="0">
-                                          <p:val>
-                                            <p:strVal val="#ppt_y+.08"/>
-                                          </p:val>
-                                        </p:tav>
-                                        <p:tav tm="100000">
-                                          <p:val>
-                                            <p:strVal val="#ppt_y"/>
-                                          </p:val>
-                                        </p:tav>
-                                      </p:tavLst>
-                                    </p:anim>
-                                  </p:childTnLst>
-                                </p:cTn>
-                              </p:par>
-                              <p:par>
-                                <p:cTn id="151" presetID="42" presetClass="entr" presetSubtype="0" grpId="0" fill="hold" nodeType="withEffect">
-                                  <p:stCondLst>
-                                    <p:cond delay="1900"/>
-                                  </p:stCondLst>
-                                  <p:childTnLst>
-                                    <p:set>
-                                      <p:cBhvr>
-                                        <p:cTn id="147" dur="1" fill="hold">
-                                          <p:stCondLst>
-                                            <p:cond delay="0"/>
-                                          </p:stCondLst>
-                                        </p:cTn>
-                                        <p:tgtEl>
-                                          <p:spTgt spid="34"/>
-                                        </p:tgtEl>
-                                        <p:attrNameLst>
-                                          <p:attrName>style.visibility</p:attrName>
-                                        </p:attrNameLst>
-                                      </p:cBhvr>
-                                      <p:to>
-                                        <p:strVal val="visible"/>
-                                      </p:to>
-                                    </p:set>
-                                    <p:animEffect transition="in" filter="fade">
-                                      <p:cBhvr>
-                                        <p:cTn id="148" dur="750"/>
-                                        <p:tgtEl>
-                                          <p:spTgt spid="34"/>
-                                        </p:tgtEl>
-                                      </p:cBhvr>
-                                    </p:animEffect>
-                                    <p:anim calcmode="lin" valueType="num">
-                                      <p:cBhvr>
-                                        <p:cTn id="149" dur="750" decel="100000" fill="hold"/>
-                                        <p:tgtEl>
-                                          <p:spTgt spid="34"/>
-                                        </p:tgtEl>
-                                        <p:attrNameLst>
-                                          <p:attrName>ppt_x</p:attrName>
-                                        </p:attrNameLst>
-                                      </p:cBhvr>
-                                      <p:tavLst>
-                                        <p:tav tm="0">
-                                          <p:val>
-                                            <p:strVal val="#ppt_x"/>
-                                          </p:val>
-                                        </p:tav>
-                                        <p:tav tm="100000">
-                                          <p:val>
-                                            <p:strVal val="#ppt_x"/>
-                                          </p:val>
-                                        </p:tav>
-                                      </p:tavLst>
-                                    </p:anim>
-                                    <p:anim calcmode="lin" valueType="num">
-                                      <p:cBhvr>
-                                        <p:cTn id="150" dur="750" decel="100000" fill="hold"/>
-                                        <p:tgtEl>
-                                          <p:spTgt spid="34"/>
-                                        </p:tgtEl>
-                                        <p:attrNameLst>
-                                          <p:attrName>ppt_y</p:attrName>
-                                        </p:attrNameLst>
-                                      </p:cBhvr>
-                                      <p:tavLst>
-                                        <p:tav tm="0">
-                                          <p:val>
-                                            <p:strVal val="#ppt_y+.08"/>
-                                          </p:val>
-                                        </p:tav>
-                                        <p:tav tm="100000">
-                                          <p:val>
-                                            <p:strVal val="#ppt_y"/>
-                                          </p:val>
-                                        </p:tav>
-                                      </p:tavLst>
-                                    </p:anim>
-                                  </p:childTnLst>
-                                </p:cTn>
-                              </p:par>
-                              <p:par>
-                                <p:cTn id="156" presetID="42" presetClass="entr" presetSubtype="0" grpId="0" fill="hold" nodeType="withEffect">
-                                  <p:stCondLst>
-                                    <p:cond delay="2100"/>
-                                  </p:stCondLst>
-                                  <p:childTnLst>
-                                    <p:set>
-                                      <p:cBhvr>
-                                        <p:cTn id="152" dur="1" fill="hold">
-                                          <p:stCondLst>
-                                            <p:cond delay="0"/>
-                                          </p:stCondLst>
-                                        </p:cTn>
-                                        <p:tgtEl>
-                                          <p:spTgt spid="35"/>
-                                        </p:tgtEl>
-                                        <p:attrNameLst>
-                                          <p:attrName>style.visibility</p:attrName>
-                                        </p:attrNameLst>
-                                      </p:cBhvr>
-                                      <p:to>
-                                        <p:strVal val="visible"/>
-                                      </p:to>
-                                    </p:set>
-                                    <p:animEffect transition="in" filter="fade">
-                                      <p:cBhvr>
-                                        <p:cTn id="153" dur="750"/>
-                                        <p:tgtEl>
-                                          <p:spTgt spid="35"/>
-                                        </p:tgtEl>
-                                      </p:cBhvr>
-                                    </p:animEffect>
-                                    <p:anim calcmode="lin" valueType="num">
-                                      <p:cBhvr>
-                                        <p:cTn id="154" dur="750" decel="100000" fill="hold"/>
-                                        <p:tgtEl>
-                                          <p:spTgt spid="35"/>
-                                        </p:tgtEl>
-                                        <p:attrNameLst>
-                                          <p:attrName>ppt_x</p:attrName>
-                                        </p:attrNameLst>
-                                      </p:cBhvr>
-                                      <p:tavLst>
-                                        <p:tav tm="0">
-                                          <p:val>
-                                            <p:strVal val="#ppt_x"/>
-                                          </p:val>
-                                        </p:tav>
-                                        <p:tav tm="100000">
-                                          <p:val>
-                                            <p:strVal val="#ppt_x"/>
-                                          </p:val>
-                                        </p:tav>
-                                      </p:tavLst>
-                                    </p:anim>
-                                    <p:anim calcmode="lin" valueType="num">
-                                      <p:cBhvr>
-                                        <p:cTn id="155" dur="750" decel="100000" fill="hold"/>
-                                        <p:tgtEl>
-                                          <p:spTgt spid="35"/>
-                                        </p:tgtEl>
-                                        <p:attrNameLst>
-                                          <p:attrName>ppt_y</p:attrName>
-                                        </p:attrNameLst>
-                                      </p:cBhvr>
-                                      <p:tavLst>
-                                        <p:tav tm="0">
-                                          <p:val>
-                                            <p:strVal val="#ppt_y+.08"/>
-                                          </p:val>
-                                        </p:tav>
-                                        <p:tav tm="100000">
-                                          <p:val>
-                                            <p:strVal val="#ppt_y"/>
-                                          </p:val>
-                                        </p:tav>
-                                      </p:tavLst>
-                                    </p:anim>
-                                  </p:childTnLst>
-                                </p:cTn>
-                              </p:par>
-                              <p:par>
-                                <p:cTn id="161" presetID="42" presetClass="entr" presetSubtype="0" grpId="0" fill="hold" nodeType="withEffect">
-                                  <p:stCondLst>
-                                    <p:cond delay="2100"/>
-                                  </p:stCondLst>
-                                  <p:childTnLst>
-                                    <p:set>
-                                      <p:cBhvr>
-                                        <p:cTn id="157" dur="1" fill="hold">
-                                          <p:stCondLst>
-                                            <p:cond delay="0"/>
-                                          </p:stCondLst>
-                                        </p:cTn>
-                                        <p:tgtEl>
-                                          <p:spTgt spid="36"/>
-                                        </p:tgtEl>
-                                        <p:attrNameLst>
-                                          <p:attrName>style.visibility</p:attrName>
-                                        </p:attrNameLst>
-                                      </p:cBhvr>
-                                      <p:to>
-                                        <p:strVal val="visible"/>
-                                      </p:to>
-                                    </p:set>
-                                    <p:animEffect transition="in" filter="fade">
-                                      <p:cBhvr>
-                                        <p:cTn id="158" dur="750"/>
-                                        <p:tgtEl>
-                                          <p:spTgt spid="36"/>
-                                        </p:tgtEl>
-                                      </p:cBhvr>
-                                    </p:animEffect>
-                                    <p:anim calcmode="lin" valueType="num">
-                                      <p:cBhvr>
-                                        <p:cTn id="159" dur="750" decel="100000" fill="hold"/>
-                                        <p:tgtEl>
-                                          <p:spTgt spid="36"/>
-                                        </p:tgtEl>
-                                        <p:attrNameLst>
-                                          <p:attrName>ppt_x</p:attrName>
-                                        </p:attrNameLst>
-                                      </p:cBhvr>
-                                      <p:tavLst>
-                                        <p:tav tm="0">
-                                          <p:val>
-                                            <p:strVal val="#ppt_x"/>
-                                          </p:val>
-                                        </p:tav>
-                                        <p:tav tm="100000">
-                                          <p:val>
-                                            <p:strVal val="#ppt_x"/>
-                                          </p:val>
-                                        </p:tav>
-                                      </p:tavLst>
-                                    </p:anim>
-                                    <p:anim calcmode="lin" valueType="num">
-                                      <p:cBhvr>
-                                        <p:cTn id="160" dur="750" decel="100000" fill="hold"/>
-                                        <p:tgtEl>
-                                          <p:spTgt spid="36"/>
-                                        </p:tgtEl>
-                                        <p:attrNameLst>
-                                          <p:attrName>ppt_y</p:attrName>
-                                        </p:attrNameLst>
-                                      </p:cBhvr>
-                                      <p:tavLst>
-                                        <p:tav tm="0">
-                                          <p:val>
-                                            <p:strVal val="#ppt_y+.08"/>
-                                          </p:val>
-                                        </p:tav>
-                                        <p:tav tm="100000">
-                                          <p:val>
-                                            <p:strVal val="#ppt_y"/>
-                                          </p:val>
-                                        </p:tav>
-                                      </p:tavLst>
-                                    </p:anim>
-                                  </p:childTnLst>
-                                </p:cTn>
-                              </p:par>
-                              <p:par>
-                                <p:cTn id="166" presetID="42" presetClass="entr" presetSubtype="0" grpId="0" fill="hold" nodeType="withEffect">
-                                  <p:stCondLst>
-                                    <p:cond delay="2100"/>
-                                  </p:stCondLst>
-                                  <p:childTnLst>
-                                    <p:set>
-                                      <p:cBhvr>
-                                        <p:cTn id="162" dur="1" fill="hold">
-                                          <p:stCondLst>
-                                            <p:cond delay="0"/>
-                                          </p:stCondLst>
-                                        </p:cTn>
-                                        <p:tgtEl>
-                                          <p:spTgt spid="37"/>
-                                        </p:tgtEl>
-                                        <p:attrNameLst>
-                                          <p:attrName>style.visibility</p:attrName>
-                                        </p:attrNameLst>
-                                      </p:cBhvr>
-                                      <p:to>
-                                        <p:strVal val="visible"/>
-                                      </p:to>
-                                    </p:set>
-                                    <p:animEffect transition="in" filter="fade">
-                                      <p:cBhvr>
-                                        <p:cTn id="163" dur="750"/>
-                                        <p:tgtEl>
-                                          <p:spTgt spid="37"/>
-                                        </p:tgtEl>
-                                      </p:cBhvr>
-                                    </p:animEffect>
-                                    <p:anim calcmode="lin" valueType="num">
-                                      <p:cBhvr>
-                                        <p:cTn id="164" dur="750" decel="100000" fill="hold"/>
-                                        <p:tgtEl>
-                                          <p:spTgt spid="37"/>
-                                        </p:tgtEl>
-                                        <p:attrNameLst>
-                                          <p:attrName>ppt_x</p:attrName>
-                                        </p:attrNameLst>
-                                      </p:cBhvr>
-                                      <p:tavLst>
-                                        <p:tav tm="0">
-                                          <p:val>
-                                            <p:strVal val="#ppt_x"/>
-                                          </p:val>
-                                        </p:tav>
-                                        <p:tav tm="100000">
-                                          <p:val>
-                                            <p:strVal val="#ppt_x"/>
-                                          </p:val>
-                                        </p:tav>
-                                      </p:tavLst>
-                                    </p:anim>
-                                    <p:anim calcmode="lin" valueType="num">
-                                      <p:cBhvr>
-                                        <p:cTn id="165" dur="750" decel="100000" fill="hold"/>
-                                        <p:tgtEl>
-                                          <p:spTgt spid="37"/>
-                                        </p:tgtEl>
-                                        <p:attrNameLst>
-                                          <p:attrName>ppt_y</p:attrName>
-                                        </p:attrNameLst>
-                                      </p:cBhvr>
-                                      <p:tavLst>
-                                        <p:tav tm="0">
-                                          <p:val>
-                                            <p:strVal val="#ppt_y+.08"/>
-                                          </p:val>
-                                        </p:tav>
-                                        <p:tav tm="100000">
-                                          <p:val>
-                                            <p:strVal val="#ppt_y"/>
-                                          </p:val>
-                                        </p:tav>
-                                      </p:tavLst>
-                                    </p:anim>
-                                  </p:childTnLst>
-                                </p:cTn>
-                              </p:par>
-                              <p:par>
-                                <p:cTn id="171" presetID="42" presetClass="entr" presetSubtype="0" grpId="0" fill="hold" nodeType="withEffect">
-                                  <p:stCondLst>
-                                    <p:cond delay="2100"/>
-                                  </p:stCondLst>
-                                  <p:childTnLst>
-                                    <p:set>
-                                      <p:cBhvr>
-                                        <p:cTn id="167" dur="1" fill="hold">
-                                          <p:stCondLst>
-                                            <p:cond delay="0"/>
-                                          </p:stCondLst>
-                                        </p:cTn>
-                                        <p:tgtEl>
-                                          <p:spTgt spid="38"/>
-                                        </p:tgtEl>
-                                        <p:attrNameLst>
-                                          <p:attrName>style.visibility</p:attrName>
-                                        </p:attrNameLst>
-                                      </p:cBhvr>
-                                      <p:to>
-                                        <p:strVal val="visible"/>
-                                      </p:to>
-                                    </p:set>
-                                    <p:animEffect transition="in" filter="fade">
-                                      <p:cBhvr>
-                                        <p:cTn id="168" dur="750"/>
-                                        <p:tgtEl>
-                                          <p:spTgt spid="38"/>
-                                        </p:tgtEl>
-                                      </p:cBhvr>
-                                    </p:animEffect>
-                                    <p:anim calcmode="lin" valueType="num">
-                                      <p:cBhvr>
-                                        <p:cTn id="169" dur="750" decel="100000" fill="hold"/>
-                                        <p:tgtEl>
-                                          <p:spTgt spid="38"/>
-                                        </p:tgtEl>
-                                        <p:attrNameLst>
-                                          <p:attrName>ppt_x</p:attrName>
-                                        </p:attrNameLst>
-                                      </p:cBhvr>
-                                      <p:tavLst>
-                                        <p:tav tm="0">
-                                          <p:val>
-                                            <p:strVal val="#ppt_x"/>
-                                          </p:val>
-                                        </p:tav>
-                                        <p:tav tm="100000">
-                                          <p:val>
-                                            <p:strVal val="#ppt_x"/>
-                                          </p:val>
-                                        </p:tav>
-                                      </p:tavLst>
-                                    </p:anim>
-                                    <p:anim calcmode="lin" valueType="num">
-                                      <p:cBhvr>
-                                        <p:cTn id="170" dur="750" decel="100000" fill="hold"/>
-                                        <p:tgtEl>
-                                          <p:spTgt spid="38"/>
-                                        </p:tgtEl>
-                                        <p:attrNameLst>
-                                          <p:attrName>ppt_y</p:attrName>
-                                        </p:attrNameLst>
-                                      </p:cBhvr>
-                                      <p:tavLst>
-                                        <p:tav tm="0">
-                                          <p:val>
-                                            <p:strVal val="#ppt_y+.08"/>
-                                          </p:val>
-                                        </p:tav>
-                                        <p:tav tm="100000">
-                                          <p:val>
-                                            <p:strVal val="#ppt_y"/>
-                                          </p:val>
-                                        </p:tav>
-                                      </p:tavLst>
-                                    </p:anim>
-                                  </p:childTnLst>
-                                </p:cTn>
-                              </p:par>
-                              <p:par>
-                                <p:cTn id="176" presetID="42" presetClass="entr" presetSubtype="0" grpId="0" fill="hold" nodeType="withEffect">
-                                  <p:stCondLst>
-                                    <p:cond delay="2100"/>
-                                  </p:stCondLst>
-                                  <p:childTnLst>
-                                    <p:set>
-                                      <p:cBhvr>
-                                        <p:cTn id="172" dur="1" fill="hold">
-                                          <p:stCondLst>
-                                            <p:cond delay="0"/>
-                                          </p:stCondLst>
-                                        </p:cTn>
-                                        <p:tgtEl>
-                                          <p:spTgt spid="39"/>
-                                        </p:tgtEl>
-                                        <p:attrNameLst>
-                                          <p:attrName>style.visibility</p:attrName>
-                                        </p:attrNameLst>
-                                      </p:cBhvr>
-                                      <p:to>
-                                        <p:strVal val="visible"/>
-                                      </p:to>
-                                    </p:set>
-                                    <p:animEffect transition="in" filter="fade">
-                                      <p:cBhvr>
-                                        <p:cTn id="173" dur="750"/>
-                                        <p:tgtEl>
-                                          <p:spTgt spid="39"/>
-                                        </p:tgtEl>
-                                      </p:cBhvr>
-                                    </p:animEffect>
-                                    <p:anim calcmode="lin" valueType="num">
-                                      <p:cBhvr>
-                                        <p:cTn id="174" dur="750" decel="100000" fill="hold"/>
-                                        <p:tgtEl>
-                                          <p:spTgt spid="39"/>
-                                        </p:tgtEl>
-                                        <p:attrNameLst>
-                                          <p:attrName>ppt_x</p:attrName>
-                                        </p:attrNameLst>
-                                      </p:cBhvr>
-                                      <p:tavLst>
-                                        <p:tav tm="0">
-                                          <p:val>
-                                            <p:strVal val="#ppt_x"/>
-                                          </p:val>
-                                        </p:tav>
-                                        <p:tav tm="100000">
-                                          <p:val>
-                                            <p:strVal val="#ppt_x"/>
-                                          </p:val>
-                                        </p:tav>
-                                      </p:tavLst>
-                                    </p:anim>
-                                    <p:anim calcmode="lin" valueType="num">
-                                      <p:cBhvr>
-                                        <p:cTn id="175" dur="750" decel="100000" fill="hold"/>
-                                        <p:tgtEl>
-                                          <p:spTgt spid="39"/>
-                                        </p:tgtEl>
-                                        <p:attrNameLst>
-                                          <p:attrName>ppt_y</p:attrName>
-                                        </p:attrNameLst>
-                                      </p:cBhvr>
-                                      <p:tavLst>
-                                        <p:tav tm="0">
-                                          <p:val>
-                                            <p:strVal val="#ppt_y+.08"/>
-                                          </p:val>
-                                        </p:tav>
-                                        <p:tav tm="100000">
-                                          <p:val>
-                                            <p:strVal val="#ppt_y"/>
-                                          </p:val>
-                                        </p:tav>
-                                      </p:tavLst>
-                                    </p:anim>
-                                  </p:childTnLst>
-                                </p:cTn>
-                              </p:par>
-                              <p:par>
-                                <p:cTn id="181" presetID="42" presetClass="entr" presetSubtype="0" grpId="0" fill="hold" nodeType="withEffect">
-                                  <p:stCondLst>
-                                    <p:cond delay="2100"/>
-                                  </p:stCondLst>
-                                  <p:childTnLst>
-                                    <p:set>
-                                      <p:cBhvr>
-                                        <p:cTn id="177" dur="1" fill="hold">
-                                          <p:stCondLst>
-                                            <p:cond delay="0"/>
-                                          </p:stCondLst>
-                                        </p:cTn>
-                                        <p:tgtEl>
-                                          <p:spTgt spid="40"/>
-                                        </p:tgtEl>
-                                        <p:attrNameLst>
-                                          <p:attrName>style.visibility</p:attrName>
-                                        </p:attrNameLst>
-                                      </p:cBhvr>
-                                      <p:to>
-                                        <p:strVal val="visible"/>
-                                      </p:to>
-                                    </p:set>
-                                    <p:animEffect transition="in" filter="fade">
-                                      <p:cBhvr>
-                                        <p:cTn id="178" dur="750"/>
-                                        <p:tgtEl>
-                                          <p:spTgt spid="40"/>
-                                        </p:tgtEl>
-                                      </p:cBhvr>
-                                    </p:animEffect>
-                                    <p:anim calcmode="lin" valueType="num">
-                                      <p:cBhvr>
-                                        <p:cTn id="179" dur="750" decel="100000" fill="hold"/>
-                                        <p:tgtEl>
-                                          <p:spTgt spid="40"/>
-                                        </p:tgtEl>
-                                        <p:attrNameLst>
-                                          <p:attrName>ppt_x</p:attrName>
-                                        </p:attrNameLst>
-                                      </p:cBhvr>
-                                      <p:tavLst>
-                                        <p:tav tm="0">
-                                          <p:val>
-                                            <p:strVal val="#ppt_x"/>
-                                          </p:val>
-                                        </p:tav>
-                                        <p:tav tm="100000">
-                                          <p:val>
-                                            <p:strVal val="#ppt_x"/>
-                                          </p:val>
-                                        </p:tav>
-                                      </p:tavLst>
-                                    </p:anim>
-                                    <p:anim calcmode="lin" valueType="num">
-                                      <p:cBhvr>
-                                        <p:cTn id="180" dur="750" decel="100000" fill="hold"/>
-                                        <p:tgtEl>
-                                          <p:spTgt spid="40"/>
-                                        </p:tgtEl>
-                                        <p:attrNameLst>
-                                          <p:attrName>ppt_y</p:attrName>
-                                        </p:attrNameLst>
-                                      </p:cBhvr>
-                                      <p:tavLst>
-                                        <p:tav tm="0">
-                                          <p:val>
-                                            <p:strVal val="#ppt_y+.08"/>
-                                          </p:val>
-                                        </p:tav>
-                                        <p:tav tm="100000">
-                                          <p:val>
-                                            <p:strVal val="#ppt_y"/>
-                                          </p:val>
-                                        </p:tav>
-                                      </p:tavLst>
-                                    </p:anim>
-                                  </p:childTnLst>
-                                </p:cTn>
-                              </p:par>
-                              <p:par>
-                                <p:cTn id="186" presetID="42" presetClass="entr" presetSubtype="0" grpId="0" fill="hold" nodeType="withEffect">
-                                  <p:stCondLst>
-                                    <p:cond delay="2100"/>
-                                  </p:stCondLst>
-                                  <p:childTnLst>
-                                    <p:set>
-                                      <p:cBhvr>
-                                        <p:cTn id="182" dur="1" fill="hold">
-                                          <p:stCondLst>
-                                            <p:cond delay="0"/>
-                                          </p:stCondLst>
-                                        </p:cTn>
-                                        <p:tgtEl>
-                                          <p:spTgt spid="41"/>
-                                        </p:tgtEl>
-                                        <p:attrNameLst>
-                                          <p:attrName>style.visibility</p:attrName>
-                                        </p:attrNameLst>
-                                      </p:cBhvr>
-                                      <p:to>
-                                        <p:strVal val="visible"/>
-                                      </p:to>
-                                    </p:set>
-                                    <p:animEffect transition="in" filter="fade">
-                                      <p:cBhvr>
-                                        <p:cTn id="183" dur="750"/>
-                                        <p:tgtEl>
-                                          <p:spTgt spid="41"/>
-                                        </p:tgtEl>
-                                      </p:cBhvr>
-                                    </p:animEffect>
-                                    <p:anim calcmode="lin" valueType="num">
-                                      <p:cBhvr>
-                                        <p:cTn id="184" dur="750" decel="100000" fill="hold"/>
-                                        <p:tgtEl>
-                                          <p:spTgt spid="41"/>
-                                        </p:tgtEl>
-                                        <p:attrNameLst>
-                                          <p:attrName>ppt_x</p:attrName>
-                                        </p:attrNameLst>
-                                      </p:cBhvr>
-                                      <p:tavLst>
-                                        <p:tav tm="0">
-                                          <p:val>
-                                            <p:strVal val="#ppt_x"/>
-                                          </p:val>
-                                        </p:tav>
-                                        <p:tav tm="100000">
-                                          <p:val>
-                                            <p:strVal val="#ppt_x"/>
-                                          </p:val>
-                                        </p:tav>
-                                      </p:tavLst>
-                                    </p:anim>
-                                    <p:anim calcmode="lin" valueType="num">
-                                      <p:cBhvr>
-                                        <p:cTn id="185" dur="750" decel="100000" fill="hold"/>
-                                        <p:tgtEl>
-                                          <p:spTgt spid="41"/>
-                                        </p:tgtEl>
-                                        <p:attrNameLst>
-                                          <p:attrName>ppt_y</p:attrName>
-                                        </p:attrNameLst>
-                                      </p:cBhvr>
-                                      <p:tavLst>
-                                        <p:tav tm="0">
-                                          <p:val>
-                                            <p:strVal val="#ppt_y+.08"/>
-                                          </p:val>
-                                        </p:tav>
-                                        <p:tav tm="100000">
-                                          <p:val>
-                                            <p:strVal val="#ppt_y"/>
-                                          </p:val>
-                                        </p:tav>
-                                      </p:tavLst>
-                                    </p:anim>
-                                  </p:childTnLst>
-                                </p:cTn>
-                              </p:par>
-                              <p:par>
-                                <p:cTn id="191" presetID="42" presetClass="entr" presetSubtype="0" grpId="0" fill="hold" nodeType="withEffect">
-                                  <p:stCondLst>
-                                    <p:cond delay="2100"/>
-                                  </p:stCondLst>
-                                  <p:childTnLst>
-                                    <p:set>
-                                      <p:cBhvr>
-                                        <p:cTn id="187" dur="1" fill="hold">
-                                          <p:stCondLst>
-                                            <p:cond delay="0"/>
-                                          </p:stCondLst>
-                                        </p:cTn>
-                                        <p:tgtEl>
-                                          <p:spTgt spid="42"/>
-                                        </p:tgtEl>
-                                        <p:attrNameLst>
-                                          <p:attrName>style.visibility</p:attrName>
-                                        </p:attrNameLst>
-                                      </p:cBhvr>
-                                      <p:to>
-                                        <p:strVal val="visible"/>
-                                      </p:to>
-                                    </p:set>
-                                    <p:animEffect transition="in" filter="fade">
-                                      <p:cBhvr>
-                                        <p:cTn id="188" dur="750"/>
-                                        <p:tgtEl>
-                                          <p:spTgt spid="42"/>
-                                        </p:tgtEl>
-                                      </p:cBhvr>
-                                    </p:animEffect>
-                                    <p:anim calcmode="lin" valueType="num">
-                                      <p:cBhvr>
-                                        <p:cTn id="189" dur="750" decel="100000" fill="hold"/>
-                                        <p:tgtEl>
-                                          <p:spTgt spid="42"/>
-                                        </p:tgtEl>
-                                        <p:attrNameLst>
-                                          <p:attrName>ppt_x</p:attrName>
-                                        </p:attrNameLst>
-                                      </p:cBhvr>
-                                      <p:tavLst>
-                                        <p:tav tm="0">
-                                          <p:val>
-                                            <p:strVal val="#ppt_x"/>
-                                          </p:val>
-                                        </p:tav>
-                                        <p:tav tm="100000">
-                                          <p:val>
-                                            <p:strVal val="#ppt_x"/>
-                                          </p:val>
-                                        </p:tav>
-                                      </p:tavLst>
-                                    </p:anim>
-                                    <p:anim calcmode="lin" valueType="num">
-                                      <p:cBhvr>
-                                        <p:cTn id="190" dur="750" decel="100000" fill="hold"/>
-                                        <p:tgtEl>
-                                          <p:spTgt spid="42"/>
-                                        </p:tgtEl>
-                                        <p:attrNameLst>
-                                          <p:attrName>ppt_y</p:attrName>
-                                        </p:attrNameLst>
-                                      </p:cBhvr>
-                                      <p:tavLst>
-                                        <p:tav tm="0">
-                                          <p:val>
-                                            <p:strVal val="#ppt_y+.08"/>
-                                          </p:val>
-                                        </p:tav>
-                                        <p:tav tm="100000">
-                                          <p:val>
-                                            <p:strVal val="#ppt_y"/>
-                                          </p:val>
-                                        </p:tav>
-                                      </p:tavLst>
-                                    </p:anim>
-                                  </p:childTnLst>
-                                </p:cTn>
-                              </p:par>
-                              <p:par>
-                                <p:cTn id="196" presetID="42" presetClass="entr" presetSubtype="0" grpId="0" fill="hold" nodeType="withEffect">
-                                  <p:stCondLst>
-                                    <p:cond delay="2100"/>
-                                  </p:stCondLst>
-                                  <p:childTnLst>
-                                    <p:set>
-                                      <p:cBhvr>
-                                        <p:cTn id="192" dur="1" fill="hold">
-                                          <p:stCondLst>
-                                            <p:cond delay="0"/>
-                                          </p:stCondLst>
-                                        </p:cTn>
-                                        <p:tgtEl>
-                                          <p:spTgt spid="43"/>
-                                        </p:tgtEl>
-                                        <p:attrNameLst>
-                                          <p:attrName>style.visibility</p:attrName>
-                                        </p:attrNameLst>
-                                      </p:cBhvr>
-                                      <p:to>
-                                        <p:strVal val="visible"/>
-                                      </p:to>
-                                    </p:set>
-                                    <p:animEffect transition="in" filter="fade">
-                                      <p:cBhvr>
-                                        <p:cTn id="193" dur="750"/>
-                                        <p:tgtEl>
-                                          <p:spTgt spid="43"/>
-                                        </p:tgtEl>
-                                      </p:cBhvr>
-                                    </p:animEffect>
-                                    <p:anim calcmode="lin" valueType="num">
-                                      <p:cBhvr>
-                                        <p:cTn id="194" dur="750" decel="100000" fill="hold"/>
-                                        <p:tgtEl>
-                                          <p:spTgt spid="43"/>
-                                        </p:tgtEl>
-                                        <p:attrNameLst>
-                                          <p:attrName>ppt_x</p:attrName>
-                                        </p:attrNameLst>
-                                      </p:cBhvr>
-                                      <p:tavLst>
-                                        <p:tav tm="0">
-                                          <p:val>
-                                            <p:strVal val="#ppt_x"/>
-                                          </p:val>
-                                        </p:tav>
-                                        <p:tav tm="100000">
-                                          <p:val>
-                                            <p:strVal val="#ppt_x"/>
-                                          </p:val>
-                                        </p:tav>
-                                      </p:tavLst>
-                                    </p:anim>
-                                    <p:anim calcmode="lin" valueType="num">
-                                      <p:cBhvr>
-                                        <p:cTn id="195" dur="750" decel="100000" fill="hold"/>
-                                        <p:tgtEl>
-                                          <p:spTgt spid="43"/>
-                                        </p:tgtEl>
-                                        <p:attrNameLst>
-                                          <p:attrName>ppt_y</p:attrName>
-                                        </p:attrNameLst>
-                                      </p:cBhvr>
-                                      <p:tavLst>
-                                        <p:tav tm="0">
-                                          <p:val>
-                                            <p:strVal val="#ppt_y+.08"/>
-                                          </p:val>
-                                        </p:tav>
-                                        <p:tav tm="100000">
-                                          <p:val>
-                                            <p:strVal val="#ppt_y"/>
-                                          </p:val>
-                                        </p:tav>
-                                      </p:tavLst>
-                                    </p:anim>
-                                  </p:childTnLst>
-                                </p:cTn>
-                              </p:par>
-                              <p:par>
-                                <p:cTn id="201" presetID="53" presetClass="entr" presetSubtype="16" grpId="0" fill="hold" nodeType="withEffect">
-                                  <p:stCondLst>
-                                    <p:cond delay="2700"/>
-                                  </p:stCondLst>
-                                  <p:childTnLst>
-                                    <p:set>
-                                      <p:cBhvr>
-                                        <p:cTn id="197" dur="1" fill="hold">
-                                          <p:stCondLst>
-                                            <p:cond delay="0"/>
-                                          </p:stCondLst>
-                                        </p:cTn>
-                                        <p:tgtEl>
-                                          <p:spTgt spid="17"/>
-                                        </p:tgtEl>
-                                        <p:attrNameLst>
-                                          <p:attrName>style.visibility</p:attrName>
-                                        </p:attrNameLst>
-                                      </p:cBhvr>
-                                      <p:to>
-                                        <p:strVal val="visible"/>
-                                      </p:to>
-                                    </p:set>
-                                    <p:anim calcmode="lin" valueType="num">
-                                      <p:cBhvr>
-                                        <p:cTn id="198" dur="500" decel="100000" fill="hold"/>
-                                        <p:tgtEl>
-                                          <p:spTgt spid="17"/>
-                                        </p:tgtEl>
-                                        <p:attrNameLst>
-                                          <p:attrName>ppt_w</p:attrName>
-                                        </p:attrNameLst>
-                                      </p:cBhvr>
-                                      <p:tavLst>
-                                        <p:tav tm="0">
-                                          <p:val>
-                                            <p:fltVal val="0"/>
-                                          </p:val>
-                                        </p:tav>
-                                        <p:tav tm="100000">
-                                          <p:val>
-                                            <p:strVal val="#ppt_w"/>
-                                          </p:val>
-                                        </p:tav>
-                                      </p:tavLst>
-                                    </p:anim>
-                                    <p:anim calcmode="lin" valueType="num">
-                                      <p:cBhvr>
-                                        <p:cTn id="199" dur="500" decel="100000" fill="hold"/>
-                                        <p:tgtEl>
-                                          <p:spTgt spid="17"/>
-                                        </p:tgtEl>
-                                        <p:attrNameLst>
-                                          <p:attrName>ppt_h</p:attrName>
-                                        </p:attrNameLst>
-                                      </p:cBhvr>
-                                      <p:tavLst>
-                                        <p:tav tm="0">
-                                          <p:val>
-                                            <p:fltVal val="0"/>
-                                          </p:val>
-                                        </p:tav>
-                                        <p:tav tm="100000">
-                                          <p:val>
-                                            <p:strVal val="#ppt_h"/>
-                                          </p:val>
-                                        </p:tav>
-                                      </p:tavLst>
-                                    </p:anim>
-                                    <p:animEffect transition="in" filter="fade">
-                                      <p:cBhvr>
-                                        <p:cTn id="200" dur="500"/>
-                                        <p:tgtEl>
-                                          <p:spTgt spid="17"/>
                                         </p:tgtEl>
                                       </p:cBhvr>
                                     </p:animEffect>
@@ -7878,97 +6060,16 @@
                                 </p:cTn>
                               </p:par>
                               <p:par>
-                                <p:cTn id="206" presetID="53" presetClass="entr" presetSubtype="16" grpId="0" fill="hold" nodeType="withEffect">
+                                <p:cTn id="109" presetID="6" presetClass="emph" presetSubtype="0" grpId="1" fill="hold" nodeType="withEffect">
                                   <p:stCondLst>
-                                    <p:cond delay="2700"/>
-                                  </p:stCondLst>
-                                  <p:childTnLst>
-                                    <p:set>
-                                      <p:cBhvr>
-                                        <p:cTn id="202" dur="1" fill="hold">
-                                          <p:stCondLst>
-                                            <p:cond delay="0"/>
-                                          </p:stCondLst>
-                                        </p:cTn>
-                                        <p:tgtEl>
-                                          <p:spTgt spid="18"/>
-                                        </p:tgtEl>
-                                        <p:attrNameLst>
-                                          <p:attrName>style.visibility</p:attrName>
-                                        </p:attrNameLst>
-                                      </p:cBhvr>
-                                      <p:to>
-                                        <p:strVal val="visible"/>
-                                      </p:to>
-                                    </p:set>
-                                    <p:anim calcmode="lin" valueType="num">
-                                      <p:cBhvr>
-                                        <p:cTn id="203" dur="500" decel="100000" fill="hold"/>
-                                        <p:tgtEl>
-                                          <p:spTgt spid="18"/>
-                                        </p:tgtEl>
-                                        <p:attrNameLst>
-                                          <p:attrName>ppt_w</p:attrName>
-                                        </p:attrNameLst>
-                                      </p:cBhvr>
-                                      <p:tavLst>
-                                        <p:tav tm="0">
-                                          <p:val>
-                                            <p:fltVal val="0"/>
-                                          </p:val>
-                                        </p:tav>
-                                        <p:tav tm="100000">
-                                          <p:val>
-                                            <p:strVal val="#ppt_w"/>
-                                          </p:val>
-                                        </p:tav>
-                                      </p:tavLst>
-                                    </p:anim>
-                                    <p:anim calcmode="lin" valueType="num">
-                                      <p:cBhvr>
-                                        <p:cTn id="204" dur="500" decel="100000" fill="hold"/>
-                                        <p:tgtEl>
-                                          <p:spTgt spid="18"/>
-                                        </p:tgtEl>
-                                        <p:attrNameLst>
-                                          <p:attrName>ppt_h</p:attrName>
-                                        </p:attrNameLst>
-                                      </p:cBhvr>
-                                      <p:tavLst>
-                                        <p:tav tm="0">
-                                          <p:val>
-                                            <p:fltVal val="0"/>
-                                          </p:val>
-                                        </p:tav>
-                                        <p:tav tm="100000">
-                                          <p:val>
-                                            <p:strVal val="#ppt_h"/>
-                                          </p:val>
-                                        </p:tav>
-                                      </p:tavLst>
-                                    </p:anim>
-                                    <p:animEffect transition="in" filter="fade">
-                                      <p:cBhvr>
-                                        <p:cTn id="205" dur="500"/>
-                                        <p:tgtEl>
-                                          <p:spTgt spid="18"/>
-                                        </p:tgtEl>
-                                      </p:cBhvr>
-                                    </p:animEffect>
-                                  </p:childTnLst>
-                                </p:cTn>
-                              </p:par>
-                              <p:par>
-                                <p:cTn id="208" presetID="6" presetClass="emph" presetSubtype="0" grpId="1" fill="hold" nodeType="withEffect">
-                                  <p:stCondLst>
-                                    <p:cond delay="3000"/>
+                                    <p:cond delay="3550"/>
                                   </p:stCondLst>
                                   <p:childTnLst>
                                     <p:animScale>
                                       <p:cBhvr>
-                                        <p:cTn id="207" dur="350" autoRev="1" fill="hold"/>
-                                        <p:tgtEl>
-                                          <p:spTgt spid="19"/>
+                                        <p:cTn id="108" dur="350" autoRev="1" fill="hold"/>
+                                        <p:tgtEl>
+                                          <p:spTgt spid="23"/>
                                         </p:tgtEl>
                                       </p:cBhvr>
                                       <p:by x="112000" y="112000"/>
@@ -7977,38 +6078,895 @@
                                 </p:cTn>
                               </p:par>
                               <p:par>
-                                <p:cTn id="210" presetID="6" presetClass="emph" presetSubtype="0" grpId="1" fill="hold" nodeType="withEffect">
+                                <p:cTn id="112" presetID="22" presetClass="entr" presetSubtype="8" grpId="0" fill="hold" nodeType="withEffect">
                                   <p:stCondLst>
-                                    <p:cond delay="3000"/>
+                                    <p:cond delay="3850"/>
                                   </p:stCondLst>
                                   <p:childTnLst>
-                                    <p:animScale>
-                                      <p:cBhvr>
-                                        <p:cTn id="209" dur="350" autoRev="1" fill="hold"/>
-                                        <p:tgtEl>
-                                          <p:spTgt spid="28"/>
-                                        </p:tgtEl>
-                                      </p:cBhvr>
-                                      <p:by x="112000" y="112000"/>
-                                    </p:animScale>
+                                    <p:set>
+                                      <p:cBhvr>
+                                        <p:cTn id="110" dur="1" fill="hold">
+                                          <p:stCondLst>
+                                            <p:cond delay="0"/>
+                                          </p:stCondLst>
+                                        </p:cTn>
+                                        <p:tgtEl>
+                                          <p:spTgt spid="25"/>
+                                        </p:tgtEl>
+                                        <p:attrNameLst>
+                                          <p:attrName>style.visibility</p:attrName>
+                                        </p:attrNameLst>
+                                      </p:cBhvr>
+                                      <p:to>
+                                        <p:strVal val="visible"/>
+                                      </p:to>
+                                    </p:set>
+                                    <p:animEffect transition="in" filter="wipe(left)">
+                                      <p:cBhvr>
+                                        <p:cTn id="111" dur="550"/>
+                                        <p:tgtEl>
+                                          <p:spTgt spid="25"/>
+                                        </p:tgtEl>
+                                      </p:cBhvr>
+                                    </p:animEffect>
                                   </p:childTnLst>
                                 </p:cTn>
                               </p:par>
                               <p:par>
-                                <p:cTn id="212" presetID="6" presetClass="emph" presetSubtype="0" grpId="1" fill="hold" nodeType="withEffect">
+                                <p:cTn id="115" presetID="22" presetClass="entr" presetSubtype="8" grpId="0" fill="hold" nodeType="withEffect">
                                   <p:stCondLst>
-                                    <p:cond delay="3000"/>
+                                    <p:cond delay="3850"/>
                                   </p:stCondLst>
                                   <p:childTnLst>
-                                    <p:animScale>
-                                      <p:cBhvr>
-                                        <p:cTn id="211" dur="350" autoRev="1" fill="hold"/>
+                                    <p:set>
+                                      <p:cBhvr>
+                                        <p:cTn id="113" dur="1" fill="hold">
+                                          <p:stCondLst>
+                                            <p:cond delay="0"/>
+                                          </p:stCondLst>
+                                        </p:cTn>
+                                        <p:tgtEl>
+                                          <p:spTgt spid="26"/>
+                                        </p:tgtEl>
+                                        <p:attrNameLst>
+                                          <p:attrName>style.visibility</p:attrName>
+                                        </p:attrNameLst>
+                                      </p:cBhvr>
+                                      <p:to>
+                                        <p:strVal val="visible"/>
+                                      </p:to>
+                                    </p:set>
+                                    <p:animEffect transition="in" filter="wipe(left)">
+                                      <p:cBhvr>
+                                        <p:cTn id="114" dur="550"/>
+                                        <p:tgtEl>
+                                          <p:spTgt spid="26"/>
+                                        </p:tgtEl>
+                                      </p:cBhvr>
+                                    </p:animEffect>
+                                  </p:childTnLst>
+                                </p:cTn>
+                              </p:par>
+                              <p:par>
+                                <p:cTn id="120" presetID="42" presetClass="entr" presetSubtype="0" grpId="0" fill="hold" nodeType="withEffect">
+                                  <p:stCondLst>
+                                    <p:cond delay="4250"/>
+                                  </p:stCondLst>
+                                  <p:childTnLst>
+                                    <p:set>
+                                      <p:cBhvr>
+                                        <p:cTn id="116" dur="1" fill="hold">
+                                          <p:stCondLst>
+                                            <p:cond delay="0"/>
+                                          </p:stCondLst>
+                                        </p:cTn>
+                                        <p:tgtEl>
+                                          <p:spTgt spid="27"/>
+                                        </p:tgtEl>
+                                        <p:attrNameLst>
+                                          <p:attrName>style.visibility</p:attrName>
+                                        </p:attrNameLst>
+                                      </p:cBhvr>
+                                      <p:to>
+                                        <p:strVal val="visible"/>
+                                      </p:to>
+                                    </p:set>
+                                    <p:animEffect transition="in" filter="fade">
+                                      <p:cBhvr>
+                                        <p:cTn id="117" dur="750"/>
+                                        <p:tgtEl>
+                                          <p:spTgt spid="27"/>
+                                        </p:tgtEl>
+                                      </p:cBhvr>
+                                    </p:animEffect>
+                                    <p:anim calcmode="lin" valueType="num">
+                                      <p:cBhvr>
+                                        <p:cTn id="118" dur="750" decel="100000" fill="hold"/>
+                                        <p:tgtEl>
+                                          <p:spTgt spid="27"/>
+                                        </p:tgtEl>
+                                        <p:attrNameLst>
+                                          <p:attrName>ppt_x</p:attrName>
+                                        </p:attrNameLst>
+                                      </p:cBhvr>
+                                      <p:tavLst>
+                                        <p:tav tm="0">
+                                          <p:val>
+                                            <p:strVal val="#ppt_x"/>
+                                          </p:val>
+                                        </p:tav>
+                                        <p:tav tm="100000">
+                                          <p:val>
+                                            <p:strVal val="#ppt_x"/>
+                                          </p:val>
+                                        </p:tav>
+                                      </p:tavLst>
+                                    </p:anim>
+                                    <p:anim calcmode="lin" valueType="num">
+                                      <p:cBhvr>
+                                        <p:cTn id="119" dur="750" decel="100000" fill="hold"/>
+                                        <p:tgtEl>
+                                          <p:spTgt spid="27"/>
+                                        </p:tgtEl>
+                                        <p:attrNameLst>
+                                          <p:attrName>ppt_y</p:attrName>
+                                        </p:attrNameLst>
+                                      </p:cBhvr>
+                                      <p:tavLst>
+                                        <p:tav tm="0">
+                                          <p:val>
+                                            <p:strVal val="#ppt_y+.08"/>
+                                          </p:val>
+                                        </p:tav>
+                                        <p:tav tm="100000">
+                                          <p:val>
+                                            <p:strVal val="#ppt_y"/>
+                                          </p:val>
+                                        </p:tav>
+                                      </p:tavLst>
+                                    </p:anim>
+                                  </p:childTnLst>
+                                </p:cTn>
+                              </p:par>
+                              <p:par>
+                                <p:cTn id="125" presetID="42" presetClass="entr" presetSubtype="0" grpId="0" fill="hold" nodeType="withEffect">
+                                  <p:stCondLst>
+                                    <p:cond delay="4250"/>
+                                  </p:stCondLst>
+                                  <p:childTnLst>
+                                    <p:set>
+                                      <p:cBhvr>
+                                        <p:cTn id="121" dur="1" fill="hold">
+                                          <p:stCondLst>
+                                            <p:cond delay="0"/>
+                                          </p:stCondLst>
+                                        </p:cTn>
+                                        <p:tgtEl>
+                                          <p:spTgt spid="28"/>
+                                        </p:tgtEl>
+                                        <p:attrNameLst>
+                                          <p:attrName>style.visibility</p:attrName>
+                                        </p:attrNameLst>
+                                      </p:cBhvr>
+                                      <p:to>
+                                        <p:strVal val="visible"/>
+                                      </p:to>
+                                    </p:set>
+                                    <p:animEffect transition="in" filter="fade">
+                                      <p:cBhvr>
+                                        <p:cTn id="122" dur="750"/>
+                                        <p:tgtEl>
+                                          <p:spTgt spid="28"/>
+                                        </p:tgtEl>
+                                      </p:cBhvr>
+                                    </p:animEffect>
+                                    <p:anim calcmode="lin" valueType="num">
+                                      <p:cBhvr>
+                                        <p:cTn id="123" dur="750" decel="100000" fill="hold"/>
+                                        <p:tgtEl>
+                                          <p:spTgt spid="28"/>
+                                        </p:tgtEl>
+                                        <p:attrNameLst>
+                                          <p:attrName>ppt_x</p:attrName>
+                                        </p:attrNameLst>
+                                      </p:cBhvr>
+                                      <p:tavLst>
+                                        <p:tav tm="0">
+                                          <p:val>
+                                            <p:strVal val="#ppt_x"/>
+                                          </p:val>
+                                        </p:tav>
+                                        <p:tav tm="100000">
+                                          <p:val>
+                                            <p:strVal val="#ppt_x"/>
+                                          </p:val>
+                                        </p:tav>
+                                      </p:tavLst>
+                                    </p:anim>
+                                    <p:anim calcmode="lin" valueType="num">
+                                      <p:cBhvr>
+                                        <p:cTn id="124" dur="750" decel="100000" fill="hold"/>
+                                        <p:tgtEl>
+                                          <p:spTgt spid="28"/>
+                                        </p:tgtEl>
+                                        <p:attrNameLst>
+                                          <p:attrName>ppt_y</p:attrName>
+                                        </p:attrNameLst>
+                                      </p:cBhvr>
+                                      <p:tavLst>
+                                        <p:tav tm="0">
+                                          <p:val>
+                                            <p:strVal val="#ppt_y+.08"/>
+                                          </p:val>
+                                        </p:tav>
+                                        <p:tav tm="100000">
+                                          <p:val>
+                                            <p:strVal val="#ppt_y"/>
+                                          </p:val>
+                                        </p:tav>
+                                      </p:tavLst>
+                                    </p:anim>
+                                  </p:childTnLst>
+                                </p:cTn>
+                              </p:par>
+                              <p:par>
+                                <p:cTn id="130" presetID="42" presetClass="entr" presetSubtype="0" grpId="0" fill="hold" nodeType="withEffect">
+                                  <p:stCondLst>
+                                    <p:cond delay="4450"/>
+                                  </p:stCondLst>
+                                  <p:childTnLst>
+                                    <p:set>
+                                      <p:cBhvr>
+                                        <p:cTn id="126" dur="1" fill="hold">
+                                          <p:stCondLst>
+                                            <p:cond delay="0"/>
+                                          </p:stCondLst>
+                                        </p:cTn>
+                                        <p:tgtEl>
+                                          <p:spTgt spid="29"/>
+                                        </p:tgtEl>
+                                        <p:attrNameLst>
+                                          <p:attrName>style.visibility</p:attrName>
+                                        </p:attrNameLst>
+                                      </p:cBhvr>
+                                      <p:to>
+                                        <p:strVal val="visible"/>
+                                      </p:to>
+                                    </p:set>
+                                    <p:animEffect transition="in" filter="fade">
+                                      <p:cBhvr>
+                                        <p:cTn id="127" dur="750"/>
+                                        <p:tgtEl>
+                                          <p:spTgt spid="29"/>
+                                        </p:tgtEl>
+                                      </p:cBhvr>
+                                    </p:animEffect>
+                                    <p:anim calcmode="lin" valueType="num">
+                                      <p:cBhvr>
+                                        <p:cTn id="128" dur="750" decel="100000" fill="hold"/>
+                                        <p:tgtEl>
+                                          <p:spTgt spid="29"/>
+                                        </p:tgtEl>
+                                        <p:attrNameLst>
+                                          <p:attrName>ppt_x</p:attrName>
+                                        </p:attrNameLst>
+                                      </p:cBhvr>
+                                      <p:tavLst>
+                                        <p:tav tm="0">
+                                          <p:val>
+                                            <p:strVal val="#ppt_x"/>
+                                          </p:val>
+                                        </p:tav>
+                                        <p:tav tm="100000">
+                                          <p:val>
+                                            <p:strVal val="#ppt_x"/>
+                                          </p:val>
+                                        </p:tav>
+                                      </p:tavLst>
+                                    </p:anim>
+                                    <p:anim calcmode="lin" valueType="num">
+                                      <p:cBhvr>
+                                        <p:cTn id="129" dur="750" decel="100000" fill="hold"/>
+                                        <p:tgtEl>
+                                          <p:spTgt spid="29"/>
+                                        </p:tgtEl>
+                                        <p:attrNameLst>
+                                          <p:attrName>ppt_y</p:attrName>
+                                        </p:attrNameLst>
+                                      </p:cBhvr>
+                                      <p:tavLst>
+                                        <p:tav tm="0">
+                                          <p:val>
+                                            <p:strVal val="#ppt_y+.08"/>
+                                          </p:val>
+                                        </p:tav>
+                                        <p:tav tm="100000">
+                                          <p:val>
+                                            <p:strVal val="#ppt_y"/>
+                                          </p:val>
+                                        </p:tav>
+                                      </p:tavLst>
+                                    </p:anim>
+                                  </p:childTnLst>
+                                </p:cTn>
+                              </p:par>
+                              <p:par>
+                                <p:cTn id="135" presetID="42" presetClass="entr" presetSubtype="0" grpId="0" fill="hold" nodeType="withEffect">
+                                  <p:stCondLst>
+                                    <p:cond delay="4450"/>
+                                  </p:stCondLst>
+                                  <p:childTnLst>
+                                    <p:set>
+                                      <p:cBhvr>
+                                        <p:cTn id="131" dur="1" fill="hold">
+                                          <p:stCondLst>
+                                            <p:cond delay="0"/>
+                                          </p:stCondLst>
+                                        </p:cTn>
+                                        <p:tgtEl>
+                                          <p:spTgt spid="30"/>
+                                        </p:tgtEl>
+                                        <p:attrNameLst>
+                                          <p:attrName>style.visibility</p:attrName>
+                                        </p:attrNameLst>
+                                      </p:cBhvr>
+                                      <p:to>
+                                        <p:strVal val="visible"/>
+                                      </p:to>
+                                    </p:set>
+                                    <p:animEffect transition="in" filter="fade">
+                                      <p:cBhvr>
+                                        <p:cTn id="132" dur="750"/>
+                                        <p:tgtEl>
+                                          <p:spTgt spid="30"/>
+                                        </p:tgtEl>
+                                      </p:cBhvr>
+                                    </p:animEffect>
+                                    <p:anim calcmode="lin" valueType="num">
+                                      <p:cBhvr>
+                                        <p:cTn id="133" dur="750" decel="100000" fill="hold"/>
+                                        <p:tgtEl>
+                                          <p:spTgt spid="30"/>
+                                        </p:tgtEl>
+                                        <p:attrNameLst>
+                                          <p:attrName>ppt_x</p:attrName>
+                                        </p:attrNameLst>
+                                      </p:cBhvr>
+                                      <p:tavLst>
+                                        <p:tav tm="0">
+                                          <p:val>
+                                            <p:strVal val="#ppt_x"/>
+                                          </p:val>
+                                        </p:tav>
+                                        <p:tav tm="100000">
+                                          <p:val>
+                                            <p:strVal val="#ppt_x"/>
+                                          </p:val>
+                                        </p:tav>
+                                      </p:tavLst>
+                                    </p:anim>
+                                    <p:anim calcmode="lin" valueType="num">
+                                      <p:cBhvr>
+                                        <p:cTn id="134" dur="750" decel="100000" fill="hold"/>
+                                        <p:tgtEl>
+                                          <p:spTgt spid="30"/>
+                                        </p:tgtEl>
+                                        <p:attrNameLst>
+                                          <p:attrName>ppt_y</p:attrName>
+                                        </p:attrNameLst>
+                                      </p:cBhvr>
+                                      <p:tavLst>
+                                        <p:tav tm="0">
+                                          <p:val>
+                                            <p:strVal val="#ppt_y+.08"/>
+                                          </p:val>
+                                        </p:tav>
+                                        <p:tav tm="100000">
+                                          <p:val>
+                                            <p:strVal val="#ppt_y"/>
+                                          </p:val>
+                                        </p:tav>
+                                      </p:tavLst>
+                                    </p:anim>
+                                  </p:childTnLst>
+                                </p:cTn>
+                              </p:par>
+                              <p:par>
+                                <p:cTn id="140" presetID="42" presetClass="entr" presetSubtype="0" grpId="0" fill="hold" nodeType="withEffect">
+                                  <p:stCondLst>
+                                    <p:cond delay="4600"/>
+                                  </p:stCondLst>
+                                  <p:childTnLst>
+                                    <p:set>
+                                      <p:cBhvr>
+                                        <p:cTn id="136" dur="1" fill="hold">
+                                          <p:stCondLst>
+                                            <p:cond delay="0"/>
+                                          </p:stCondLst>
+                                        </p:cTn>
+                                        <p:tgtEl>
+                                          <p:spTgt spid="31"/>
+                                        </p:tgtEl>
+                                        <p:attrNameLst>
+                                          <p:attrName>style.visibility</p:attrName>
+                                        </p:attrNameLst>
+                                      </p:cBhvr>
+                                      <p:to>
+                                        <p:strVal val="visible"/>
+                                      </p:to>
+                                    </p:set>
+                                    <p:animEffect transition="in" filter="fade">
+                                      <p:cBhvr>
+                                        <p:cTn id="137" dur="750"/>
+                                        <p:tgtEl>
+                                          <p:spTgt spid="31"/>
+                                        </p:tgtEl>
+                                      </p:cBhvr>
+                                    </p:animEffect>
+                                    <p:anim calcmode="lin" valueType="num">
+                                      <p:cBhvr>
+                                        <p:cTn id="138" dur="750" decel="100000" fill="hold"/>
+                                        <p:tgtEl>
+                                          <p:spTgt spid="31"/>
+                                        </p:tgtEl>
+                                        <p:attrNameLst>
+                                          <p:attrName>ppt_x</p:attrName>
+                                        </p:attrNameLst>
+                                      </p:cBhvr>
+                                      <p:tavLst>
+                                        <p:tav tm="0">
+                                          <p:val>
+                                            <p:strVal val="#ppt_x"/>
+                                          </p:val>
+                                        </p:tav>
+                                        <p:tav tm="100000">
+                                          <p:val>
+                                            <p:strVal val="#ppt_x"/>
+                                          </p:val>
+                                        </p:tav>
+                                      </p:tavLst>
+                                    </p:anim>
+                                    <p:anim calcmode="lin" valueType="num">
+                                      <p:cBhvr>
+                                        <p:cTn id="139" dur="750" decel="100000" fill="hold"/>
+                                        <p:tgtEl>
+                                          <p:spTgt spid="31"/>
+                                        </p:tgtEl>
+                                        <p:attrNameLst>
+                                          <p:attrName>ppt_y</p:attrName>
+                                        </p:attrNameLst>
+                                      </p:cBhvr>
+                                      <p:tavLst>
+                                        <p:tav tm="0">
+                                          <p:val>
+                                            <p:strVal val="#ppt_y+.08"/>
+                                          </p:val>
+                                        </p:tav>
+                                        <p:tav tm="100000">
+                                          <p:val>
+                                            <p:strVal val="#ppt_y"/>
+                                          </p:val>
+                                        </p:tav>
+                                      </p:tavLst>
+                                    </p:anim>
+                                  </p:childTnLst>
+                                </p:cTn>
+                              </p:par>
+                              <p:par>
+                                <p:cTn id="145" presetID="42" presetClass="entr" presetSubtype="0" grpId="0" fill="hold" nodeType="withEffect">
+                                  <p:stCondLst>
+                                    <p:cond delay="4600"/>
+                                  </p:stCondLst>
+                                  <p:childTnLst>
+                                    <p:set>
+                                      <p:cBhvr>
+                                        <p:cTn id="141" dur="1" fill="hold">
+                                          <p:stCondLst>
+                                            <p:cond delay="0"/>
+                                          </p:stCondLst>
+                                        </p:cTn>
+                                        <p:tgtEl>
+                                          <p:spTgt spid="32"/>
+                                        </p:tgtEl>
+                                        <p:attrNameLst>
+                                          <p:attrName>style.visibility</p:attrName>
+                                        </p:attrNameLst>
+                                      </p:cBhvr>
+                                      <p:to>
+                                        <p:strVal val="visible"/>
+                                      </p:to>
+                                    </p:set>
+                                    <p:animEffect transition="in" filter="fade">
+                                      <p:cBhvr>
+                                        <p:cTn id="142" dur="750"/>
+                                        <p:tgtEl>
+                                          <p:spTgt spid="32"/>
+                                        </p:tgtEl>
+                                      </p:cBhvr>
+                                    </p:animEffect>
+                                    <p:anim calcmode="lin" valueType="num">
+                                      <p:cBhvr>
+                                        <p:cTn id="143" dur="750" decel="100000" fill="hold"/>
+                                        <p:tgtEl>
+                                          <p:spTgt spid="32"/>
+                                        </p:tgtEl>
+                                        <p:attrNameLst>
+                                          <p:attrName>ppt_x</p:attrName>
+                                        </p:attrNameLst>
+                                      </p:cBhvr>
+                                      <p:tavLst>
+                                        <p:tav tm="0">
+                                          <p:val>
+                                            <p:strVal val="#ppt_x"/>
+                                          </p:val>
+                                        </p:tav>
+                                        <p:tav tm="100000">
+                                          <p:val>
+                                            <p:strVal val="#ppt_x"/>
+                                          </p:val>
+                                        </p:tav>
+                                      </p:tavLst>
+                                    </p:anim>
+                                    <p:anim calcmode="lin" valueType="num">
+                                      <p:cBhvr>
+                                        <p:cTn id="144" dur="750" decel="100000" fill="hold"/>
+                                        <p:tgtEl>
+                                          <p:spTgt spid="32"/>
+                                        </p:tgtEl>
+                                        <p:attrNameLst>
+                                          <p:attrName>ppt_y</p:attrName>
+                                        </p:attrNameLst>
+                                      </p:cBhvr>
+                                      <p:tavLst>
+                                        <p:tav tm="0">
+                                          <p:val>
+                                            <p:strVal val="#ppt_y+.08"/>
+                                          </p:val>
+                                        </p:tav>
+                                        <p:tav tm="100000">
+                                          <p:val>
+                                            <p:strVal val="#ppt_y"/>
+                                          </p:val>
+                                        </p:tav>
+                                      </p:tavLst>
+                                    </p:anim>
+                                  </p:childTnLst>
+                                </p:cTn>
+                              </p:par>
+                              <p:par>
+                                <p:cTn id="150" presetID="42" presetClass="entr" presetSubtype="0" grpId="0" fill="hold" nodeType="withEffect">
+                                  <p:stCondLst>
+                                    <p:cond delay="4750"/>
+                                  </p:stCondLst>
+                                  <p:childTnLst>
+                                    <p:set>
+                                      <p:cBhvr>
+                                        <p:cTn id="146" dur="1" fill="hold">
+                                          <p:stCondLst>
+                                            <p:cond delay="0"/>
+                                          </p:stCondLst>
+                                        </p:cTn>
+                                        <p:tgtEl>
+                                          <p:spTgt spid="33"/>
+                                        </p:tgtEl>
+                                        <p:attrNameLst>
+                                          <p:attrName>style.visibility</p:attrName>
+                                        </p:attrNameLst>
+                                      </p:cBhvr>
+                                      <p:to>
+                                        <p:strVal val="visible"/>
+                                      </p:to>
+                                    </p:set>
+                                    <p:animEffect transition="in" filter="fade">
+                                      <p:cBhvr>
+                                        <p:cTn id="147" dur="750"/>
+                                        <p:tgtEl>
+                                          <p:spTgt spid="33"/>
+                                        </p:tgtEl>
+                                      </p:cBhvr>
+                                    </p:animEffect>
+                                    <p:anim calcmode="lin" valueType="num">
+                                      <p:cBhvr>
+                                        <p:cTn id="148" dur="750" decel="100000" fill="hold"/>
+                                        <p:tgtEl>
+                                          <p:spTgt spid="33"/>
+                                        </p:tgtEl>
+                                        <p:attrNameLst>
+                                          <p:attrName>ppt_x</p:attrName>
+                                        </p:attrNameLst>
+                                      </p:cBhvr>
+                                      <p:tavLst>
+                                        <p:tav tm="0">
+                                          <p:val>
+                                            <p:strVal val="#ppt_x"/>
+                                          </p:val>
+                                        </p:tav>
+                                        <p:tav tm="100000">
+                                          <p:val>
+                                            <p:strVal val="#ppt_x"/>
+                                          </p:val>
+                                        </p:tav>
+                                      </p:tavLst>
+                                    </p:anim>
+                                    <p:anim calcmode="lin" valueType="num">
+                                      <p:cBhvr>
+                                        <p:cTn id="149" dur="750" decel="100000" fill="hold"/>
+                                        <p:tgtEl>
+                                          <p:spTgt spid="33"/>
+                                        </p:tgtEl>
+                                        <p:attrNameLst>
+                                          <p:attrName>ppt_y</p:attrName>
+                                        </p:attrNameLst>
+                                      </p:cBhvr>
+                                      <p:tavLst>
+                                        <p:tav tm="0">
+                                          <p:val>
+                                            <p:strVal val="#ppt_y+.08"/>
+                                          </p:val>
+                                        </p:tav>
+                                        <p:tav tm="100000">
+                                          <p:val>
+                                            <p:strVal val="#ppt_y"/>
+                                          </p:val>
+                                        </p:tav>
+                                      </p:tavLst>
+                                    </p:anim>
+                                  </p:childTnLst>
+                                </p:cTn>
+                              </p:par>
+                              <p:par>
+                                <p:cTn id="155" presetID="42" presetClass="entr" presetSubtype="0" grpId="0" fill="hold" nodeType="withEffect">
+                                  <p:stCondLst>
+                                    <p:cond delay="4750"/>
+                                  </p:stCondLst>
+                                  <p:childTnLst>
+                                    <p:set>
+                                      <p:cBhvr>
+                                        <p:cTn id="151" dur="1" fill="hold">
+                                          <p:stCondLst>
+                                            <p:cond delay="0"/>
+                                          </p:stCondLst>
+                                        </p:cTn>
+                                        <p:tgtEl>
+                                          <p:spTgt spid="34"/>
+                                        </p:tgtEl>
+                                        <p:attrNameLst>
+                                          <p:attrName>style.visibility</p:attrName>
+                                        </p:attrNameLst>
+                                      </p:cBhvr>
+                                      <p:to>
+                                        <p:strVal val="visible"/>
+                                      </p:to>
+                                    </p:set>
+                                    <p:animEffect transition="in" filter="fade">
+                                      <p:cBhvr>
+                                        <p:cTn id="152" dur="750"/>
+                                        <p:tgtEl>
+                                          <p:spTgt spid="34"/>
+                                        </p:tgtEl>
+                                      </p:cBhvr>
+                                    </p:animEffect>
+                                    <p:anim calcmode="lin" valueType="num">
+                                      <p:cBhvr>
+                                        <p:cTn id="153" dur="750" decel="100000" fill="hold"/>
+                                        <p:tgtEl>
+                                          <p:spTgt spid="34"/>
+                                        </p:tgtEl>
+                                        <p:attrNameLst>
+                                          <p:attrName>ppt_x</p:attrName>
+                                        </p:attrNameLst>
+                                      </p:cBhvr>
+                                      <p:tavLst>
+                                        <p:tav tm="0">
+                                          <p:val>
+                                            <p:strVal val="#ppt_x"/>
+                                          </p:val>
+                                        </p:tav>
+                                        <p:tav tm="100000">
+                                          <p:val>
+                                            <p:strVal val="#ppt_x"/>
+                                          </p:val>
+                                        </p:tav>
+                                      </p:tavLst>
+                                    </p:anim>
+                                    <p:anim calcmode="lin" valueType="num">
+                                      <p:cBhvr>
+                                        <p:cTn id="154" dur="750" decel="100000" fill="hold"/>
+                                        <p:tgtEl>
+                                          <p:spTgt spid="34"/>
+                                        </p:tgtEl>
+                                        <p:attrNameLst>
+                                          <p:attrName>ppt_y</p:attrName>
+                                        </p:attrNameLst>
+                                      </p:cBhvr>
+                                      <p:tavLst>
+                                        <p:tav tm="0">
+                                          <p:val>
+                                            <p:strVal val="#ppt_y+.08"/>
+                                          </p:val>
+                                        </p:tav>
+                                        <p:tav tm="100000">
+                                          <p:val>
+                                            <p:strVal val="#ppt_y"/>
+                                          </p:val>
+                                        </p:tav>
+                                      </p:tavLst>
+                                    </p:anim>
+                                  </p:childTnLst>
+                                </p:cTn>
+                              </p:par>
+                              <p:par>
+                                <p:cTn id="158" presetID="10" presetClass="entr" presetSubtype="0" grpId="0" fill="hold" nodeType="withEffect">
+                                  <p:stCondLst>
+                                    <p:cond delay="5000"/>
+                                  </p:stCondLst>
+                                  <p:childTnLst>
+                                    <p:set>
+                                      <p:cBhvr>
+                                        <p:cTn id="156" dur="1" fill="hold">
+                                          <p:stCondLst>
+                                            <p:cond delay="0"/>
+                                          </p:stCondLst>
+                                        </p:cTn>
+                                        <p:tgtEl>
+                                          <p:spTgt spid="35"/>
+                                        </p:tgtEl>
+                                        <p:attrNameLst>
+                                          <p:attrName>style.visibility</p:attrName>
+                                        </p:attrNameLst>
+                                      </p:cBhvr>
+                                      <p:to>
+                                        <p:strVal val="visible"/>
+                                      </p:to>
+                                    </p:set>
+                                    <p:animEffect transition="in" filter="fade">
+                                      <p:cBhvr>
+                                        <p:cTn id="157" dur="600"/>
+                                        <p:tgtEl>
+                                          <p:spTgt spid="35"/>
+                                        </p:tgtEl>
+                                      </p:cBhvr>
+                                    </p:animEffect>
+                                  </p:childTnLst>
+                                </p:cTn>
+                              </p:par>
+                              <p:par>
+                                <p:cTn id="161" presetID="10" presetClass="entr" presetSubtype="0" grpId="0" fill="hold" nodeType="withEffect">
+                                  <p:stCondLst>
+                                    <p:cond delay="5000"/>
+                                  </p:stCondLst>
+                                  <p:childTnLst>
+                                    <p:set>
+                                      <p:cBhvr>
+                                        <p:cTn id="159" dur="1" fill="hold">
+                                          <p:stCondLst>
+                                            <p:cond delay="0"/>
+                                          </p:stCondLst>
+                                        </p:cTn>
+                                        <p:tgtEl>
+                                          <p:spTgt spid="36"/>
+                                        </p:tgtEl>
+                                        <p:attrNameLst>
+                                          <p:attrName>style.visibility</p:attrName>
+                                        </p:attrNameLst>
+                                      </p:cBhvr>
+                                      <p:to>
+                                        <p:strVal val="visible"/>
+                                      </p:to>
+                                    </p:set>
+                                    <p:animEffect transition="in" filter="fade">
+                                      <p:cBhvr>
+                                        <p:cTn id="160" dur="600"/>
+                                        <p:tgtEl>
+                                          <p:spTgt spid="36"/>
+                                        </p:tgtEl>
+                                      </p:cBhvr>
+                                    </p:animEffect>
+                                  </p:childTnLst>
+                                </p:cTn>
+                              </p:par>
+                              <p:par>
+                                <p:cTn id="164" presetID="10" presetClass="entr" presetSubtype="0" grpId="0" fill="hold" nodeType="withEffect">
+                                  <p:stCondLst>
+                                    <p:cond delay="5000"/>
+                                  </p:stCondLst>
+                                  <p:childTnLst>
+                                    <p:set>
+                                      <p:cBhvr>
+                                        <p:cTn id="162" dur="1" fill="hold">
+                                          <p:stCondLst>
+                                            <p:cond delay="0"/>
+                                          </p:stCondLst>
+                                        </p:cTn>
                                         <p:tgtEl>
                                           <p:spTgt spid="37"/>
                                         </p:tgtEl>
-                                      </p:cBhvr>
-                                      <p:by x="112000" y="112000"/>
-                                    </p:animScale>
+                                        <p:attrNameLst>
+                                          <p:attrName>style.visibility</p:attrName>
+                                        </p:attrNameLst>
+                                      </p:cBhvr>
+                                      <p:to>
+                                        <p:strVal val="visible"/>
+                                      </p:to>
+                                    </p:set>
+                                    <p:animEffect transition="in" filter="fade">
+                                      <p:cBhvr>
+                                        <p:cTn id="163" dur="600"/>
+                                        <p:tgtEl>
+                                          <p:spTgt spid="37"/>
+                                        </p:tgtEl>
+                                      </p:cBhvr>
+                                    </p:animEffect>
+                                  </p:childTnLst>
+                                </p:cTn>
+                              </p:par>
+                              <p:par>
+                                <p:cTn id="167" presetID="10" presetClass="entr" presetSubtype="0" grpId="0" fill="hold" nodeType="withEffect">
+                                  <p:stCondLst>
+                                    <p:cond delay="5000"/>
+                                  </p:stCondLst>
+                                  <p:childTnLst>
+                                    <p:set>
+                                      <p:cBhvr>
+                                        <p:cTn id="165" dur="1" fill="hold">
+                                          <p:stCondLst>
+                                            <p:cond delay="0"/>
+                                          </p:stCondLst>
+                                        </p:cTn>
+                                        <p:tgtEl>
+                                          <p:spTgt spid="38"/>
+                                        </p:tgtEl>
+                                        <p:attrNameLst>
+                                          <p:attrName>style.visibility</p:attrName>
+                                        </p:attrNameLst>
+                                      </p:cBhvr>
+                                      <p:to>
+                                        <p:strVal val="visible"/>
+                                      </p:to>
+                                    </p:set>
+                                    <p:animEffect transition="in" filter="fade">
+                                      <p:cBhvr>
+                                        <p:cTn id="166" dur="600"/>
+                                        <p:tgtEl>
+                                          <p:spTgt spid="38"/>
+                                        </p:tgtEl>
+                                      </p:cBhvr>
+                                    </p:animEffect>
+                                  </p:childTnLst>
+                                </p:cTn>
+                              </p:par>
+                              <p:par>
+                                <p:cTn id="170" presetID="10" presetClass="entr" presetSubtype="0" grpId="0" fill="hold" nodeType="withEffect">
+                                  <p:stCondLst>
+                                    <p:cond delay="5000"/>
+                                  </p:stCondLst>
+                                  <p:childTnLst>
+                                    <p:set>
+                                      <p:cBhvr>
+                                        <p:cTn id="168" dur="1" fill="hold">
+                                          <p:stCondLst>
+                                            <p:cond delay="0"/>
+                                          </p:stCondLst>
+                                        </p:cTn>
+                                        <p:tgtEl>
+                                          <p:spTgt spid="39"/>
+                                        </p:tgtEl>
+                                        <p:attrNameLst>
+                                          <p:attrName>style.visibility</p:attrName>
+                                        </p:attrNameLst>
+                                      </p:cBhvr>
+                                      <p:to>
+                                        <p:strVal val="visible"/>
+                                      </p:to>
+                                    </p:set>
+                                    <p:animEffect transition="in" filter="fade">
+                                      <p:cBhvr>
+                                        <p:cTn id="169" dur="600"/>
+                                        <p:tgtEl>
+                                          <p:spTgt spid="39"/>
+                                        </p:tgtEl>
+                                      </p:cBhvr>
+                                    </p:animEffect>
                                   </p:childTnLst>
                                 </p:cTn>
                               </p:par>
@@ -8078,13 +7036,7 @@
       <p:bldP spid="37" grpId="0" animBg="1"/>
       <p:bldP spid="38" grpId="0" animBg="1"/>
       <p:bldP spid="39" grpId="0" animBg="1"/>
-      <p:bldP spid="40" grpId="0" animBg="1"/>
-      <p:bldP spid="41" grpId="0" animBg="1"/>
-      <p:bldP spid="42" grpId="0" animBg="1"/>
-      <p:bldP spid="43" grpId="0" animBg="1"/>
-      <p:bldP spid="19" grpId="1" animBg="1"/>
-      <p:bldP spid="28" grpId="1" animBg="1"/>
-      <p:bldP spid="37" grpId="1" animBg="1"/>
+      <p:bldP spid="23" grpId="1" animBg="1"/>
     </p:bldLst>
   </p:timing>
 </p:sld>
@@ -8468,7 +7420,7 @@
                   <a:srgbClr val="FFFFFF"/>
                 </a:solidFill>
               </a:rPr>
-              <a:t>tNPS −37.5 on 16 surveys, and improving over the last period</a:t>
+              <a:t>tNPS 33.3 last week, up from −66.7 the week before</a:t>
             </a:r>
             <a:endParaRPr lang="en-US" sz="1150" dirty="0"/>
           </a:p>
@@ -13228,7 +12180,7 @@
                 <a:ea typeface="Calibri" pitchFamily="34" charset="-122"/>
                 <a:cs typeface="Calibri" pitchFamily="34" charset="-120"/>
               </a:rPr>
-              <a:t>These three at zero would take team tNPS from 11.0 to 17.4</a:t>
+              <a:t>Keep Ammar at the 33 target every week</a:t>
             </a:r>
             <a:endParaRPr lang="en-US" sz="3200" dirty="0"/>
           </a:p>
@@ -13295,10 +12247,10 @@
             <a:r>
               <a:rPr lang="en-US" sz="3600" b="1" dirty="0">
                 <a:solidFill>
-                  <a:srgbClr val="B42318"/>
+                  <a:srgbClr val="1E7F5C"/>
                 </a:solidFill>
               </a:rPr>
-              <a:t>3 agents</a:t>
+              <a:t>4 promoters</a:t>
             </a:r>
             <a:endParaRPr lang="en-US" sz="3600" dirty="0"/>
           </a:p>
@@ -13337,7 +12289,7 @@
                   <a:srgbClr val="3D4453"/>
                 </a:solidFill>
               </a:rPr>
-              <a:t>negative on tNPS, on 44 of the team’s 172 surveys</a:t>
+              <a:t>and 2 detractors last week, up from 1 and 5 the week before</a:t>
             </a:r>
             <a:endParaRPr lang="en-US" sz="1250" dirty="0"/>
           </a:p>
@@ -13407,7 +12359,7 @@
                   <a:srgbClr val="1E7F5C"/>
                 </a:solidFill>
               </a:rPr>
-              <a:t>11.0 → 17.4</a:t>
+              <a:t>−66.7 → 33.3</a:t>
             </a:r>
             <a:endParaRPr lang="en-US" sz="3600" dirty="0"/>
           </a:p>
@@ -13446,7 +12398,7 @@
                   <a:srgbClr val="3D4453"/>
                 </a:solidFill>
               </a:rPr>
-              <a:t>team tNPS if the three reach zero, with no new promoters added</a:t>
+              <a:t>his tNPS week over week, now at the 33 target</a:t>
             </a:r>
             <a:endParaRPr lang="en-US" sz="1250" dirty="0"/>
           </a:p>
@@ -13686,9 +12638,9 @@
             <a:tbl>
               <a:tblPr/>
               <a:tblGrid>
-                <a:gridCol w="1600200"/>
+                <a:gridCol w="1143000"/>
                 <a:gridCol w="731520"/>
-                <a:gridCol w="1554480"/>
+                <a:gridCol w="2011680"/>
               </a:tblGrid>
               <a:tr h="329184">
                 <a:tc>
@@ -13708,7 +12660,7 @@
                           <a:ea typeface="Calibri" pitchFamily="34" charset="-122"/>
                           <a:cs typeface="Calibri" pitchFamily="34" charset="-120"/>
                         </a:rPr>
-                        <a:t>Agent</a:t>
+                        <a:t>KPI</a:t>
                       </a:r>
                       <a:endParaRPr lang="en-US" sz="1050" dirty="0">
                         <a:latin typeface="Calibri" charset="0"/>
@@ -13755,7 +12707,7 @@
                           <a:ea typeface="Calibri" pitchFamily="34" charset="-122"/>
                           <a:cs typeface="Calibri" pitchFamily="34" charset="-120"/>
                         </a:rPr>
-                        <a:t>tNPS now</a:t>
+                        <a:t>Now</a:t>
                       </a:r>
                       <a:endParaRPr lang="en-US" sz="1050" dirty="0">
                         <a:latin typeface="Calibri" charset="0"/>
@@ -13851,7 +12803,7 @@
                           <a:ea typeface="Calibri" pitchFamily="34" charset="-122"/>
                           <a:cs typeface="Calibri" pitchFamily="34" charset="-120"/>
                         </a:rPr>
-                        <a:t>Mohammed Ammar</a:t>
+                        <a:t>tNPS</a:t>
                       </a:r>
                       <a:endParaRPr lang="en-US" sz="1250" dirty="0">
                         <a:latin typeface="Calibri" charset="0"/>
@@ -13892,13 +12844,13 @@
                       <a:r>
                         <a:rPr lang="en-US" sz="1250" b="1" dirty="0">
                           <a:solidFill>
-                            <a:srgbClr val="B42318"/>
+                            <a:srgbClr val="1E7F5C"/>
                           </a:solidFill>
                           <a:latin typeface="Calibri" pitchFamily="34" charset="0"/>
                           <a:ea typeface="Calibri" pitchFamily="34" charset="-122"/>
                           <a:cs typeface="Calibri" pitchFamily="34" charset="-120"/>
                         </a:rPr>
-                        <a:t>−37.5</a:t>
+                        <a:t>33.3</a:t>
                       </a:r>
                       <a:endParaRPr lang="en-US" sz="1250" dirty="0">
                         <a:latin typeface="Calibri" charset="0"/>
@@ -13945,7 +12897,7 @@
                           <a:ea typeface="Calibri" pitchFamily="34" charset="-122"/>
                           <a:cs typeface="Calibri" pitchFamily="34" charset="-120"/>
                         </a:rPr>
-                        <a:t>0 or better</a:t>
+                        <a:t>33 or better every week</a:t>
                       </a:r>
                       <a:endParaRPr lang="en-US" sz="1250" dirty="0">
                         <a:latin typeface="Calibri" charset="0"/>
@@ -13994,7 +12946,7 @@
                           <a:ea typeface="Calibri" pitchFamily="34" charset="-122"/>
                           <a:cs typeface="Calibri" pitchFamily="34" charset="-120"/>
                         </a:rPr>
-                        <a:t>Mohamed Mahmoud</a:t>
+                        <a:t>Detractors</a:t>
                       </a:r>
                       <a:endParaRPr lang="en-US" sz="1250" dirty="0">
                         <a:latin typeface="Calibri" charset="0"/>
@@ -14041,7 +12993,7 @@
                           <a:ea typeface="Calibri" pitchFamily="34" charset="-122"/>
                           <a:cs typeface="Calibri" pitchFamily="34" charset="-120"/>
                         </a:rPr>
-                        <a:t>−20.0</a:t>
+                        <a:t>2</a:t>
                       </a:r>
                       <a:endParaRPr lang="en-US" sz="1250" dirty="0">
                         <a:latin typeface="Calibri" charset="0"/>
@@ -14088,7 +13040,7 @@
                           <a:ea typeface="Calibri" pitchFamily="34" charset="-122"/>
                           <a:cs typeface="Calibri" pitchFamily="34" charset="-120"/>
                         </a:rPr>
-                        <a:t>0 or better</a:t>
+                        <a:t>1 or fewer a week</a:t>
                       </a:r>
                       <a:endParaRPr lang="en-US" sz="1250" dirty="0">
                         <a:latin typeface="Calibri" charset="0"/>
@@ -14137,7 +13089,7 @@
                           <a:ea typeface="Calibri" pitchFamily="34" charset="-122"/>
                           <a:cs typeface="Calibri" pitchFamily="34" charset="-120"/>
                         </a:rPr>
-                        <a:t>Ahmed Elbanna</a:t>
+                        <a:t>aiCR</a:t>
                       </a:r>
                       <a:endParaRPr lang="en-US" sz="1250" dirty="0">
                         <a:latin typeface="Calibri" charset="0"/>
@@ -14184,7 +13136,7 @@
                           <a:ea typeface="Calibri" pitchFamily="34" charset="-122"/>
                           <a:cs typeface="Calibri" pitchFamily="34" charset="-120"/>
                         </a:rPr>
-                        <a:t>−15.4</a:t>
+                        <a:t>61.3%</a:t>
                       </a:r>
                       <a:endParaRPr lang="en-US" sz="1250" dirty="0">
                         <a:latin typeface="Calibri" charset="0"/>
@@ -14231,7 +13183,7 @@
                           <a:ea typeface="Calibri" pitchFamily="34" charset="-122"/>
                           <a:cs typeface="Calibri" pitchFamily="34" charset="-120"/>
                         </a:rPr>
-                        <a:t>0 or better</a:t>
+                        <a:t>62% or higher</a:t>
                       </a:r>
                       <a:endParaRPr lang="en-US" sz="1250" dirty="0">
                         <a:latin typeface="Calibri" charset="0"/>
@@ -14280,7 +13232,7 @@
                           <a:ea typeface="Calibri" pitchFamily="34" charset="-122"/>
                           <a:cs typeface="Calibri" pitchFamily="34" charset="-120"/>
                         </a:rPr>
-                        <a:t>All three</a:t>
+                        <a:t>Behaviors</a:t>
                       </a:r>
                       <a:endParaRPr lang="en-US" sz="1250" dirty="0">
                         <a:latin typeface="Calibri" charset="0"/>
@@ -14534,7 +13486,7 @@
                   <a:srgbClr val="3D4453"/>
                 </a:solidFill>
               </a:rPr>
-              <a:t>A 15 to 30 minute session with each of the three</a:t>
+              <a:t>A 15 to 30 minute session every week</a:t>
             </a:r>
             <a:endParaRPr lang="en-US" sz="1250" dirty="0"/>
           </a:p>
@@ -14552,7 +13504,7 @@
                   <a:srgbClr val="3D4453"/>
                 </a:solidFill>
               </a:rPr>
-              <a:t>Ammar: 2 calls a week, side by side</a:t>
+              <a:t>2 calls a week, side by side</a:t>
             </a:r>
             <a:endParaRPr lang="en-US" sz="1250" dirty="0"/>
           </a:p>
@@ -14570,7 +13522,7 @@
                   <a:srgbClr val="3D4453"/>
                 </a:solidFill>
               </a:rPr>
-              <a:t>Mohamed Mahmoud and Ahmed Elbanna: 2 to 4 calls before each session</a:t>
+              <a:t>His survey results reviewed with him the same week</a:t>
             </a:r>
             <a:endParaRPr lang="en-US" sz="1250" dirty="0"/>
           </a:p>
@@ -14748,7 +13700,7 @@
                   <a:srgbClr val="D9DDE6"/>
                 </a:solidFill>
               </a:rPr>
-              <a:t>Protected time off the phones for side-by-side coaching during nesting</a:t>
+              <a:t>Protected time off the phones for side-by-side coaching</a:t>
             </a:r>
             <a:endParaRPr lang="en-US" sz="1250" dirty="0"/>
           </a:p>
